--- a/15_Chrome_PW_Decryption.pptx
+++ b/15_Chrome_PW_Decryption.pptx
@@ -5,7 +5,7 @@
     <p:sldMasterId id="2147483662" r:id="rId1"/>
   </p:sldMasterIdLst>
   <p:notesMasterIdLst>
-    <p:notesMasterId r:id="rId27"/>
+    <p:notesMasterId r:id="rId28"/>
   </p:notesMasterIdLst>
   <p:sldIdLst>
     <p:sldId id="256" r:id="rId2"/>
@@ -14,76 +14,77 @@
     <p:sldId id="410" r:id="rId5"/>
     <p:sldId id="423" r:id="rId6"/>
     <p:sldId id="446" r:id="rId7"/>
-    <p:sldId id="439" r:id="rId8"/>
-    <p:sldId id="454" r:id="rId9"/>
-    <p:sldId id="421" r:id="rId10"/>
-    <p:sldId id="437" r:id="rId11"/>
-    <p:sldId id="411" r:id="rId12"/>
-    <p:sldId id="440" r:id="rId13"/>
-    <p:sldId id="441" r:id="rId14"/>
-    <p:sldId id="442" r:id="rId15"/>
-    <p:sldId id="443" r:id="rId16"/>
-    <p:sldId id="444" r:id="rId17"/>
-    <p:sldId id="415" r:id="rId18"/>
-    <p:sldId id="455" r:id="rId19"/>
-    <p:sldId id="452" r:id="rId20"/>
-    <p:sldId id="424" r:id="rId21"/>
-    <p:sldId id="453" r:id="rId22"/>
-    <p:sldId id="412" r:id="rId23"/>
-    <p:sldId id="438" r:id="rId24"/>
-    <p:sldId id="435" r:id="rId25"/>
-    <p:sldId id="287" r:id="rId26"/>
+    <p:sldId id="456" r:id="rId8"/>
+    <p:sldId id="439" r:id="rId9"/>
+    <p:sldId id="454" r:id="rId10"/>
+    <p:sldId id="421" r:id="rId11"/>
+    <p:sldId id="437" r:id="rId12"/>
+    <p:sldId id="411" r:id="rId13"/>
+    <p:sldId id="440" r:id="rId14"/>
+    <p:sldId id="441" r:id="rId15"/>
+    <p:sldId id="442" r:id="rId16"/>
+    <p:sldId id="443" r:id="rId17"/>
+    <p:sldId id="444" r:id="rId18"/>
+    <p:sldId id="415" r:id="rId19"/>
+    <p:sldId id="455" r:id="rId20"/>
+    <p:sldId id="452" r:id="rId21"/>
+    <p:sldId id="424" r:id="rId22"/>
+    <p:sldId id="453" r:id="rId23"/>
+    <p:sldId id="412" r:id="rId24"/>
+    <p:sldId id="438" r:id="rId25"/>
+    <p:sldId id="435" r:id="rId26"/>
+    <p:sldId id="287" r:id="rId27"/>
   </p:sldIdLst>
   <p:sldSz cx="9144000" cy="5143500" type="screen16x9"/>
   <p:notesSz cx="6858000" cy="9144000"/>
   <p:embeddedFontLst>
     <p:embeddedFont>
       <p:font typeface="D2Coding" panose="020B0609020101020101" pitchFamily="49" charset="-127"/>
-      <p:regular r:id="rId28"/>
-      <p:bold r:id="rId29"/>
+      <p:regular r:id="rId29"/>
+      <p:bold r:id="rId30"/>
     </p:embeddedFont>
     <p:embeddedFont>
       <p:font typeface="Montserrat" panose="00000500000000000000" pitchFamily="2" charset="0"/>
-      <p:regular r:id="rId30"/>
-      <p:bold r:id="rId31"/>
-      <p:italic r:id="rId32"/>
-      <p:boldItalic r:id="rId33"/>
+      <p:regular r:id="rId31"/>
+      <p:bold r:id="rId32"/>
+      <p:italic r:id="rId33"/>
+      <p:boldItalic r:id="rId34"/>
     </p:embeddedFont>
     <p:embeddedFont>
       <p:font typeface="Montserrat Medium" panose="00000600000000000000" pitchFamily="2" charset="0"/>
-      <p:regular r:id="rId34"/>
-      <p:bold r:id="rId35"/>
-      <p:italic r:id="rId36"/>
-      <p:boldItalic r:id="rId37"/>
+      <p:regular r:id="rId35"/>
+      <p:bold r:id="rId36"/>
+      <p:italic r:id="rId37"/>
+      <p:boldItalic r:id="rId38"/>
     </p:embeddedFont>
     <p:embeddedFont>
       <p:font typeface="맑은 고딕" panose="020B0503020000020004" pitchFamily="50" charset="-127"/>
-      <p:regular r:id="rId38"/>
-      <p:bold r:id="rId39"/>
+      <p:regular r:id="rId39"/>
+      <p:bold r:id="rId40"/>
     </p:embeddedFont>
     <p:embeddedFont>
       <p:font typeface="페이퍼로지 1 Thin" pitchFamily="2" charset="-127"/>
-      <p:regular r:id="rId40"/>
+      <p:regular r:id="rId41"/>
     </p:embeddedFont>
     <p:embeddedFont>
       <p:font typeface="페이퍼로지 2 ExtraLight" pitchFamily="2" charset="-127"/>
-      <p:regular r:id="rId41"/>
+      <p:regular r:id="rId42"/>
     </p:embeddedFont>
     <p:embeddedFont>
       <p:font typeface="페이퍼로지 3 Light" pitchFamily="2" charset="-127"/>
-      <p:regular r:id="rId42"/>
+      <p:regular r:id="rId43"/>
     </p:embeddedFont>
     <p:embeddedFont>
       <p:font typeface="페이퍼로지 4 Regular" pitchFamily="2" charset="-127"/>
-      <p:regular r:id="rId43"/>
+      <p:regular r:id="rId44"/>
     </p:embeddedFont>
     <p:embeddedFont>
       <p:font typeface="페이퍼로지 6 SemiBold" pitchFamily="2" charset="-127"/>
-      <p:bold r:id="rId44"/>
+      <p:bold r:id="rId45"/>
     </p:embeddedFont>
     <p:embeddedFont>
       <p:font typeface="페이퍼로지 7 Bold" pitchFamily="2" charset="-127"/>
-      <p:bold r:id="rId45"/>
+      <p:bold r:id="rId46"/>
     </p:embeddedFont>
   </p:embeddedFontLst>
   <p:defaultTextStyle>
@@ -673,6 +674,133 @@
         <p:cNvPr id="1" name="Shape 164">
           <a:extLst>
             <a:ext uri="{FF2B5EF4-FFF2-40B4-BE49-F238E27FC236}">
+              <a16:creationId xmlns:a16="http://schemas.microsoft.com/office/drawing/2014/main" id="{F79841E5-7387-565D-40B6-1A4E0A3E3A02}"/>
+            </a:ext>
+          </a:extLst>
+        </p:cNvPr>
+        <p:cNvGrpSpPr/>
+        <p:nvPr/>
+      </p:nvGrpSpPr>
+      <p:grpSpPr>
+        <a:xfrm>
+          <a:off x="0" y="0"/>
+          <a:ext cx="0" cy="0"/>
+          <a:chOff x="0" y="0"/>
+          <a:chExt cx="0" cy="0"/>
+        </a:xfrm>
+      </p:grpSpPr>
+      <p:sp>
+        <p:nvSpPr>
+          <p:cNvPr id="165" name="Google Shape;165;g344fced8951_0_265:notes">
+            <a:extLst>
+              <a:ext uri="{FF2B5EF4-FFF2-40B4-BE49-F238E27FC236}">
+                <a16:creationId xmlns:a16="http://schemas.microsoft.com/office/drawing/2014/main" id="{D0E06BD1-7365-008C-17DB-48B97A12E94F}"/>
+              </a:ext>
+            </a:extLst>
+          </p:cNvPr>
+          <p:cNvSpPr>
+            <a:spLocks noGrp="1" noRot="1" noChangeAspect="1"/>
+          </p:cNvSpPr>
+          <p:nvPr>
+            <p:ph type="sldImg" idx="2"/>
+          </p:nvPr>
+        </p:nvSpPr>
+        <p:spPr>
+          <a:xfrm>
+            <a:off x="381000" y="685800"/>
+            <a:ext cx="6096000" cy="3429000"/>
+          </a:xfrm>
+          <a:custGeom>
+            <a:avLst/>
+            <a:gdLst/>
+            <a:ahLst/>
+            <a:cxnLst/>
+            <a:rect l="l" t="t" r="r" b="b"/>
+            <a:pathLst>
+              <a:path w="120000" h="120000" extrusionOk="0">
+                <a:moveTo>
+                  <a:pt x="0" y="0"/>
+                </a:moveTo>
+                <a:lnTo>
+                  <a:pt x="120000" y="0"/>
+                </a:lnTo>
+                <a:lnTo>
+                  <a:pt x="120000" y="120000"/>
+                </a:lnTo>
+                <a:lnTo>
+                  <a:pt x="0" y="120000"/>
+                </a:lnTo>
+                <a:close/>
+              </a:path>
+            </a:pathLst>
+          </a:custGeom>
+        </p:spPr>
+      </p:sp>
+      <p:sp>
+        <p:nvSpPr>
+          <p:cNvPr id="166" name="Google Shape;166;g344fced8951_0_265:notes">
+            <a:extLst>
+              <a:ext uri="{FF2B5EF4-FFF2-40B4-BE49-F238E27FC236}">
+                <a16:creationId xmlns:a16="http://schemas.microsoft.com/office/drawing/2014/main" id="{9E53E03C-A3DD-201D-1AF1-E9F3ECCF750B}"/>
+              </a:ext>
+            </a:extLst>
+          </p:cNvPr>
+          <p:cNvSpPr txBox="1">
+            <a:spLocks noGrp="1"/>
+          </p:cNvSpPr>
+          <p:nvPr>
+            <p:ph type="body" idx="1"/>
+          </p:nvPr>
+        </p:nvSpPr>
+        <p:spPr>
+          <a:xfrm>
+            <a:off x="685800" y="4343400"/>
+            <a:ext cx="5486400" cy="4114800"/>
+          </a:xfrm>
+          <a:prstGeom prst="rect">
+            <a:avLst/>
+          </a:prstGeom>
+        </p:spPr>
+        <p:txBody>
+          <a:bodyPr spcFirstLastPara="1" wrap="square" lIns="91425" tIns="91425" rIns="91425" bIns="91425" anchor="t" anchorCtr="0">
+            <a:noAutofit/>
+          </a:bodyPr>
+          <a:lstStyle/>
+          <a:p>
+            <a:pPr marL="0" lvl="0" indent="0" algn="l" rtl="0">
+              <a:spcBef>
+                <a:spcPts val="0"/>
+              </a:spcBef>
+              <a:spcAft>
+                <a:spcPts val="0"/>
+              </a:spcAft>
+              <a:buNone/>
+            </a:pPr>
+            <a:endParaRPr/>
+          </a:p>
+        </p:txBody>
+      </p:sp>
+    </p:spTree>
+    <p:extLst>
+      <p:ext uri="{BB962C8B-B14F-4D97-AF65-F5344CB8AC3E}">
+        <p14:creationId xmlns:p14="http://schemas.microsoft.com/office/powerpoint/2010/main" val="1325033772"/>
+      </p:ext>
+    </p:extLst>
+  </p:cSld>
+  <p:clrMapOvr>
+    <a:masterClrMapping/>
+  </p:clrMapOvr>
+</p:notes>
+</file>
+
+<file path=ppt/notesSlides/notesSlide11.xml><?xml version="1.0" encoding="utf-8"?>
+<p:notes xmlns:a="http://schemas.openxmlformats.org/drawingml/2006/main" xmlns:r="http://schemas.openxmlformats.org/officeDocument/2006/relationships" xmlns:p="http://schemas.openxmlformats.org/presentationml/2006/main" showMasterSp="0" showMasterPhAnim="0">
+  <p:cSld>
+    <p:spTree>
+      <p:nvGrpSpPr>
+        <p:cNvPr id="1" name="Shape 164">
+          <a:extLst>
+            <a:ext uri="{FF2B5EF4-FFF2-40B4-BE49-F238E27FC236}">
               <a16:creationId xmlns:a16="http://schemas.microsoft.com/office/drawing/2014/main" id="{1654B385-0755-1397-37F5-7A05193EB064}"/>
             </a:ext>
           </a:extLst>
@@ -817,7 +945,7 @@
 </p:notes>
 </file>
 
-<file path=ppt/notesSlides/notesSlide11.xml><?xml version="1.0" encoding="utf-8"?>
+<file path=ppt/notesSlides/notesSlide12.xml><?xml version="1.0" encoding="utf-8"?>
 <p:notes xmlns:a="http://schemas.openxmlformats.org/drawingml/2006/main" xmlns:r="http://schemas.openxmlformats.org/officeDocument/2006/relationships" xmlns:p="http://schemas.openxmlformats.org/presentationml/2006/main" showMasterSp="0" showMasterPhAnim="0">
   <p:cSld>
     <p:spTree>
@@ -948,7 +1076,7 @@
 </p:notes>
 </file>
 
-<file path=ppt/notesSlides/notesSlide12.xml><?xml version="1.0" encoding="utf-8"?>
+<file path=ppt/notesSlides/notesSlide13.xml><?xml version="1.0" encoding="utf-8"?>
 <p:notes xmlns:a="http://schemas.openxmlformats.org/drawingml/2006/main" xmlns:r="http://schemas.openxmlformats.org/officeDocument/2006/relationships" xmlns:p="http://schemas.openxmlformats.org/presentationml/2006/main" showMasterSp="0" showMasterPhAnim="0">
   <p:cSld>
     <p:spTree>
@@ -1079,7 +1207,7 @@
 </p:notes>
 </file>
 
-<file path=ppt/notesSlides/notesSlide13.xml><?xml version="1.0" encoding="utf-8"?>
+<file path=ppt/notesSlides/notesSlide14.xml><?xml version="1.0" encoding="utf-8"?>
 <p:notes xmlns:a="http://schemas.openxmlformats.org/drawingml/2006/main" xmlns:r="http://schemas.openxmlformats.org/officeDocument/2006/relationships" xmlns:p="http://schemas.openxmlformats.org/presentationml/2006/main" showMasterSp="0" showMasterPhAnim="0">
   <p:cSld>
     <p:spTree>
@@ -1210,7 +1338,7 @@
 </p:notes>
 </file>
 
-<file path=ppt/notesSlides/notesSlide14.xml><?xml version="1.0" encoding="utf-8"?>
+<file path=ppt/notesSlides/notesSlide15.xml><?xml version="1.0" encoding="utf-8"?>
 <p:notes xmlns:a="http://schemas.openxmlformats.org/drawingml/2006/main" xmlns:r="http://schemas.openxmlformats.org/officeDocument/2006/relationships" xmlns:p="http://schemas.openxmlformats.org/presentationml/2006/main" showMasterSp="0" showMasterPhAnim="0">
   <p:cSld>
     <p:spTree>
@@ -1341,7 +1469,7 @@
 </p:notes>
 </file>
 
-<file path=ppt/notesSlides/notesSlide15.xml><?xml version="1.0" encoding="utf-8"?>
+<file path=ppt/notesSlides/notesSlide16.xml><?xml version="1.0" encoding="utf-8"?>
 <p:notes xmlns:a="http://schemas.openxmlformats.org/drawingml/2006/main" xmlns:r="http://schemas.openxmlformats.org/officeDocument/2006/relationships" xmlns:p="http://schemas.openxmlformats.org/presentationml/2006/main" showMasterSp="0" showMasterPhAnim="0">
   <p:cSld>
     <p:spTree>
@@ -1482,7 +1610,7 @@
 </p:notes>
 </file>
 
-<file path=ppt/notesSlides/notesSlide16.xml><?xml version="1.0" encoding="utf-8"?>
+<file path=ppt/notesSlides/notesSlide17.xml><?xml version="1.0" encoding="utf-8"?>
 <p:notes xmlns:a="http://schemas.openxmlformats.org/drawingml/2006/main" xmlns:r="http://schemas.openxmlformats.org/officeDocument/2006/relationships" xmlns:p="http://schemas.openxmlformats.org/presentationml/2006/main" showMasterSp="0" showMasterPhAnim="0">
   <p:cSld>
     <p:spTree>
@@ -1623,7 +1751,7 @@
 </p:notes>
 </file>
 
-<file path=ppt/notesSlides/notesSlide17.xml><?xml version="1.0" encoding="utf-8"?>
+<file path=ppt/notesSlides/notesSlide18.xml><?xml version="1.0" encoding="utf-8"?>
 <p:notes xmlns:a="http://schemas.openxmlformats.org/drawingml/2006/main" xmlns:r="http://schemas.openxmlformats.org/officeDocument/2006/relationships" xmlns:p="http://schemas.openxmlformats.org/presentationml/2006/main" showMasterSp="0" showMasterPhAnim="0">
   <p:cSld>
     <p:spTree>
@@ -1750,7 +1878,7 @@
 </p:notes>
 </file>
 
-<file path=ppt/notesSlides/notesSlide18.xml><?xml version="1.0" encoding="utf-8"?>
+<file path=ppt/notesSlides/notesSlide19.xml><?xml version="1.0" encoding="utf-8"?>
 <p:notes xmlns:a="http://schemas.openxmlformats.org/drawingml/2006/main" xmlns:r="http://schemas.openxmlformats.org/officeDocument/2006/relationships" xmlns:p="http://schemas.openxmlformats.org/presentationml/2006/main" showMasterSp="0" showMasterPhAnim="0">
   <p:cSld>
     <p:spTree>
@@ -1868,158 +1996,6 @@
     <p:extLst>
       <p:ext uri="{BB962C8B-B14F-4D97-AF65-F5344CB8AC3E}">
         <p14:creationId xmlns:p14="http://schemas.microsoft.com/office/powerpoint/2010/main" val="3719982714"/>
-      </p:ext>
-    </p:extLst>
-  </p:cSld>
-  <p:clrMapOvr>
-    <a:masterClrMapping/>
-  </p:clrMapOvr>
-</p:notes>
-</file>
-
-<file path=ppt/notesSlides/notesSlide19.xml><?xml version="1.0" encoding="utf-8"?>
-<p:notes xmlns:a="http://schemas.openxmlformats.org/drawingml/2006/main" xmlns:r="http://schemas.openxmlformats.org/officeDocument/2006/relationships" xmlns:p="http://schemas.openxmlformats.org/presentationml/2006/main" showMasterSp="0" showMasterPhAnim="0">
-  <p:cSld>
-    <p:spTree>
-      <p:nvGrpSpPr>
-        <p:cNvPr id="1" name="Shape 164">
-          <a:extLst>
-            <a:ext uri="{FF2B5EF4-FFF2-40B4-BE49-F238E27FC236}">
-              <a16:creationId xmlns:a16="http://schemas.microsoft.com/office/drawing/2014/main" id="{42E9C64B-CA61-5B6A-EF7C-9BA678F8E478}"/>
-            </a:ext>
-          </a:extLst>
-        </p:cNvPr>
-        <p:cNvGrpSpPr/>
-        <p:nvPr/>
-      </p:nvGrpSpPr>
-      <p:grpSpPr>
-        <a:xfrm>
-          <a:off x="0" y="0"/>
-          <a:ext cx="0" cy="0"/>
-          <a:chOff x="0" y="0"/>
-          <a:chExt cx="0" cy="0"/>
-        </a:xfrm>
-      </p:grpSpPr>
-      <p:sp>
-        <p:nvSpPr>
-          <p:cNvPr id="165" name="Google Shape;165;g344fced8951_0_265:notes">
-            <a:extLst>
-              <a:ext uri="{FF2B5EF4-FFF2-40B4-BE49-F238E27FC236}">
-                <a16:creationId xmlns:a16="http://schemas.microsoft.com/office/drawing/2014/main" id="{BD0F5933-CD44-6737-B803-A4372E75070A}"/>
-              </a:ext>
-            </a:extLst>
-          </p:cNvPr>
-          <p:cNvSpPr>
-            <a:spLocks noGrp="1" noRot="1" noChangeAspect="1"/>
-          </p:cNvSpPr>
-          <p:nvPr>
-            <p:ph type="sldImg" idx="2"/>
-          </p:nvPr>
-        </p:nvSpPr>
-        <p:spPr>
-          <a:xfrm>
-            <a:off x="381000" y="685800"/>
-            <a:ext cx="6096000" cy="3429000"/>
-          </a:xfrm>
-          <a:custGeom>
-            <a:avLst/>
-            <a:gdLst/>
-            <a:ahLst/>
-            <a:cxnLst/>
-            <a:rect l="l" t="t" r="r" b="b"/>
-            <a:pathLst>
-              <a:path w="120000" h="120000" extrusionOk="0">
-                <a:moveTo>
-                  <a:pt x="0" y="0"/>
-                </a:moveTo>
-                <a:lnTo>
-                  <a:pt x="120000" y="0"/>
-                </a:lnTo>
-                <a:lnTo>
-                  <a:pt x="120000" y="120000"/>
-                </a:lnTo>
-                <a:lnTo>
-                  <a:pt x="0" y="120000"/>
-                </a:lnTo>
-                <a:close/>
-              </a:path>
-            </a:pathLst>
-          </a:custGeom>
-        </p:spPr>
-      </p:sp>
-      <p:sp>
-        <p:nvSpPr>
-          <p:cNvPr id="166" name="Google Shape;166;g344fced8951_0_265:notes">
-            <a:extLst>
-              <a:ext uri="{FF2B5EF4-FFF2-40B4-BE49-F238E27FC236}">
-                <a16:creationId xmlns:a16="http://schemas.microsoft.com/office/drawing/2014/main" id="{D0556E82-07EB-980D-494E-01A9C6B83389}"/>
-              </a:ext>
-            </a:extLst>
-          </p:cNvPr>
-          <p:cNvSpPr txBox="1">
-            <a:spLocks noGrp="1"/>
-          </p:cNvSpPr>
-          <p:nvPr>
-            <p:ph type="body" idx="1"/>
-          </p:nvPr>
-        </p:nvSpPr>
-        <p:spPr>
-          <a:xfrm>
-            <a:off x="685800" y="4343400"/>
-            <a:ext cx="5486400" cy="4114800"/>
-          </a:xfrm>
-          <a:prstGeom prst="rect">
-            <a:avLst/>
-          </a:prstGeom>
-        </p:spPr>
-        <p:txBody>
-          <a:bodyPr spcFirstLastPara="1" wrap="square" lIns="91425" tIns="91425" rIns="91425" bIns="91425" anchor="t" anchorCtr="0">
-            <a:noAutofit/>
-          </a:bodyPr>
-          <a:lstStyle/>
-          <a:p>
-            <a:pPr marL="0" marR="0" lvl="0" indent="0" algn="l" defTabSz="914400" rtl="0" eaLnBrk="1" fontAlgn="auto" latinLnBrk="0" hangingPunct="1">
-              <a:lnSpc>
-                <a:spcPct val="100000"/>
-              </a:lnSpc>
-              <a:spcBef>
-                <a:spcPts val="0"/>
-              </a:spcBef>
-              <a:spcAft>
-                <a:spcPts val="0"/>
-              </a:spcAft>
-              <a:buClr>
-                <a:srgbClr val="000000"/>
-              </a:buClr>
-              <a:buSzPts val="1100"/>
-              <a:buFont typeface="Arial"/>
-              <a:buNone/>
-              <a:tabLst/>
-              <a:defRPr/>
-            </a:pPr>
-            <a:r>
-              <a:rPr lang="en-US" altLang="ko-KR"/>
-              <a:t>https://chromium.googlesource.com/chromium/src/+/HEAD/chrome/browser/os_crypt</a:t>
-            </a:r>
-          </a:p>
-          <a:p>
-            <a:pPr marL="0" lvl="0" indent="0" algn="l" rtl="0">
-              <a:spcBef>
-                <a:spcPts val="0"/>
-              </a:spcBef>
-              <a:spcAft>
-                <a:spcPts val="0"/>
-              </a:spcAft>
-              <a:buNone/>
-            </a:pPr>
-            <a:endParaRPr/>
-          </a:p>
-        </p:txBody>
-      </p:sp>
-    </p:spTree>
-    <p:extLst>
-      <p:ext uri="{BB962C8B-B14F-4D97-AF65-F5344CB8AC3E}">
-        <p14:creationId xmlns:p14="http://schemas.microsoft.com/office/powerpoint/2010/main" val="1328880015"/>
       </p:ext>
     </p:extLst>
   </p:cSld>
@@ -2164,6 +2140,158 @@
         <p:cNvPr id="1" name="Shape 164">
           <a:extLst>
             <a:ext uri="{FF2B5EF4-FFF2-40B4-BE49-F238E27FC236}">
+              <a16:creationId xmlns:a16="http://schemas.microsoft.com/office/drawing/2014/main" id="{42E9C64B-CA61-5B6A-EF7C-9BA678F8E478}"/>
+            </a:ext>
+          </a:extLst>
+        </p:cNvPr>
+        <p:cNvGrpSpPr/>
+        <p:nvPr/>
+      </p:nvGrpSpPr>
+      <p:grpSpPr>
+        <a:xfrm>
+          <a:off x="0" y="0"/>
+          <a:ext cx="0" cy="0"/>
+          <a:chOff x="0" y="0"/>
+          <a:chExt cx="0" cy="0"/>
+        </a:xfrm>
+      </p:grpSpPr>
+      <p:sp>
+        <p:nvSpPr>
+          <p:cNvPr id="165" name="Google Shape;165;g344fced8951_0_265:notes">
+            <a:extLst>
+              <a:ext uri="{FF2B5EF4-FFF2-40B4-BE49-F238E27FC236}">
+                <a16:creationId xmlns:a16="http://schemas.microsoft.com/office/drawing/2014/main" id="{BD0F5933-CD44-6737-B803-A4372E75070A}"/>
+              </a:ext>
+            </a:extLst>
+          </p:cNvPr>
+          <p:cNvSpPr>
+            <a:spLocks noGrp="1" noRot="1" noChangeAspect="1"/>
+          </p:cNvSpPr>
+          <p:nvPr>
+            <p:ph type="sldImg" idx="2"/>
+          </p:nvPr>
+        </p:nvSpPr>
+        <p:spPr>
+          <a:xfrm>
+            <a:off x="381000" y="685800"/>
+            <a:ext cx="6096000" cy="3429000"/>
+          </a:xfrm>
+          <a:custGeom>
+            <a:avLst/>
+            <a:gdLst/>
+            <a:ahLst/>
+            <a:cxnLst/>
+            <a:rect l="l" t="t" r="r" b="b"/>
+            <a:pathLst>
+              <a:path w="120000" h="120000" extrusionOk="0">
+                <a:moveTo>
+                  <a:pt x="0" y="0"/>
+                </a:moveTo>
+                <a:lnTo>
+                  <a:pt x="120000" y="0"/>
+                </a:lnTo>
+                <a:lnTo>
+                  <a:pt x="120000" y="120000"/>
+                </a:lnTo>
+                <a:lnTo>
+                  <a:pt x="0" y="120000"/>
+                </a:lnTo>
+                <a:close/>
+              </a:path>
+            </a:pathLst>
+          </a:custGeom>
+        </p:spPr>
+      </p:sp>
+      <p:sp>
+        <p:nvSpPr>
+          <p:cNvPr id="166" name="Google Shape;166;g344fced8951_0_265:notes">
+            <a:extLst>
+              <a:ext uri="{FF2B5EF4-FFF2-40B4-BE49-F238E27FC236}">
+                <a16:creationId xmlns:a16="http://schemas.microsoft.com/office/drawing/2014/main" id="{D0556E82-07EB-980D-494E-01A9C6B83389}"/>
+              </a:ext>
+            </a:extLst>
+          </p:cNvPr>
+          <p:cNvSpPr txBox="1">
+            <a:spLocks noGrp="1"/>
+          </p:cNvSpPr>
+          <p:nvPr>
+            <p:ph type="body" idx="1"/>
+          </p:nvPr>
+        </p:nvSpPr>
+        <p:spPr>
+          <a:xfrm>
+            <a:off x="685800" y="4343400"/>
+            <a:ext cx="5486400" cy="4114800"/>
+          </a:xfrm>
+          <a:prstGeom prst="rect">
+            <a:avLst/>
+          </a:prstGeom>
+        </p:spPr>
+        <p:txBody>
+          <a:bodyPr spcFirstLastPara="1" wrap="square" lIns="91425" tIns="91425" rIns="91425" bIns="91425" anchor="t" anchorCtr="0">
+            <a:noAutofit/>
+          </a:bodyPr>
+          <a:lstStyle/>
+          <a:p>
+            <a:pPr marL="0" marR="0" lvl="0" indent="0" algn="l" defTabSz="914400" rtl="0" eaLnBrk="1" fontAlgn="auto" latinLnBrk="0" hangingPunct="1">
+              <a:lnSpc>
+                <a:spcPct val="100000"/>
+              </a:lnSpc>
+              <a:spcBef>
+                <a:spcPts val="0"/>
+              </a:spcBef>
+              <a:spcAft>
+                <a:spcPts val="0"/>
+              </a:spcAft>
+              <a:buClr>
+                <a:srgbClr val="000000"/>
+              </a:buClr>
+              <a:buSzPts val="1100"/>
+              <a:buFont typeface="Arial"/>
+              <a:buNone/>
+              <a:tabLst/>
+              <a:defRPr/>
+            </a:pPr>
+            <a:r>
+              <a:rPr lang="en-US" altLang="ko-KR"/>
+              <a:t>https://chromium.googlesource.com/chromium/src/+/HEAD/chrome/browser/os_crypt</a:t>
+            </a:r>
+          </a:p>
+          <a:p>
+            <a:pPr marL="0" lvl="0" indent="0" algn="l" rtl="0">
+              <a:spcBef>
+                <a:spcPts val="0"/>
+              </a:spcBef>
+              <a:spcAft>
+                <a:spcPts val="0"/>
+              </a:spcAft>
+              <a:buNone/>
+            </a:pPr>
+            <a:endParaRPr/>
+          </a:p>
+        </p:txBody>
+      </p:sp>
+    </p:spTree>
+    <p:extLst>
+      <p:ext uri="{BB962C8B-B14F-4D97-AF65-F5344CB8AC3E}">
+        <p14:creationId xmlns:p14="http://schemas.microsoft.com/office/powerpoint/2010/main" val="1328880015"/>
+      </p:ext>
+    </p:extLst>
+  </p:cSld>
+  <p:clrMapOvr>
+    <a:masterClrMapping/>
+  </p:clrMapOvr>
+</p:notes>
+</file>
+
+<file path=ppt/notesSlides/notesSlide21.xml><?xml version="1.0" encoding="utf-8"?>
+<p:notes xmlns:a="http://schemas.openxmlformats.org/drawingml/2006/main" xmlns:r="http://schemas.openxmlformats.org/officeDocument/2006/relationships" xmlns:p="http://schemas.openxmlformats.org/presentationml/2006/main" showMasterSp="0" showMasterPhAnim="0">
+  <p:cSld>
+    <p:spTree>
+      <p:nvGrpSpPr>
+        <p:cNvPr id="1" name="Shape 164">
+          <a:extLst>
+            <a:ext uri="{FF2B5EF4-FFF2-40B4-BE49-F238E27FC236}">
               <a16:creationId xmlns:a16="http://schemas.microsoft.com/office/drawing/2014/main" id="{84F6CB45-8757-E4D7-D8C3-963A45E08376}"/>
             </a:ext>
           </a:extLst>
@@ -2283,7 +2411,7 @@
 </p:notes>
 </file>
 
-<file path=ppt/notesSlides/notesSlide21.xml><?xml version="1.0" encoding="utf-8"?>
+<file path=ppt/notesSlides/notesSlide22.xml><?xml version="1.0" encoding="utf-8"?>
 <p:notes xmlns:a="http://schemas.openxmlformats.org/drawingml/2006/main" xmlns:r="http://schemas.openxmlformats.org/officeDocument/2006/relationships" xmlns:p="http://schemas.openxmlformats.org/presentationml/2006/main" showMasterSp="0" showMasterPhAnim="0">
   <p:cSld>
     <p:spTree>
@@ -2410,7 +2538,7 @@
 </p:notes>
 </file>
 
-<file path=ppt/notesSlides/notesSlide22.xml><?xml version="1.0" encoding="utf-8"?>
+<file path=ppt/notesSlides/notesSlide23.xml><?xml version="1.0" encoding="utf-8"?>
 <p:notes xmlns:a="http://schemas.openxmlformats.org/drawingml/2006/main" xmlns:r="http://schemas.openxmlformats.org/officeDocument/2006/relationships" xmlns:p="http://schemas.openxmlformats.org/presentationml/2006/main" showMasterSp="0" showMasterPhAnim="0">
   <p:cSld>
     <p:spTree>
@@ -2541,7 +2669,7 @@
 </p:notes>
 </file>
 
-<file path=ppt/notesSlides/notesSlide23.xml><?xml version="1.0" encoding="utf-8"?>
+<file path=ppt/notesSlides/notesSlide24.xml><?xml version="1.0" encoding="utf-8"?>
 <p:notes xmlns:a="http://schemas.openxmlformats.org/drawingml/2006/main" xmlns:r="http://schemas.openxmlformats.org/officeDocument/2006/relationships" xmlns:p="http://schemas.openxmlformats.org/presentationml/2006/main" showMasterSp="0" showMasterPhAnim="0">
   <p:cSld>
     <p:spTree>
@@ -2668,7 +2796,7 @@
 </p:notes>
 </file>
 
-<file path=ppt/notesSlides/notesSlide24.xml><?xml version="1.0" encoding="utf-8"?>
+<file path=ppt/notesSlides/notesSlide25.xml><?xml version="1.0" encoding="utf-8"?>
 <p:notes xmlns:a="http://schemas.openxmlformats.org/drawingml/2006/main" xmlns:r="http://schemas.openxmlformats.org/officeDocument/2006/relationships" xmlns:p="http://schemas.openxmlformats.org/presentationml/2006/main" showMasterSp="0" showMasterPhAnim="0">
   <p:cSld>
     <p:spTree>
@@ -2795,7 +2923,7 @@
 </p:notes>
 </file>
 
-<file path=ppt/notesSlides/notesSlide25.xml><?xml version="1.0" encoding="utf-8"?>
+<file path=ppt/notesSlides/notesSlide26.xml><?xml version="1.0" encoding="utf-8"?>
 <p:notes xmlns:a="http://schemas.openxmlformats.org/drawingml/2006/main" xmlns:r="http://schemas.openxmlformats.org/officeDocument/2006/relationships" xmlns:p="http://schemas.openxmlformats.org/presentationml/2006/main" showMasterSp="0" showMasterPhAnim="0">
   <p:cSld>
     <p:spTree>
@@ -3450,6 +3578,133 @@
         <p:cNvPr id="1" name="Shape 164">
           <a:extLst>
             <a:ext uri="{FF2B5EF4-FFF2-40B4-BE49-F238E27FC236}">
+              <a16:creationId xmlns:a16="http://schemas.microsoft.com/office/drawing/2014/main" id="{ABD30DF6-A24A-2289-D71A-768FE07B00BF}"/>
+            </a:ext>
+          </a:extLst>
+        </p:cNvPr>
+        <p:cNvGrpSpPr/>
+        <p:nvPr/>
+      </p:nvGrpSpPr>
+      <p:grpSpPr>
+        <a:xfrm>
+          <a:off x="0" y="0"/>
+          <a:ext cx="0" cy="0"/>
+          <a:chOff x="0" y="0"/>
+          <a:chExt cx="0" cy="0"/>
+        </a:xfrm>
+      </p:grpSpPr>
+      <p:sp>
+        <p:nvSpPr>
+          <p:cNvPr id="165" name="Google Shape;165;g344fced8951_0_265:notes">
+            <a:extLst>
+              <a:ext uri="{FF2B5EF4-FFF2-40B4-BE49-F238E27FC236}">
+                <a16:creationId xmlns:a16="http://schemas.microsoft.com/office/drawing/2014/main" id="{70B1D2BE-6FAC-5E27-969F-DC833EC9E14C}"/>
+              </a:ext>
+            </a:extLst>
+          </p:cNvPr>
+          <p:cNvSpPr>
+            <a:spLocks noGrp="1" noRot="1" noChangeAspect="1"/>
+          </p:cNvSpPr>
+          <p:nvPr>
+            <p:ph type="sldImg" idx="2"/>
+          </p:nvPr>
+        </p:nvSpPr>
+        <p:spPr>
+          <a:xfrm>
+            <a:off x="381000" y="685800"/>
+            <a:ext cx="6096000" cy="3429000"/>
+          </a:xfrm>
+          <a:custGeom>
+            <a:avLst/>
+            <a:gdLst/>
+            <a:ahLst/>
+            <a:cxnLst/>
+            <a:rect l="l" t="t" r="r" b="b"/>
+            <a:pathLst>
+              <a:path w="120000" h="120000" extrusionOk="0">
+                <a:moveTo>
+                  <a:pt x="0" y="0"/>
+                </a:moveTo>
+                <a:lnTo>
+                  <a:pt x="120000" y="0"/>
+                </a:lnTo>
+                <a:lnTo>
+                  <a:pt x="120000" y="120000"/>
+                </a:lnTo>
+                <a:lnTo>
+                  <a:pt x="0" y="120000"/>
+                </a:lnTo>
+                <a:close/>
+              </a:path>
+            </a:pathLst>
+          </a:custGeom>
+        </p:spPr>
+      </p:sp>
+      <p:sp>
+        <p:nvSpPr>
+          <p:cNvPr id="166" name="Google Shape;166;g344fced8951_0_265:notes">
+            <a:extLst>
+              <a:ext uri="{FF2B5EF4-FFF2-40B4-BE49-F238E27FC236}">
+                <a16:creationId xmlns:a16="http://schemas.microsoft.com/office/drawing/2014/main" id="{4AAAB81F-CF37-AD58-DB0B-039D417DBEAB}"/>
+              </a:ext>
+            </a:extLst>
+          </p:cNvPr>
+          <p:cNvSpPr txBox="1">
+            <a:spLocks noGrp="1"/>
+          </p:cNvSpPr>
+          <p:nvPr>
+            <p:ph type="body" idx="1"/>
+          </p:nvPr>
+        </p:nvSpPr>
+        <p:spPr>
+          <a:xfrm>
+            <a:off x="685800" y="4343400"/>
+            <a:ext cx="5486400" cy="4114800"/>
+          </a:xfrm>
+          <a:prstGeom prst="rect">
+            <a:avLst/>
+          </a:prstGeom>
+        </p:spPr>
+        <p:txBody>
+          <a:bodyPr spcFirstLastPara="1" wrap="square" lIns="91425" tIns="91425" rIns="91425" bIns="91425" anchor="t" anchorCtr="0">
+            <a:noAutofit/>
+          </a:bodyPr>
+          <a:lstStyle/>
+          <a:p>
+            <a:pPr marL="0" lvl="0" indent="0" algn="l" rtl="0">
+              <a:spcBef>
+                <a:spcPts val="0"/>
+              </a:spcBef>
+              <a:spcAft>
+                <a:spcPts val="0"/>
+              </a:spcAft>
+              <a:buNone/>
+            </a:pPr>
+            <a:endParaRPr/>
+          </a:p>
+        </p:txBody>
+      </p:sp>
+    </p:spTree>
+    <p:extLst>
+      <p:ext uri="{BB962C8B-B14F-4D97-AF65-F5344CB8AC3E}">
+        <p14:creationId xmlns:p14="http://schemas.microsoft.com/office/powerpoint/2010/main" val="4227180967"/>
+      </p:ext>
+    </p:extLst>
+  </p:cSld>
+  <p:clrMapOvr>
+    <a:masterClrMapping/>
+  </p:clrMapOvr>
+</p:notes>
+</file>
+
+<file path=ppt/notesSlides/notesSlide8.xml><?xml version="1.0" encoding="utf-8"?>
+<p:notes xmlns:a="http://schemas.openxmlformats.org/drawingml/2006/main" xmlns:r="http://schemas.openxmlformats.org/officeDocument/2006/relationships" xmlns:p="http://schemas.openxmlformats.org/presentationml/2006/main" showMasterSp="0" showMasterPhAnim="0">
+  <p:cSld>
+    <p:spTree>
+      <p:nvGrpSpPr>
+        <p:cNvPr id="1" name="Shape 164">
+          <a:extLst>
+            <a:ext uri="{FF2B5EF4-FFF2-40B4-BE49-F238E27FC236}">
               <a16:creationId xmlns:a16="http://schemas.microsoft.com/office/drawing/2014/main" id="{ED9E058A-60DB-91B0-C059-B8506338BA58}"/>
             </a:ext>
           </a:extLst>
@@ -3594,7 +3849,7 @@
 </p:notes>
 </file>
 
-<file path=ppt/notesSlides/notesSlide8.xml><?xml version="1.0" encoding="utf-8"?>
+<file path=ppt/notesSlides/notesSlide9.xml><?xml version="1.0" encoding="utf-8"?>
 <p:notes xmlns:a="http://schemas.openxmlformats.org/drawingml/2006/main" xmlns:r="http://schemas.openxmlformats.org/officeDocument/2006/relationships" xmlns:p="http://schemas.openxmlformats.org/presentationml/2006/main" showMasterSp="0" showMasterPhAnim="0">
   <p:cSld>
     <p:spTree>
@@ -3712,133 +3967,6 @@
     <p:extLst>
       <p:ext uri="{BB962C8B-B14F-4D97-AF65-F5344CB8AC3E}">
         <p14:creationId xmlns:p14="http://schemas.microsoft.com/office/powerpoint/2010/main" val="2823288062"/>
-      </p:ext>
-    </p:extLst>
-  </p:cSld>
-  <p:clrMapOvr>
-    <a:masterClrMapping/>
-  </p:clrMapOvr>
-</p:notes>
-</file>
-
-<file path=ppt/notesSlides/notesSlide9.xml><?xml version="1.0" encoding="utf-8"?>
-<p:notes xmlns:a="http://schemas.openxmlformats.org/drawingml/2006/main" xmlns:r="http://schemas.openxmlformats.org/officeDocument/2006/relationships" xmlns:p="http://schemas.openxmlformats.org/presentationml/2006/main" showMasterSp="0" showMasterPhAnim="0">
-  <p:cSld>
-    <p:spTree>
-      <p:nvGrpSpPr>
-        <p:cNvPr id="1" name="Shape 164">
-          <a:extLst>
-            <a:ext uri="{FF2B5EF4-FFF2-40B4-BE49-F238E27FC236}">
-              <a16:creationId xmlns:a16="http://schemas.microsoft.com/office/drawing/2014/main" id="{F79841E5-7387-565D-40B6-1A4E0A3E3A02}"/>
-            </a:ext>
-          </a:extLst>
-        </p:cNvPr>
-        <p:cNvGrpSpPr/>
-        <p:nvPr/>
-      </p:nvGrpSpPr>
-      <p:grpSpPr>
-        <a:xfrm>
-          <a:off x="0" y="0"/>
-          <a:ext cx="0" cy="0"/>
-          <a:chOff x="0" y="0"/>
-          <a:chExt cx="0" cy="0"/>
-        </a:xfrm>
-      </p:grpSpPr>
-      <p:sp>
-        <p:nvSpPr>
-          <p:cNvPr id="165" name="Google Shape;165;g344fced8951_0_265:notes">
-            <a:extLst>
-              <a:ext uri="{FF2B5EF4-FFF2-40B4-BE49-F238E27FC236}">
-                <a16:creationId xmlns:a16="http://schemas.microsoft.com/office/drawing/2014/main" id="{D0E06BD1-7365-008C-17DB-48B97A12E94F}"/>
-              </a:ext>
-            </a:extLst>
-          </p:cNvPr>
-          <p:cNvSpPr>
-            <a:spLocks noGrp="1" noRot="1" noChangeAspect="1"/>
-          </p:cNvSpPr>
-          <p:nvPr>
-            <p:ph type="sldImg" idx="2"/>
-          </p:nvPr>
-        </p:nvSpPr>
-        <p:spPr>
-          <a:xfrm>
-            <a:off x="381000" y="685800"/>
-            <a:ext cx="6096000" cy="3429000"/>
-          </a:xfrm>
-          <a:custGeom>
-            <a:avLst/>
-            <a:gdLst/>
-            <a:ahLst/>
-            <a:cxnLst/>
-            <a:rect l="l" t="t" r="r" b="b"/>
-            <a:pathLst>
-              <a:path w="120000" h="120000" extrusionOk="0">
-                <a:moveTo>
-                  <a:pt x="0" y="0"/>
-                </a:moveTo>
-                <a:lnTo>
-                  <a:pt x="120000" y="0"/>
-                </a:lnTo>
-                <a:lnTo>
-                  <a:pt x="120000" y="120000"/>
-                </a:lnTo>
-                <a:lnTo>
-                  <a:pt x="0" y="120000"/>
-                </a:lnTo>
-                <a:close/>
-              </a:path>
-            </a:pathLst>
-          </a:custGeom>
-        </p:spPr>
-      </p:sp>
-      <p:sp>
-        <p:nvSpPr>
-          <p:cNvPr id="166" name="Google Shape;166;g344fced8951_0_265:notes">
-            <a:extLst>
-              <a:ext uri="{FF2B5EF4-FFF2-40B4-BE49-F238E27FC236}">
-                <a16:creationId xmlns:a16="http://schemas.microsoft.com/office/drawing/2014/main" id="{9E53E03C-A3DD-201D-1AF1-E9F3ECCF750B}"/>
-              </a:ext>
-            </a:extLst>
-          </p:cNvPr>
-          <p:cNvSpPr txBox="1">
-            <a:spLocks noGrp="1"/>
-          </p:cNvSpPr>
-          <p:nvPr>
-            <p:ph type="body" idx="1"/>
-          </p:nvPr>
-        </p:nvSpPr>
-        <p:spPr>
-          <a:xfrm>
-            <a:off x="685800" y="4343400"/>
-            <a:ext cx="5486400" cy="4114800"/>
-          </a:xfrm>
-          <a:prstGeom prst="rect">
-            <a:avLst/>
-          </a:prstGeom>
-        </p:spPr>
-        <p:txBody>
-          <a:bodyPr spcFirstLastPara="1" wrap="square" lIns="91425" tIns="91425" rIns="91425" bIns="91425" anchor="t" anchorCtr="0">
-            <a:noAutofit/>
-          </a:bodyPr>
-          <a:lstStyle/>
-          <a:p>
-            <a:pPr marL="0" lvl="0" indent="0" algn="l" rtl="0">
-              <a:spcBef>
-                <a:spcPts val="0"/>
-              </a:spcBef>
-              <a:spcAft>
-                <a:spcPts val="0"/>
-              </a:spcAft>
-              <a:buNone/>
-            </a:pPr>
-            <a:endParaRPr/>
-          </a:p>
-        </p:txBody>
-      </p:sp>
-    </p:spTree>
-    <p:extLst>
-      <p:ext uri="{BB962C8B-B14F-4D97-AF65-F5344CB8AC3E}">
-        <p14:creationId xmlns:p14="http://schemas.microsoft.com/office/powerpoint/2010/main" val="1325033772"/>
       </p:ext>
     </p:extLst>
   </p:cSld>
@@ -11071,6 +11199,1381 @@
         <p:cNvPr id="1" name="Shape 167">
           <a:extLst>
             <a:ext uri="{FF2B5EF4-FFF2-40B4-BE49-F238E27FC236}">
+              <a16:creationId xmlns:a16="http://schemas.microsoft.com/office/drawing/2014/main" id="{BFA7B48A-AF8D-103B-693C-8FABB8EEBEC4}"/>
+            </a:ext>
+          </a:extLst>
+        </p:cNvPr>
+        <p:cNvGrpSpPr/>
+        <p:nvPr/>
+      </p:nvGrpSpPr>
+      <p:grpSpPr>
+        <a:xfrm>
+          <a:off x="0" y="0"/>
+          <a:ext cx="0" cy="0"/>
+          <a:chOff x="0" y="0"/>
+          <a:chExt cx="0" cy="0"/>
+        </a:xfrm>
+      </p:grpSpPr>
+      <p:sp>
+        <p:nvSpPr>
+          <p:cNvPr id="169" name="Google Shape;169;p19">
+            <a:extLst>
+              <a:ext uri="{FF2B5EF4-FFF2-40B4-BE49-F238E27FC236}">
+                <a16:creationId xmlns:a16="http://schemas.microsoft.com/office/drawing/2014/main" id="{34A9ADDB-49B6-20F0-272A-982F20380EAE}"/>
+              </a:ext>
+            </a:extLst>
+          </p:cNvPr>
+          <p:cNvSpPr txBox="1"/>
+          <p:nvPr/>
+        </p:nvSpPr>
+        <p:spPr>
+          <a:xfrm flipH="1">
+            <a:off x="452550" y="885617"/>
+            <a:ext cx="8238900" cy="4136865"/>
+          </a:xfrm>
+          <a:prstGeom prst="rect">
+            <a:avLst/>
+          </a:prstGeom>
+          <a:noFill/>
+          <a:ln>
+            <a:noFill/>
+          </a:ln>
+        </p:spPr>
+        <p:txBody>
+          <a:bodyPr spcFirstLastPara="1" wrap="square" lIns="91425" tIns="45700" rIns="91425" bIns="45700" anchor="t" anchorCtr="0">
+            <a:noAutofit/>
+          </a:bodyPr>
+          <a:lstStyle/>
+          <a:p>
+            <a:pPr marL="177800" lvl="2" indent="-177800">
+              <a:buSzPts val="1600"/>
+              <a:buFont typeface="Arial" panose="020B0604020202020204" pitchFamily="34" charset="0"/>
+              <a:buChar char="•"/>
+            </a:pPr>
+            <a:r>
+              <a:rPr lang="en-US" altLang="ko-KR" sz="1600">
+                <a:solidFill>
+                  <a:schemeClr val="accent3">
+                    <a:lumMod val="75000"/>
+                  </a:schemeClr>
+                </a:solidFill>
+                <a:latin typeface="페이퍼로지 4 Regular" charset="-127"/>
+                <a:ea typeface="페이퍼로지 4 Regular" charset="-127"/>
+                <a:cs typeface="Montserrat SemiBold"/>
+                <a:sym typeface="Montserrat SemiBold"/>
+              </a:rPr>
+              <a:t>Decrypt</a:t>
+            </a:r>
+            <a:r>
+              <a:rPr lang="ko-KR" altLang="en-US" sz="1600">
+                <a:solidFill>
+                  <a:schemeClr val="accent3">
+                    <a:lumMod val="75000"/>
+                  </a:schemeClr>
+                </a:solidFill>
+                <a:latin typeface="페이퍼로지 4 Regular" charset="-127"/>
+                <a:ea typeface="페이퍼로지 4 Regular" charset="-127"/>
+                <a:cs typeface="Montserrat SemiBold"/>
+                <a:sym typeface="Montserrat SemiBold"/>
+              </a:rPr>
+              <a:t>를 위한 단계</a:t>
+            </a:r>
+            <a:endParaRPr lang="en-US" altLang="ko-KR" sz="1600">
+              <a:solidFill>
+                <a:schemeClr val="accent3">
+                  <a:lumMod val="75000"/>
+                </a:schemeClr>
+              </a:solidFill>
+              <a:latin typeface="페이퍼로지 4 Regular" charset="-127"/>
+              <a:ea typeface="페이퍼로지 4 Regular" charset="-127"/>
+              <a:cs typeface="Montserrat SemiBold"/>
+              <a:sym typeface="Montserrat SemiBold"/>
+            </a:endParaRPr>
+          </a:p>
+          <a:p>
+            <a:pPr marL="177800" lvl="2" indent="-177800">
+              <a:buSzPts val="1600"/>
+              <a:buFont typeface="Arial" panose="020B0604020202020204" pitchFamily="34" charset="0"/>
+              <a:buChar char="•"/>
+            </a:pPr>
+            <a:endParaRPr lang="en-US" altLang="ko-KR">
+              <a:solidFill>
+                <a:schemeClr val="dk1"/>
+              </a:solidFill>
+              <a:latin typeface="페이퍼로지 4 Regular" charset="-127"/>
+              <a:ea typeface="페이퍼로지 4 Regular" charset="-127"/>
+              <a:cs typeface="Montserrat SemiBold"/>
+              <a:sym typeface="Montserrat SemiBold"/>
+            </a:endParaRPr>
+          </a:p>
+          <a:p>
+            <a:pPr marL="342900" lvl="2" indent="-342900">
+              <a:buSzPts val="1600"/>
+              <a:buAutoNum type="arabicPeriod"/>
+            </a:pPr>
+            <a:r>
+              <a:rPr lang="en-US" altLang="ko-KR">
+                <a:solidFill>
+                  <a:schemeClr val="dk1"/>
+                </a:solidFill>
+                <a:latin typeface="페이퍼로지 4 Regular" charset="-127"/>
+                <a:ea typeface="페이퍼로지 4 Regular" charset="-127"/>
+                <a:cs typeface="Montserrat SemiBold"/>
+                <a:sym typeface="Montserrat SemiBold"/>
+              </a:rPr>
+              <a:t>App-Bound Encrypted</a:t>
+            </a:r>
+            <a:r>
+              <a:rPr lang="ko-KR" altLang="en-US">
+                <a:solidFill>
+                  <a:schemeClr val="dk1"/>
+                </a:solidFill>
+                <a:latin typeface="페이퍼로지 4 Regular" charset="-127"/>
+                <a:ea typeface="페이퍼로지 4 Regular" charset="-127"/>
+                <a:cs typeface="Montserrat SemiBold"/>
+                <a:sym typeface="Montserrat SemiBold"/>
+              </a:rPr>
+              <a:t> </a:t>
+            </a:r>
+            <a:r>
+              <a:rPr lang="en-US" altLang="ko-KR">
+                <a:solidFill>
+                  <a:schemeClr val="dk1"/>
+                </a:solidFill>
+                <a:latin typeface="페이퍼로지 4 Regular" charset="-127"/>
+                <a:ea typeface="페이퍼로지 4 Regular" charset="-127"/>
+                <a:cs typeface="Montserrat SemiBold"/>
+                <a:sym typeface="Montserrat SemiBold"/>
+              </a:rPr>
+              <a:t>Key</a:t>
+            </a:r>
+            <a:r>
+              <a:rPr lang="ko-KR" altLang="en-US">
+                <a:solidFill>
+                  <a:schemeClr val="dk1"/>
+                </a:solidFill>
+                <a:latin typeface="페이퍼로지 4 Regular" charset="-127"/>
+                <a:ea typeface="페이퍼로지 4 Regular" charset="-127"/>
+                <a:cs typeface="Montserrat SemiBold"/>
+                <a:sym typeface="Montserrat SemiBold"/>
+              </a:rPr>
+              <a:t> 추출 및 식별 </a:t>
+            </a:r>
+            <a:br>
+              <a:rPr lang="en-US" altLang="ko-KR" sz="1200">
+                <a:solidFill>
+                  <a:schemeClr val="dk1"/>
+                </a:solidFill>
+                <a:latin typeface="페이퍼로지 4 Regular" charset="-127"/>
+                <a:ea typeface="페이퍼로지 4 Regular" charset="-127"/>
+                <a:cs typeface="Montserrat SemiBold"/>
+                <a:sym typeface="Montserrat SemiBold"/>
+              </a:rPr>
+            </a:br>
+            <a:br>
+              <a:rPr lang="en-US" altLang="ko-KR" sz="400">
+                <a:solidFill>
+                  <a:schemeClr val="dk1"/>
+                </a:solidFill>
+                <a:latin typeface="페이퍼로지 4 Regular" charset="-127"/>
+                <a:ea typeface="페이퍼로지 4 Regular" charset="-127"/>
+                <a:cs typeface="Montserrat SemiBold"/>
+                <a:sym typeface="Montserrat SemiBold"/>
+              </a:rPr>
+            </a:br>
+            <a:r>
+              <a:rPr lang="en-US" altLang="ko-KR" sz="1200">
+                <a:solidFill>
+                  <a:schemeClr val="tx1">
+                    <a:lumMod val="65000"/>
+                    <a:lumOff val="35000"/>
+                  </a:schemeClr>
+                </a:solidFill>
+                <a:latin typeface="페이퍼로지 4 Regular" charset="-127"/>
+                <a:ea typeface="페이퍼로지 4 Regular" charset="-127"/>
+                <a:cs typeface="Montserrat SemiBold"/>
+                <a:sym typeface="Montserrat SemiBold"/>
+              </a:rPr>
+              <a:t>Local State </a:t>
+            </a:r>
+            <a:r>
+              <a:rPr lang="ko-KR" altLang="en-US" sz="1200">
+                <a:solidFill>
+                  <a:schemeClr val="tx1">
+                    <a:lumMod val="65000"/>
+                    <a:lumOff val="35000"/>
+                  </a:schemeClr>
+                </a:solidFill>
+                <a:latin typeface="페이퍼로지 4 Regular" charset="-127"/>
+                <a:ea typeface="페이퍼로지 4 Regular" charset="-127"/>
+                <a:cs typeface="Montserrat SemiBold"/>
+                <a:sym typeface="Montserrat SemiBold"/>
+              </a:rPr>
+              <a:t>파일의 </a:t>
+            </a:r>
+            <a:r>
+              <a:rPr lang="en-US" altLang="ko-KR" sz="1200">
+                <a:solidFill>
+                  <a:schemeClr val="tx1">
+                    <a:lumMod val="65000"/>
+                    <a:lumOff val="35000"/>
+                  </a:schemeClr>
+                </a:solidFill>
+                <a:latin typeface="페이퍼로지 4 Regular" charset="-127"/>
+                <a:ea typeface="페이퍼로지 4 Regular" charset="-127"/>
+                <a:cs typeface="Montserrat SemiBold"/>
+                <a:sym typeface="Montserrat SemiBold"/>
+              </a:rPr>
+              <a:t>os_crypt.app_bound_encrypted_key </a:t>
+            </a:r>
+            <a:r>
+              <a:rPr lang="ko-KR" altLang="en-US" sz="1200">
+                <a:solidFill>
+                  <a:schemeClr val="tx1">
+                    <a:lumMod val="65000"/>
+                    <a:lumOff val="35000"/>
+                  </a:schemeClr>
+                </a:solidFill>
+                <a:latin typeface="페이퍼로지 4 Regular" charset="-127"/>
+                <a:ea typeface="페이퍼로지 4 Regular" charset="-127"/>
+                <a:cs typeface="Montserrat SemiBold"/>
+                <a:sym typeface="Montserrat SemiBold"/>
+              </a:rPr>
+              <a:t>값 추출</a:t>
+            </a:r>
+            <a:br>
+              <a:rPr lang="en-US" altLang="ko-KR" sz="1200">
+                <a:solidFill>
+                  <a:schemeClr val="tx1">
+                    <a:lumMod val="65000"/>
+                    <a:lumOff val="35000"/>
+                  </a:schemeClr>
+                </a:solidFill>
+                <a:latin typeface="페이퍼로지 4 Regular" charset="-127"/>
+                <a:ea typeface="페이퍼로지 4 Regular" charset="-127"/>
+                <a:cs typeface="Montserrat SemiBold"/>
+                <a:sym typeface="Montserrat SemiBold"/>
+              </a:rPr>
+            </a:br>
+            <a:br>
+              <a:rPr lang="en-US" altLang="ko-KR" sz="400">
+                <a:solidFill>
+                  <a:schemeClr val="tx1">
+                    <a:lumMod val="65000"/>
+                    <a:lumOff val="35000"/>
+                  </a:schemeClr>
+                </a:solidFill>
+                <a:latin typeface="페이퍼로지 4 Regular" charset="-127"/>
+                <a:ea typeface="페이퍼로지 4 Regular" charset="-127"/>
+                <a:cs typeface="Montserrat SemiBold"/>
+                <a:sym typeface="Montserrat SemiBold"/>
+              </a:rPr>
+            </a:br>
+            <a:r>
+              <a:rPr lang="en-US" altLang="ko-KR" sz="1200">
+                <a:solidFill>
+                  <a:schemeClr val="tx1">
+                    <a:lumMod val="65000"/>
+                    <a:lumOff val="35000"/>
+                  </a:schemeClr>
+                </a:solidFill>
+                <a:latin typeface="페이퍼로지 4 Regular" charset="-127"/>
+                <a:ea typeface="페이퍼로지 4 Regular" charset="-127"/>
+                <a:cs typeface="Montserrat SemiBold"/>
+                <a:sym typeface="Montserrat SemiBold"/>
+              </a:rPr>
+              <a:t>- </a:t>
+            </a:r>
+            <a:r>
+              <a:rPr lang="ko-KR" altLang="en-US" sz="1200">
+                <a:solidFill>
+                  <a:schemeClr val="tx1">
+                    <a:lumMod val="65000"/>
+                    <a:lumOff val="35000"/>
+                  </a:schemeClr>
+                </a:solidFill>
+                <a:latin typeface="페이퍼로지 4 Regular" charset="-127"/>
+                <a:ea typeface="페이퍼로지 4 Regular" charset="-127"/>
+                <a:cs typeface="Montserrat SemiBold"/>
+                <a:sym typeface="Montserrat SemiBold"/>
+              </a:rPr>
+              <a:t>특징</a:t>
+            </a:r>
+            <a:r>
+              <a:rPr lang="en-US" altLang="ko-KR" sz="1200">
+                <a:solidFill>
+                  <a:schemeClr val="tx1">
+                    <a:lumMod val="65000"/>
+                    <a:lumOff val="35000"/>
+                  </a:schemeClr>
+                </a:solidFill>
+                <a:latin typeface="페이퍼로지 4 Regular" charset="-127"/>
+                <a:ea typeface="페이퍼로지 4 Regular" charset="-127"/>
+                <a:cs typeface="Montserrat SemiBold"/>
+                <a:sym typeface="Montserrat SemiBold"/>
+              </a:rPr>
+              <a:t>: Base64 encoded, “ APPB ” 4 byte Magic Header included (Need to Pre-processing)</a:t>
+            </a:r>
+          </a:p>
+          <a:p>
+            <a:pPr marL="342900" lvl="2" indent="-342900">
+              <a:buSzPts val="1600"/>
+              <a:buAutoNum type="arabicPeriod"/>
+            </a:pPr>
+            <a:endParaRPr lang="en-US" altLang="ko-KR" sz="800">
+              <a:solidFill>
+                <a:schemeClr val="dk1"/>
+              </a:solidFill>
+              <a:latin typeface="페이퍼로지 4 Regular" charset="-127"/>
+              <a:ea typeface="페이퍼로지 4 Regular" charset="-127"/>
+              <a:cs typeface="Montserrat SemiBold"/>
+              <a:sym typeface="Montserrat SemiBold"/>
+            </a:endParaRPr>
+          </a:p>
+          <a:p>
+            <a:pPr marL="342900" lvl="2" indent="-342900">
+              <a:buSzPts val="1600"/>
+              <a:buAutoNum type="arabicPeriod"/>
+            </a:pPr>
+            <a:r>
+              <a:rPr lang="en-US" altLang="ko-KR">
+                <a:solidFill>
+                  <a:schemeClr val="dk1"/>
+                </a:solidFill>
+                <a:latin typeface="페이퍼로지 4 Regular" charset="-127"/>
+                <a:ea typeface="페이퍼로지 4 Regular" charset="-127"/>
+                <a:cs typeface="Montserrat SemiBold"/>
+                <a:sym typeface="Montserrat SemiBold"/>
+              </a:rPr>
+              <a:t>Elevation Service</a:t>
+            </a:r>
+            <a:r>
+              <a:rPr lang="ko-KR" altLang="en-US">
+                <a:solidFill>
+                  <a:schemeClr val="dk1"/>
+                </a:solidFill>
+                <a:latin typeface="페이퍼로지 4 Regular" charset="-127"/>
+                <a:ea typeface="페이퍼로지 4 Regular" charset="-127"/>
+                <a:cs typeface="Montserrat SemiBold"/>
+                <a:sym typeface="Montserrat SemiBold"/>
+              </a:rPr>
+              <a:t>를 이용한 키 복호화 </a:t>
+            </a:r>
+            <a:r>
+              <a:rPr lang="en-US" altLang="ko-KR">
+                <a:solidFill>
+                  <a:schemeClr val="dk1"/>
+                </a:solidFill>
+                <a:latin typeface="페이퍼로지 4 Regular" charset="-127"/>
+                <a:ea typeface="페이퍼로지 4 Regular" charset="-127"/>
+                <a:cs typeface="Montserrat SemiBold"/>
+                <a:sym typeface="Montserrat SemiBold"/>
+              </a:rPr>
+              <a:t>(COM </a:t>
+            </a:r>
+            <a:r>
+              <a:rPr lang="ko-KR" altLang="en-US">
+                <a:solidFill>
+                  <a:schemeClr val="dk1"/>
+                </a:solidFill>
+                <a:latin typeface="페이퍼로지 4 Regular" charset="-127"/>
+                <a:ea typeface="페이퍼로지 4 Regular" charset="-127"/>
+                <a:cs typeface="Montserrat SemiBold"/>
+                <a:sym typeface="Montserrat SemiBold"/>
+              </a:rPr>
+              <a:t>상호작용</a:t>
+            </a:r>
+            <a:r>
+              <a:rPr lang="en-US" altLang="ko-KR">
+                <a:solidFill>
+                  <a:schemeClr val="dk1"/>
+                </a:solidFill>
+                <a:latin typeface="페이퍼로지 4 Regular" charset="-127"/>
+                <a:ea typeface="페이퍼로지 4 Regular" charset="-127"/>
+                <a:cs typeface="Montserrat SemiBold"/>
+                <a:sym typeface="Montserrat SemiBold"/>
+              </a:rPr>
+              <a:t>) </a:t>
+            </a:r>
+            <a:br>
+              <a:rPr lang="en-US" altLang="ko-KR" sz="1200">
+                <a:solidFill>
+                  <a:schemeClr val="dk1"/>
+                </a:solidFill>
+                <a:latin typeface="페이퍼로지 4 Regular" charset="-127"/>
+                <a:ea typeface="페이퍼로지 4 Regular" charset="-127"/>
+                <a:cs typeface="Montserrat SemiBold"/>
+                <a:sym typeface="Montserrat SemiBold"/>
+              </a:rPr>
+            </a:br>
+            <a:br>
+              <a:rPr lang="en-US" altLang="ko-KR" sz="400">
+                <a:solidFill>
+                  <a:schemeClr val="dk1"/>
+                </a:solidFill>
+                <a:latin typeface="페이퍼로지 4 Regular" charset="-127"/>
+                <a:ea typeface="페이퍼로지 4 Regular" charset="-127"/>
+                <a:cs typeface="Montserrat SemiBold"/>
+                <a:sym typeface="Montserrat SemiBold"/>
+              </a:rPr>
+            </a:br>
+            <a:r>
+              <a:rPr lang="ko-KR" altLang="en-US" sz="1200">
+                <a:solidFill>
+                  <a:schemeClr val="tx1">
+                    <a:lumMod val="65000"/>
+                    <a:lumOff val="35000"/>
+                  </a:schemeClr>
+                </a:solidFill>
+                <a:latin typeface="페이퍼로지 4 Regular" charset="-127"/>
+                <a:ea typeface="페이퍼로지 4 Regular" charset="-127"/>
+                <a:cs typeface="Montserrat SemiBold"/>
+                <a:sym typeface="Montserrat SemiBold"/>
+              </a:rPr>
+              <a:t>암호화된 </a:t>
+            </a:r>
+            <a:r>
+              <a:rPr lang="en-US" altLang="ko-KR" sz="1200">
+                <a:solidFill>
+                  <a:schemeClr val="tx1">
+                    <a:lumMod val="65000"/>
+                    <a:lumOff val="35000"/>
+                  </a:schemeClr>
+                </a:solidFill>
+                <a:latin typeface="페이퍼로지 4 Regular" charset="-127"/>
+                <a:ea typeface="페이퍼로지 4 Regular" charset="-127"/>
+                <a:cs typeface="Montserrat SemiBold"/>
+                <a:sym typeface="Montserrat SemiBold"/>
+              </a:rPr>
+              <a:t>BLOB</a:t>
+            </a:r>
+            <a:r>
+              <a:rPr lang="ko-KR" altLang="en-US" sz="1200">
+                <a:solidFill>
+                  <a:schemeClr val="tx1">
+                    <a:lumMod val="65000"/>
+                    <a:lumOff val="35000"/>
+                  </a:schemeClr>
+                </a:solidFill>
+                <a:latin typeface="페이퍼로지 4 Regular" charset="-127"/>
+                <a:ea typeface="페이퍼로지 4 Regular" charset="-127"/>
+                <a:cs typeface="Montserrat SemiBold"/>
+                <a:sym typeface="Montserrat SemiBold"/>
+              </a:rPr>
+              <a:t>을 풀기 위해서 </a:t>
+            </a:r>
+            <a:r>
+              <a:rPr lang="en-US" altLang="ko-KR" sz="1200">
+                <a:solidFill>
+                  <a:schemeClr val="tx1">
+                    <a:lumMod val="65000"/>
+                    <a:lumOff val="35000"/>
+                  </a:schemeClr>
+                </a:solidFill>
+                <a:latin typeface="페이퍼로지 4 Regular" charset="-127"/>
+                <a:ea typeface="페이퍼로지 4 Regular" charset="-127"/>
+                <a:cs typeface="Montserrat SemiBold"/>
+                <a:sym typeface="Montserrat SemiBold"/>
+              </a:rPr>
+              <a:t>Elevation Service</a:t>
+            </a:r>
+            <a:r>
+              <a:rPr lang="ko-KR" altLang="en-US" sz="1200">
+                <a:solidFill>
+                  <a:schemeClr val="tx1">
+                    <a:lumMod val="65000"/>
+                    <a:lumOff val="35000"/>
+                  </a:schemeClr>
+                </a:solidFill>
+                <a:latin typeface="페이퍼로지 4 Regular" charset="-127"/>
+                <a:ea typeface="페이퍼로지 4 Regular" charset="-127"/>
+                <a:cs typeface="Montserrat SemiBold"/>
+                <a:sym typeface="Montserrat SemiBold"/>
+              </a:rPr>
+              <a:t>와 통신해야 하고</a:t>
+            </a:r>
+            <a:r>
+              <a:rPr lang="en-US" altLang="ko-KR" sz="1200">
+                <a:solidFill>
+                  <a:schemeClr val="tx1">
+                    <a:lumMod val="65000"/>
+                    <a:lumOff val="35000"/>
+                  </a:schemeClr>
+                </a:solidFill>
+                <a:latin typeface="페이퍼로지 4 Regular" charset="-127"/>
+                <a:ea typeface="페이퍼로지 4 Regular" charset="-127"/>
+                <a:cs typeface="Montserrat SemiBold"/>
+                <a:sym typeface="Montserrat SemiBold"/>
+              </a:rPr>
+              <a:t>, </a:t>
+            </a:r>
+            <a:r>
+              <a:rPr lang="ko-KR" altLang="en-US" sz="1200">
+                <a:solidFill>
+                  <a:schemeClr val="tx1">
+                    <a:lumMod val="65000"/>
+                    <a:lumOff val="35000"/>
+                  </a:schemeClr>
+                </a:solidFill>
+                <a:latin typeface="페이퍼로지 4 Regular" charset="-127"/>
+                <a:ea typeface="페이퍼로지 4 Regular" charset="-127"/>
+                <a:cs typeface="Montserrat SemiBold"/>
+                <a:sym typeface="Montserrat SemiBold"/>
+              </a:rPr>
+              <a:t>그를 위해 </a:t>
+            </a:r>
+            <a:r>
+              <a:rPr lang="en-US" altLang="ko-KR" sz="1200">
+                <a:solidFill>
+                  <a:schemeClr val="tx1">
+                    <a:lumMod val="65000"/>
+                    <a:lumOff val="35000"/>
+                  </a:schemeClr>
+                </a:solidFill>
+                <a:latin typeface="페이퍼로지 4 Regular" charset="-127"/>
+                <a:ea typeface="페이퍼로지 4 Regular" charset="-127"/>
+                <a:cs typeface="Montserrat SemiBold"/>
+                <a:sym typeface="Montserrat SemiBold"/>
+              </a:rPr>
+              <a:t>IElevator </a:t>
+            </a:r>
+            <a:r>
+              <a:rPr lang="ko-KR" altLang="en-US" sz="1200">
+                <a:solidFill>
+                  <a:schemeClr val="tx1">
+                    <a:lumMod val="65000"/>
+                    <a:lumOff val="35000"/>
+                  </a:schemeClr>
+                </a:solidFill>
+                <a:latin typeface="페이퍼로지 4 Regular" charset="-127"/>
+                <a:ea typeface="페이퍼로지 4 Regular" charset="-127"/>
+                <a:cs typeface="Montserrat SemiBold"/>
+                <a:sym typeface="Montserrat SemiBold"/>
+              </a:rPr>
+              <a:t>인터페이스 이용</a:t>
+            </a:r>
+            <a:endParaRPr lang="en-US" altLang="ko-KR" sz="1200">
+              <a:solidFill>
+                <a:schemeClr val="tx1">
+                  <a:lumMod val="65000"/>
+                  <a:lumOff val="35000"/>
+                </a:schemeClr>
+              </a:solidFill>
+              <a:latin typeface="페이퍼로지 4 Regular" charset="-127"/>
+              <a:ea typeface="페이퍼로지 4 Regular" charset="-127"/>
+              <a:cs typeface="Montserrat SemiBold"/>
+              <a:sym typeface="Montserrat SemiBold"/>
+            </a:endParaRPr>
+          </a:p>
+          <a:p>
+            <a:pPr lvl="3">
+              <a:buSzPts val="1600"/>
+            </a:pPr>
+            <a:endParaRPr lang="en-US" altLang="ko-KR" sz="400">
+              <a:solidFill>
+                <a:schemeClr val="tx1">
+                  <a:lumMod val="65000"/>
+                  <a:lumOff val="35000"/>
+                </a:schemeClr>
+              </a:solidFill>
+              <a:latin typeface="페이퍼로지 4 Regular" charset="-127"/>
+              <a:ea typeface="페이퍼로지 4 Regular" charset="-127"/>
+              <a:cs typeface="Montserrat SemiBold"/>
+              <a:sym typeface="Montserrat SemiBold"/>
+            </a:endParaRPr>
+          </a:p>
+          <a:p>
+            <a:pPr lvl="3" indent="542925">
+              <a:buSzPts val="1600"/>
+            </a:pPr>
+            <a:r>
+              <a:rPr lang="en-US" altLang="ko-KR" sz="1200">
+                <a:solidFill>
+                  <a:schemeClr val="tx1">
+                    <a:lumMod val="65000"/>
+                    <a:lumOff val="35000"/>
+                  </a:schemeClr>
+                </a:solidFill>
+                <a:latin typeface="페이퍼로지 4 Regular" charset="-127"/>
+                <a:ea typeface="페이퍼로지 4 Regular" charset="-127"/>
+                <a:cs typeface="Montserrat SemiBold"/>
+                <a:sym typeface="Montserrat SemiBold"/>
+              </a:rPr>
+              <a:t>- </a:t>
+            </a:r>
+            <a:r>
+              <a:rPr lang="ko-KR" altLang="en-US" sz="1200">
+                <a:solidFill>
+                  <a:schemeClr val="tx1">
+                    <a:lumMod val="65000"/>
+                    <a:lumOff val="35000"/>
+                  </a:schemeClr>
+                </a:solidFill>
+                <a:latin typeface="페이퍼로지 4 Regular" charset="-127"/>
+                <a:ea typeface="페이퍼로지 4 Regular" charset="-127"/>
+                <a:cs typeface="Montserrat SemiBold"/>
+                <a:sym typeface="Montserrat SemiBold"/>
+              </a:rPr>
+              <a:t>과정 </a:t>
+            </a:r>
+            <a:r>
+              <a:rPr lang="en-US" altLang="ko-KR" sz="1200">
+                <a:solidFill>
+                  <a:schemeClr val="tx1">
+                    <a:lumMod val="65000"/>
+                    <a:lumOff val="35000"/>
+                  </a:schemeClr>
+                </a:solidFill>
+                <a:latin typeface="페이퍼로지 4 Regular" charset="-127"/>
+                <a:ea typeface="페이퍼로지 4 Regular" charset="-127"/>
+                <a:cs typeface="Montserrat SemiBold"/>
+                <a:sym typeface="Montserrat SemiBold"/>
+              </a:rPr>
+              <a:t>1. </a:t>
+            </a:r>
+            <a:r>
+              <a:rPr lang="ko-KR" altLang="en-US" sz="1200">
+                <a:solidFill>
+                  <a:schemeClr val="tx1">
+                    <a:lumMod val="65000"/>
+                    <a:lumOff val="35000"/>
+                  </a:schemeClr>
+                </a:solidFill>
+                <a:latin typeface="페이퍼로지 4 Regular" charset="-127"/>
+                <a:ea typeface="페이퍼로지 4 Regular" charset="-127"/>
+                <a:cs typeface="Montserrat SemiBold"/>
+                <a:sym typeface="Montserrat SemiBold"/>
+              </a:rPr>
+              <a:t>인터페이스 호출 </a:t>
+            </a:r>
+            <a:endParaRPr lang="en-US" altLang="ko-KR" sz="1200">
+              <a:solidFill>
+                <a:schemeClr val="tx1">
+                  <a:lumMod val="65000"/>
+                  <a:lumOff val="35000"/>
+                </a:schemeClr>
+              </a:solidFill>
+              <a:latin typeface="페이퍼로지 4 Regular" charset="-127"/>
+              <a:ea typeface="페이퍼로지 4 Regular" charset="-127"/>
+              <a:cs typeface="Montserrat SemiBold"/>
+              <a:sym typeface="Montserrat SemiBold"/>
+            </a:endParaRPr>
+          </a:p>
+          <a:p>
+            <a:pPr lvl="3" indent="542925">
+              <a:buSzPts val="1600"/>
+            </a:pPr>
+            <a:r>
+              <a:rPr lang="en-US" altLang="ko-KR" sz="1200">
+                <a:solidFill>
+                  <a:schemeClr val="tx1">
+                    <a:lumMod val="65000"/>
+                    <a:lumOff val="35000"/>
+                  </a:schemeClr>
+                </a:solidFill>
+                <a:latin typeface="페이퍼로지 4 Regular" charset="-127"/>
+                <a:ea typeface="페이퍼로지 4 Regular" charset="-127"/>
+                <a:cs typeface="Montserrat SemiBold"/>
+                <a:sym typeface="Montserrat SemiBold"/>
+              </a:rPr>
+              <a:t>- </a:t>
+            </a:r>
+            <a:r>
+              <a:rPr lang="ko-KR" altLang="en-US" sz="1200">
+                <a:solidFill>
+                  <a:schemeClr val="tx1">
+                    <a:lumMod val="65000"/>
+                    <a:lumOff val="35000"/>
+                  </a:schemeClr>
+                </a:solidFill>
+                <a:latin typeface="페이퍼로지 4 Regular" charset="-127"/>
+                <a:ea typeface="페이퍼로지 4 Regular" charset="-127"/>
+                <a:cs typeface="Montserrat SemiBold"/>
+                <a:sym typeface="Montserrat SemiBold"/>
+              </a:rPr>
+              <a:t>과정 </a:t>
+            </a:r>
+            <a:r>
+              <a:rPr lang="en-US" altLang="ko-KR" sz="1200">
+                <a:solidFill>
+                  <a:schemeClr val="tx1">
+                    <a:lumMod val="65000"/>
+                    <a:lumOff val="35000"/>
+                  </a:schemeClr>
+                </a:solidFill>
+                <a:latin typeface="페이퍼로지 4 Regular" charset="-127"/>
+                <a:ea typeface="페이퍼로지 4 Regular" charset="-127"/>
+                <a:cs typeface="Montserrat SemiBold"/>
+                <a:sym typeface="Montserrat SemiBold"/>
+              </a:rPr>
+              <a:t>2. DecryptData </a:t>
+            </a:r>
+            <a:r>
+              <a:rPr lang="ko-KR" altLang="en-US" sz="1200">
+                <a:solidFill>
+                  <a:schemeClr val="tx1">
+                    <a:lumMod val="65000"/>
+                    <a:lumOff val="35000"/>
+                  </a:schemeClr>
+                </a:solidFill>
+                <a:latin typeface="페이퍼로지 4 Regular" charset="-127"/>
+                <a:ea typeface="페이퍼로지 4 Regular" charset="-127"/>
+                <a:cs typeface="Montserrat SemiBold"/>
+                <a:sym typeface="Montserrat SemiBold"/>
+              </a:rPr>
+              <a:t>메서드 실행</a:t>
+            </a:r>
+            <a:endParaRPr lang="en-US" altLang="ko-KR" sz="1200">
+              <a:solidFill>
+                <a:schemeClr val="tx1">
+                  <a:lumMod val="65000"/>
+                  <a:lumOff val="35000"/>
+                </a:schemeClr>
+              </a:solidFill>
+              <a:latin typeface="페이퍼로지 4 Regular" charset="-127"/>
+              <a:ea typeface="페이퍼로지 4 Regular" charset="-127"/>
+              <a:cs typeface="Montserrat SemiBold"/>
+              <a:sym typeface="Montserrat SemiBold"/>
+            </a:endParaRPr>
+          </a:p>
+          <a:p>
+            <a:pPr lvl="3" indent="542925">
+              <a:buSzPts val="1600"/>
+            </a:pPr>
+            <a:r>
+              <a:rPr lang="en-US" altLang="ko-KR" sz="1200">
+                <a:solidFill>
+                  <a:schemeClr val="tx1">
+                    <a:lumMod val="65000"/>
+                    <a:lumOff val="35000"/>
+                  </a:schemeClr>
+                </a:solidFill>
+                <a:latin typeface="페이퍼로지 4 Regular" charset="-127"/>
+                <a:ea typeface="페이퍼로지 4 Regular" charset="-127"/>
+                <a:cs typeface="Montserrat SemiBold"/>
+                <a:sym typeface="Montserrat SemiBold"/>
+              </a:rPr>
+              <a:t>- </a:t>
+            </a:r>
+            <a:r>
+              <a:rPr lang="ko-KR" altLang="en-US" sz="1200">
+                <a:solidFill>
+                  <a:schemeClr val="tx1">
+                    <a:lumMod val="65000"/>
+                    <a:lumOff val="35000"/>
+                  </a:schemeClr>
+                </a:solidFill>
+                <a:latin typeface="페이퍼로지 4 Regular" charset="-127"/>
+                <a:ea typeface="페이퍼로지 4 Regular" charset="-127"/>
+                <a:cs typeface="Montserrat SemiBold"/>
+                <a:sym typeface="Montserrat SemiBold"/>
+              </a:rPr>
+              <a:t>과정 </a:t>
+            </a:r>
+            <a:r>
+              <a:rPr lang="en-US" altLang="ko-KR" sz="1200">
+                <a:solidFill>
+                  <a:schemeClr val="tx1">
+                    <a:lumMod val="65000"/>
+                    <a:lumOff val="35000"/>
+                  </a:schemeClr>
+                </a:solidFill>
+                <a:latin typeface="페이퍼로지 4 Regular" charset="-127"/>
+                <a:ea typeface="페이퍼로지 4 Regular" charset="-127"/>
+                <a:cs typeface="Montserrat SemiBold"/>
+                <a:sym typeface="Montserrat SemiBold"/>
+              </a:rPr>
+              <a:t>3. </a:t>
+            </a:r>
+            <a:r>
+              <a:rPr lang="ko-KR" altLang="en-US" sz="1200">
+                <a:solidFill>
+                  <a:schemeClr val="tx1">
+                    <a:lumMod val="65000"/>
+                    <a:lumOff val="35000"/>
+                  </a:schemeClr>
+                </a:solidFill>
+                <a:latin typeface="페이퍼로지 4 Regular" charset="-127"/>
+                <a:ea typeface="페이퍼로지 4 Regular" charset="-127"/>
+                <a:cs typeface="Montserrat SemiBold"/>
+                <a:sym typeface="Montserrat SemiBold"/>
+              </a:rPr>
+              <a:t>경로 검증</a:t>
+            </a:r>
+            <a:br>
+              <a:rPr lang="en-US" altLang="ko-KR" sz="1200">
+                <a:solidFill>
+                  <a:schemeClr val="tx1">
+                    <a:lumMod val="65000"/>
+                    <a:lumOff val="35000"/>
+                  </a:schemeClr>
+                </a:solidFill>
+                <a:latin typeface="페이퍼로지 4 Regular" charset="-127"/>
+                <a:ea typeface="페이퍼로지 4 Regular" charset="-127"/>
+                <a:cs typeface="Montserrat SemiBold"/>
+                <a:sym typeface="Montserrat SemiBold"/>
+              </a:rPr>
+            </a:br>
+            <a:r>
+              <a:rPr lang="ko-KR" altLang="en-US" sz="400">
+                <a:solidFill>
+                  <a:schemeClr val="tx1">
+                    <a:lumMod val="65000"/>
+                    <a:lumOff val="35000"/>
+                  </a:schemeClr>
+                </a:solidFill>
+                <a:latin typeface="페이퍼로지 4 Regular" charset="-127"/>
+                <a:ea typeface="페이퍼로지 4 Regular" charset="-127"/>
+                <a:cs typeface="Montserrat SemiBold"/>
+                <a:sym typeface="Montserrat SemiBold"/>
+              </a:rPr>
+              <a:t> </a:t>
+            </a:r>
+            <a:endParaRPr lang="en-US" altLang="ko-KR" sz="400">
+              <a:solidFill>
+                <a:schemeClr val="tx1">
+                  <a:lumMod val="65000"/>
+                  <a:lumOff val="35000"/>
+                </a:schemeClr>
+              </a:solidFill>
+              <a:latin typeface="페이퍼로지 4 Regular" charset="-127"/>
+              <a:ea typeface="페이퍼로지 4 Regular" charset="-127"/>
+              <a:cs typeface="Montserrat SemiBold"/>
+              <a:sym typeface="Montserrat SemiBold"/>
+            </a:endParaRPr>
+          </a:p>
+          <a:p>
+            <a:pPr lvl="3" indent="542925">
+              <a:buSzPts val="1600"/>
+            </a:pPr>
+            <a:r>
+              <a:rPr lang="en-US" altLang="ko-KR" sz="1200">
+                <a:solidFill>
+                  <a:schemeClr val="tx1">
+                    <a:lumMod val="65000"/>
+                    <a:lumOff val="35000"/>
+                  </a:schemeClr>
+                </a:solidFill>
+                <a:latin typeface="페이퍼로지 4 Regular" charset="-127"/>
+                <a:ea typeface="페이퍼로지 4 Regular" charset="-127"/>
+                <a:cs typeface="Montserrat SemiBold"/>
+                <a:sym typeface="Montserrat SemiBold"/>
+              </a:rPr>
+              <a:t>- </a:t>
+            </a:r>
+            <a:r>
+              <a:rPr lang="ko-KR" altLang="en-US" sz="1200">
+                <a:solidFill>
+                  <a:schemeClr val="tx1">
+                    <a:lumMod val="65000"/>
+                    <a:lumOff val="35000"/>
+                  </a:schemeClr>
+                </a:solidFill>
+                <a:latin typeface="페이퍼로지 4 Regular" charset="-127"/>
+                <a:ea typeface="페이퍼로지 4 Regular" charset="-127"/>
+                <a:cs typeface="Montserrat SemiBold"/>
+                <a:sym typeface="Montserrat SemiBold"/>
+              </a:rPr>
+              <a:t>결과</a:t>
+            </a:r>
+            <a:r>
+              <a:rPr lang="en-US" altLang="ko-KR" sz="1200">
+                <a:solidFill>
+                  <a:schemeClr val="tx1">
+                    <a:lumMod val="65000"/>
+                    <a:lumOff val="35000"/>
+                  </a:schemeClr>
+                </a:solidFill>
+                <a:latin typeface="페이퍼로지 4 Regular" charset="-127"/>
+                <a:ea typeface="페이퍼로지 4 Regular" charset="-127"/>
+                <a:cs typeface="Montserrat SemiBold"/>
+                <a:sym typeface="Montserrat SemiBold"/>
+              </a:rPr>
+              <a:t>. AES Key </a:t>
+            </a:r>
+            <a:r>
+              <a:rPr lang="ko-KR" altLang="en-US" sz="1200">
+                <a:solidFill>
+                  <a:schemeClr val="tx1">
+                    <a:lumMod val="65000"/>
+                    <a:lumOff val="35000"/>
+                  </a:schemeClr>
+                </a:solidFill>
+                <a:latin typeface="페이퍼로지 4 Regular" charset="-127"/>
+                <a:ea typeface="페이퍼로지 4 Regular" charset="-127"/>
+                <a:cs typeface="Montserrat SemiBold"/>
+                <a:sym typeface="Montserrat SemiBold"/>
+              </a:rPr>
+              <a:t>획득</a:t>
+            </a:r>
+            <a:endParaRPr lang="en-US" altLang="ko-KR" sz="1200">
+              <a:solidFill>
+                <a:schemeClr val="tx1">
+                  <a:lumMod val="65000"/>
+                  <a:lumOff val="35000"/>
+                </a:schemeClr>
+              </a:solidFill>
+              <a:latin typeface="페이퍼로지 4 Regular" charset="-127"/>
+              <a:ea typeface="페이퍼로지 4 Regular" charset="-127"/>
+              <a:cs typeface="Montserrat SemiBold"/>
+              <a:sym typeface="Montserrat SemiBold"/>
+            </a:endParaRPr>
+          </a:p>
+          <a:p>
+            <a:pPr lvl="4">
+              <a:buSzPts val="1600"/>
+            </a:pPr>
+            <a:r>
+              <a:rPr lang="en-US" altLang="ko-KR" sz="1200">
+                <a:solidFill>
+                  <a:schemeClr val="dk1"/>
+                </a:solidFill>
+                <a:latin typeface="페이퍼로지 4 Regular" charset="-127"/>
+                <a:ea typeface="페이퍼로지 4 Regular" charset="-127"/>
+                <a:cs typeface="Montserrat SemiBold"/>
+                <a:sym typeface="Montserrat SemiBold"/>
+              </a:rPr>
+              <a:t>	</a:t>
+            </a:r>
+            <a:endParaRPr lang="en-US" altLang="ko-KR" sz="800">
+              <a:solidFill>
+                <a:schemeClr val="dk1"/>
+              </a:solidFill>
+              <a:latin typeface="페이퍼로지 4 Regular" charset="-127"/>
+              <a:ea typeface="페이퍼로지 4 Regular" charset="-127"/>
+              <a:cs typeface="Montserrat SemiBold"/>
+              <a:sym typeface="Montserrat SemiBold"/>
+            </a:endParaRPr>
+          </a:p>
+          <a:p>
+            <a:pPr marL="342900" lvl="2" indent="-342900">
+              <a:buSzPts val="1600"/>
+              <a:buAutoNum type="arabicPeriod"/>
+            </a:pPr>
+            <a:r>
+              <a:rPr lang="en-US" altLang="ko-KR">
+                <a:solidFill>
+                  <a:schemeClr val="dk1"/>
+                </a:solidFill>
+                <a:latin typeface="페이퍼로지 4 Regular" charset="-127"/>
+                <a:ea typeface="페이퍼로지 4 Regular" charset="-127"/>
+                <a:cs typeface="Montserrat SemiBold"/>
+                <a:sym typeface="Montserrat SemiBold"/>
+              </a:rPr>
+              <a:t>AES-256-GCM </a:t>
+            </a:r>
+            <a:r>
+              <a:rPr lang="ko-KR" altLang="en-US">
+                <a:solidFill>
+                  <a:schemeClr val="dk1"/>
+                </a:solidFill>
+                <a:latin typeface="페이퍼로지 4 Regular" charset="-127"/>
+                <a:ea typeface="페이퍼로지 4 Regular" charset="-127"/>
+                <a:cs typeface="Montserrat SemiBold"/>
+                <a:sym typeface="Montserrat SemiBold"/>
+              </a:rPr>
+              <a:t>적용 및 비밀번호 산출 </a:t>
+            </a:r>
+            <a:br>
+              <a:rPr lang="en-US" altLang="ko-KR" sz="1200">
+                <a:solidFill>
+                  <a:schemeClr val="dk1"/>
+                </a:solidFill>
+                <a:latin typeface="페이퍼로지 4 Regular" charset="-127"/>
+                <a:ea typeface="페이퍼로지 4 Regular" charset="-127"/>
+                <a:cs typeface="Montserrat SemiBold"/>
+                <a:sym typeface="Montserrat SemiBold"/>
+              </a:rPr>
+            </a:br>
+            <a:br>
+              <a:rPr lang="en-US" altLang="ko-KR" sz="400">
+                <a:solidFill>
+                  <a:schemeClr val="dk1"/>
+                </a:solidFill>
+                <a:latin typeface="페이퍼로지 4 Regular" charset="-127"/>
+                <a:ea typeface="페이퍼로지 4 Regular" charset="-127"/>
+                <a:cs typeface="Montserrat SemiBold"/>
+                <a:sym typeface="Montserrat SemiBold"/>
+              </a:rPr>
+            </a:br>
+            <a:r>
+              <a:rPr lang="en-US" altLang="ko-KR" sz="1200">
+                <a:solidFill>
+                  <a:schemeClr val="tx1">
+                    <a:lumMod val="65000"/>
+                    <a:lumOff val="35000"/>
+                  </a:schemeClr>
+                </a:solidFill>
+                <a:latin typeface="페이퍼로지 4 Regular" charset="-127"/>
+                <a:ea typeface="페이퍼로지 4 Regular" charset="-127"/>
+                <a:cs typeface="Montserrat SemiBold"/>
+                <a:sym typeface="Montserrat SemiBold"/>
+              </a:rPr>
+              <a:t>Decrypt </a:t>
+            </a:r>
+            <a:r>
+              <a:rPr lang="ko-KR" altLang="en-US" sz="1200">
+                <a:solidFill>
+                  <a:schemeClr val="tx1">
+                    <a:lumMod val="65000"/>
+                    <a:lumOff val="35000"/>
+                  </a:schemeClr>
+                </a:solidFill>
+                <a:latin typeface="페이퍼로지 4 Regular" charset="-127"/>
+                <a:ea typeface="페이퍼로지 4 Regular" charset="-127"/>
+                <a:cs typeface="Montserrat SemiBold"/>
+                <a:sym typeface="Montserrat SemiBold"/>
+              </a:rPr>
+              <a:t>연산</a:t>
+            </a:r>
+            <a:r>
+              <a:rPr lang="en-US" altLang="ko-KR" sz="1200">
+                <a:solidFill>
+                  <a:schemeClr val="tx1">
+                    <a:lumMod val="65000"/>
+                    <a:lumOff val="35000"/>
+                  </a:schemeClr>
+                </a:solidFill>
+                <a:latin typeface="페이퍼로지 4 Regular" charset="-127"/>
+                <a:ea typeface="페이퍼로지 4 Regular" charset="-127"/>
+                <a:cs typeface="Montserrat SemiBold"/>
+                <a:sym typeface="Montserrat SemiBold"/>
+              </a:rPr>
+              <a:t>: Nonce(12 byte) + ciphertext (var)+ Tag(16 byte)</a:t>
+            </a:r>
+            <a:br>
+              <a:rPr lang="en-US" altLang="ko-KR" sz="1200">
+                <a:solidFill>
+                  <a:schemeClr val="tx1">
+                    <a:lumMod val="65000"/>
+                    <a:lumOff val="35000"/>
+                  </a:schemeClr>
+                </a:solidFill>
+                <a:latin typeface="페이퍼로지 4 Regular" charset="-127"/>
+                <a:ea typeface="페이퍼로지 4 Regular" charset="-127"/>
+                <a:cs typeface="Montserrat SemiBold"/>
+                <a:sym typeface="Montserrat SemiBold"/>
+              </a:rPr>
+            </a:br>
+            <a:br>
+              <a:rPr lang="en-US" altLang="ko-KR" sz="400">
+                <a:solidFill>
+                  <a:schemeClr val="tx1">
+                    <a:lumMod val="65000"/>
+                    <a:lumOff val="35000"/>
+                  </a:schemeClr>
+                </a:solidFill>
+                <a:latin typeface="페이퍼로지 4 Regular" charset="-127"/>
+                <a:ea typeface="페이퍼로지 4 Regular" charset="-127"/>
+                <a:cs typeface="Montserrat SemiBold"/>
+                <a:sym typeface="Montserrat SemiBold"/>
+              </a:rPr>
+            </a:br>
+            <a:r>
+              <a:rPr lang="en-US" altLang="ko-KR" sz="1200">
+                <a:solidFill>
+                  <a:schemeClr val="tx1">
+                    <a:lumMod val="65000"/>
+                    <a:lumOff val="35000"/>
+                  </a:schemeClr>
+                </a:solidFill>
+                <a:latin typeface="페이퍼로지 4 Regular" charset="-127"/>
+                <a:ea typeface="페이퍼로지 4 Regular" charset="-127"/>
+                <a:cs typeface="Montserrat SemiBold"/>
+                <a:sym typeface="Montserrat SemiBold"/>
+              </a:rPr>
+              <a:t>&gt; AES-GCM </a:t>
+            </a:r>
+            <a:r>
+              <a:rPr lang="ko-KR" altLang="en-US" sz="1200">
+                <a:solidFill>
+                  <a:schemeClr val="tx1">
+                    <a:lumMod val="65000"/>
+                    <a:lumOff val="35000"/>
+                  </a:schemeClr>
+                </a:solidFill>
+                <a:latin typeface="페이퍼로지 4 Regular" charset="-127"/>
+                <a:ea typeface="페이퍼로지 4 Regular" charset="-127"/>
+                <a:cs typeface="Montserrat SemiBold"/>
+                <a:sym typeface="Montserrat SemiBold"/>
+              </a:rPr>
+              <a:t>의 특성에 따라 </a:t>
+            </a:r>
+            <a:r>
+              <a:rPr lang="en-US" altLang="ko-KR" sz="1200">
+                <a:solidFill>
+                  <a:schemeClr val="tx1">
+                    <a:lumMod val="65000"/>
+                    <a:lumOff val="35000"/>
+                  </a:schemeClr>
+                </a:solidFill>
+                <a:latin typeface="페이퍼로지 4 Regular" charset="-127"/>
+                <a:ea typeface="페이퍼로지 4 Regular" charset="-127"/>
+                <a:cs typeface="Montserrat SemiBold"/>
+                <a:sym typeface="Montserrat SemiBold"/>
+              </a:rPr>
+              <a:t>Tag</a:t>
+            </a:r>
+            <a:r>
+              <a:rPr lang="ko-KR" altLang="en-US" sz="1200">
+                <a:solidFill>
+                  <a:schemeClr val="tx1">
+                    <a:lumMod val="65000"/>
+                    <a:lumOff val="35000"/>
+                  </a:schemeClr>
+                </a:solidFill>
+                <a:latin typeface="페이퍼로지 4 Regular" charset="-127"/>
+                <a:ea typeface="페이퍼로지 4 Regular" charset="-127"/>
+                <a:cs typeface="Montserrat SemiBold"/>
+                <a:sym typeface="Montserrat SemiBold"/>
+              </a:rPr>
+              <a:t>가 일치하면 데이터의 무결성이 확인되고</a:t>
+            </a:r>
+            <a:r>
+              <a:rPr lang="en-US" altLang="ko-KR" sz="1200">
+                <a:solidFill>
+                  <a:schemeClr val="tx1">
+                    <a:lumMod val="65000"/>
+                    <a:lumOff val="35000"/>
+                  </a:schemeClr>
+                </a:solidFill>
+                <a:latin typeface="페이퍼로지 4 Regular" charset="-127"/>
+                <a:ea typeface="페이퍼로지 4 Regular" charset="-127"/>
+                <a:cs typeface="Montserrat SemiBold"/>
+                <a:sym typeface="Montserrat SemiBold"/>
+              </a:rPr>
+              <a:t>, </a:t>
+            </a:r>
+            <a:br>
+              <a:rPr lang="en-US" altLang="ko-KR" sz="1200">
+                <a:solidFill>
+                  <a:schemeClr val="tx1">
+                    <a:lumMod val="65000"/>
+                    <a:lumOff val="35000"/>
+                  </a:schemeClr>
+                </a:solidFill>
+                <a:latin typeface="페이퍼로지 4 Regular" charset="-127"/>
+                <a:ea typeface="페이퍼로지 4 Regular" charset="-127"/>
+                <a:cs typeface="Montserrat SemiBold"/>
+                <a:sym typeface="Montserrat SemiBold"/>
+              </a:rPr>
+            </a:br>
+            <a:r>
+              <a:rPr lang="en-US" altLang="ko-KR" sz="1200">
+                <a:solidFill>
+                  <a:schemeClr val="tx1">
+                    <a:lumMod val="65000"/>
+                    <a:lumOff val="35000"/>
+                  </a:schemeClr>
+                </a:solidFill>
+                <a:latin typeface="페이퍼로지 4 Regular" charset="-127"/>
+                <a:ea typeface="페이퍼로지 4 Regular" charset="-127"/>
+                <a:cs typeface="Montserrat SemiBold"/>
+                <a:sym typeface="Montserrat SemiBold"/>
+              </a:rPr>
+              <a:t>		</a:t>
+            </a:r>
+            <a:r>
+              <a:rPr lang="ko-KR" altLang="en-US" sz="1200">
+                <a:solidFill>
+                  <a:schemeClr val="tx1">
+                    <a:lumMod val="65000"/>
+                    <a:lumOff val="35000"/>
+                  </a:schemeClr>
+                </a:solidFill>
+                <a:latin typeface="페이퍼로지 4 Regular" charset="-127"/>
+                <a:ea typeface="페이퍼로지 4 Regular" charset="-127"/>
+                <a:cs typeface="Montserrat SemiBold"/>
+                <a:sym typeface="Montserrat SemiBold"/>
+              </a:rPr>
+              <a:t>성공적으로 복호화된 </a:t>
+            </a:r>
+            <a:r>
+              <a:rPr lang="en-US" altLang="ko-KR" sz="1200">
+                <a:solidFill>
+                  <a:schemeClr val="tx1">
+                    <a:lumMod val="65000"/>
+                    <a:lumOff val="35000"/>
+                  </a:schemeClr>
+                </a:solidFill>
+                <a:latin typeface="페이퍼로지 4 Regular" charset="-127"/>
+                <a:ea typeface="페이퍼로지 4 Regular" charset="-127"/>
+                <a:cs typeface="Montserrat SemiBold"/>
+                <a:sym typeface="Montserrat SemiBold"/>
+              </a:rPr>
+              <a:t>plaintext </a:t>
+            </a:r>
+            <a:r>
+              <a:rPr lang="ko-KR" altLang="en-US" sz="1200">
+                <a:solidFill>
+                  <a:schemeClr val="tx1">
+                    <a:lumMod val="65000"/>
+                    <a:lumOff val="35000"/>
+                  </a:schemeClr>
+                </a:solidFill>
+                <a:latin typeface="페이퍼로지 4 Regular" charset="-127"/>
+                <a:ea typeface="페이퍼로지 4 Regular" charset="-127"/>
+                <a:cs typeface="Montserrat SemiBold"/>
+                <a:sym typeface="Montserrat SemiBold"/>
+              </a:rPr>
+              <a:t>비밀번호를 알 수 있게 된다</a:t>
+            </a:r>
+            <a:r>
+              <a:rPr lang="en-US" altLang="ko-KR" sz="1200">
+                <a:solidFill>
+                  <a:schemeClr val="tx1">
+                    <a:lumMod val="65000"/>
+                    <a:lumOff val="35000"/>
+                  </a:schemeClr>
+                </a:solidFill>
+                <a:latin typeface="페이퍼로지 4 Regular" charset="-127"/>
+                <a:ea typeface="페이퍼로지 4 Regular" charset="-127"/>
+                <a:cs typeface="Montserrat SemiBold"/>
+                <a:sym typeface="Montserrat SemiBold"/>
+              </a:rPr>
+              <a:t>. </a:t>
+            </a:r>
+          </a:p>
+        </p:txBody>
+      </p:sp>
+      <p:sp>
+        <p:nvSpPr>
+          <p:cNvPr id="170" name="Google Shape;170;p19">
+            <a:extLst>
+              <a:ext uri="{FF2B5EF4-FFF2-40B4-BE49-F238E27FC236}">
+                <a16:creationId xmlns:a16="http://schemas.microsoft.com/office/drawing/2014/main" id="{12B1E83D-1D46-73B0-058B-1C67AA252331}"/>
+              </a:ext>
+            </a:extLst>
+          </p:cNvPr>
+          <p:cNvSpPr txBox="1">
+            <a:spLocks noGrp="1"/>
+          </p:cNvSpPr>
+          <p:nvPr>
+            <p:ph type="title"/>
+          </p:nvPr>
+        </p:nvSpPr>
+        <p:spPr>
+          <a:xfrm>
+            <a:off x="452550" y="121018"/>
+            <a:ext cx="8238900" cy="561600"/>
+          </a:xfrm>
+          <a:prstGeom prst="rect">
+            <a:avLst/>
+          </a:prstGeom>
+          <a:ln>
+            <a:noFill/>
+          </a:ln>
+        </p:spPr>
+        <p:txBody>
+          <a:bodyPr spcFirstLastPara="1" wrap="square" lIns="91425" tIns="91425" rIns="91425" bIns="91425" anchor="t" anchorCtr="0">
+            <a:noAutofit/>
+          </a:bodyPr>
+          <a:lstStyle/>
+          <a:p>
+            <a:pPr lvl="0"/>
+            <a:r>
+              <a:rPr lang="en" altLang="ko-KR">
+                <a:latin typeface="페이퍼로지 6 SemiBold" pitchFamily="2" charset="-127"/>
+                <a:ea typeface="페이퍼로지 6 SemiBold" pitchFamily="2" charset="-127"/>
+              </a:rPr>
+              <a:t>Overview</a:t>
+            </a:r>
+            <a:endParaRPr dirty="0"/>
+          </a:p>
+        </p:txBody>
+      </p:sp>
+      <p:cxnSp>
+        <p:nvCxnSpPr>
+          <p:cNvPr id="3" name="직선 연결선 2">
+            <a:extLst>
+              <a:ext uri="{FF2B5EF4-FFF2-40B4-BE49-F238E27FC236}">
+                <a16:creationId xmlns:a16="http://schemas.microsoft.com/office/drawing/2014/main" id="{87CF54AC-52F4-8855-D17B-E93978B2CD24}"/>
+              </a:ext>
+            </a:extLst>
+          </p:cNvPr>
+          <p:cNvCxnSpPr/>
+          <p:nvPr/>
+        </p:nvCxnSpPr>
+        <p:spPr>
+          <a:xfrm>
+            <a:off x="387275" y="763285"/>
+            <a:ext cx="8240358" cy="0"/>
+          </a:xfrm>
+          <a:prstGeom prst="line">
+            <a:avLst/>
+          </a:prstGeom>
+          <a:ln w="38100">
+            <a:solidFill>
+              <a:srgbClr val="51EEBC"/>
+            </a:solidFill>
+          </a:ln>
+        </p:spPr>
+        <p:style>
+          <a:lnRef idx="1">
+            <a:schemeClr val="accent1"/>
+          </a:lnRef>
+          <a:fillRef idx="0">
+            <a:schemeClr val="accent1"/>
+          </a:fillRef>
+          <a:effectRef idx="0">
+            <a:schemeClr val="accent1"/>
+          </a:effectRef>
+          <a:fontRef idx="minor">
+            <a:schemeClr val="tx1"/>
+          </a:fontRef>
+        </p:style>
+      </p:cxnSp>
+      <p:pic>
+        <p:nvPicPr>
+          <p:cNvPr id="4" name="그림 3" descr="텍스트, 폰트, 스크린샷, 번호이(가) 표시된 사진&#10;&#10;AI 생성 콘텐츠는 정확하지 않을 수 있습니다.">
+            <a:extLst>
+              <a:ext uri="{FF2B5EF4-FFF2-40B4-BE49-F238E27FC236}">
+                <a16:creationId xmlns:a16="http://schemas.microsoft.com/office/drawing/2014/main" id="{B1CE8F26-3A77-F0CD-6886-A47E6598FDCA}"/>
+              </a:ext>
+            </a:extLst>
+          </p:cNvPr>
+          <p:cNvPicPr>
+            <a:picLocks noChangeAspect="1"/>
+          </p:cNvPicPr>
+          <p:nvPr/>
+        </p:nvPicPr>
+        <p:blipFill>
+          <a:blip r:embed="rId3"/>
+          <a:stretch>
+            <a:fillRect/>
+          </a:stretch>
+        </p:blipFill>
+        <p:spPr>
+          <a:xfrm>
+            <a:off x="4284434" y="885617"/>
+            <a:ext cx="2543454" cy="720645"/>
+          </a:xfrm>
+          <a:prstGeom prst="rect">
+            <a:avLst/>
+          </a:prstGeom>
+        </p:spPr>
+      </p:pic>
+    </p:spTree>
+    <p:extLst>
+      <p:ext uri="{BB962C8B-B14F-4D97-AF65-F5344CB8AC3E}">
+        <p14:creationId xmlns:p14="http://schemas.microsoft.com/office/powerpoint/2010/main" val="1408135619"/>
+      </p:ext>
+    </p:extLst>
+  </p:cSld>
+  <p:clrMapOvr>
+    <a:masterClrMapping/>
+  </p:clrMapOvr>
+</p:sld>
+</file>
+
+<file path=ppt/slides/slide11.xml><?xml version="1.0" encoding="utf-8"?>
+<p:sld xmlns:a="http://schemas.openxmlformats.org/drawingml/2006/main" xmlns:r="http://schemas.openxmlformats.org/officeDocument/2006/relationships" xmlns:p="http://schemas.openxmlformats.org/presentationml/2006/main">
+  <p:cSld>
+    <p:spTree>
+      <p:nvGrpSpPr>
+        <p:cNvPr id="1" name="Shape 167">
+          <a:extLst>
+            <a:ext uri="{FF2B5EF4-FFF2-40B4-BE49-F238E27FC236}">
               <a16:creationId xmlns:a16="http://schemas.microsoft.com/office/drawing/2014/main" id="{AD538FA2-B9F7-F698-B2DB-D8EFE8A80AB1}"/>
             </a:ext>
           </a:extLst>
@@ -12318,7 +13821,7 @@
 </p:sld>
 </file>
 
-<file path=ppt/slides/slide11.xml><?xml version="1.0" encoding="utf-8"?>
+<file path=ppt/slides/slide12.xml><?xml version="1.0" encoding="utf-8"?>
 <p:sld xmlns:a="http://schemas.openxmlformats.org/drawingml/2006/main" xmlns:r="http://schemas.openxmlformats.org/officeDocument/2006/relationships" xmlns:p="http://schemas.openxmlformats.org/presentationml/2006/main">
   <p:cSld>
     <p:spTree>
@@ -13246,7 +14749,7 @@
 </p:sld>
 </file>
 
-<file path=ppt/slides/slide12.xml><?xml version="1.0" encoding="utf-8"?>
+<file path=ppt/slides/slide13.xml><?xml version="1.0" encoding="utf-8"?>
 <p:sld xmlns:a="http://schemas.openxmlformats.org/drawingml/2006/main" xmlns:r="http://schemas.openxmlformats.org/officeDocument/2006/relationships" xmlns:p="http://schemas.openxmlformats.org/presentationml/2006/main">
   <p:cSld>
     <p:spTree>
@@ -14585,7 +16088,7 @@
 </p:sld>
 </file>
 
-<file path=ppt/slides/slide13.xml><?xml version="1.0" encoding="utf-8"?>
+<file path=ppt/slides/slide14.xml><?xml version="1.0" encoding="utf-8"?>
 <p:sld xmlns:a="http://schemas.openxmlformats.org/drawingml/2006/main" xmlns:r="http://schemas.openxmlformats.org/officeDocument/2006/relationships" xmlns:p="http://schemas.openxmlformats.org/presentationml/2006/main">
   <p:cSld>
     <p:spTree>
@@ -15482,8 +16985,8 @@
         </p:blipFill>
         <p:spPr>
           <a:xfrm>
-            <a:off x="5230182" y="-66675"/>
-            <a:ext cx="2824157" cy="5243740"/>
+            <a:off x="5230182" y="-1"/>
+            <a:ext cx="2824157" cy="5143501"/>
           </a:xfrm>
           <a:prstGeom prst="rect">
             <a:avLst/>
@@ -15748,7 +17251,7 @@
 </p:sld>
 </file>
 
-<file path=ppt/slides/slide14.xml><?xml version="1.0" encoding="utf-8"?>
+<file path=ppt/slides/slide15.xml><?xml version="1.0" encoding="utf-8"?>
 <p:sld xmlns:a="http://schemas.openxmlformats.org/drawingml/2006/main" xmlns:r="http://schemas.openxmlformats.org/officeDocument/2006/relationships" xmlns:p="http://schemas.openxmlformats.org/presentationml/2006/main">
   <p:cSld>
     <p:spTree>
@@ -16943,7 +18446,7 @@
 </p:sld>
 </file>
 
-<file path=ppt/slides/slide15.xml><?xml version="1.0" encoding="utf-8"?>
+<file path=ppt/slides/slide16.xml><?xml version="1.0" encoding="utf-8"?>
 <p:sld xmlns:a="http://schemas.openxmlformats.org/drawingml/2006/main" xmlns:r="http://schemas.openxmlformats.org/officeDocument/2006/relationships" xmlns:p="http://schemas.openxmlformats.org/presentationml/2006/main">
   <p:cSld>
     <p:spTree>
@@ -17468,7 +18971,7 @@
 </p:sld>
 </file>
 
-<file path=ppt/slides/slide16.xml><?xml version="1.0" encoding="utf-8"?>
+<file path=ppt/slides/slide17.xml><?xml version="1.0" encoding="utf-8"?>
 <p:sld xmlns:a="http://schemas.openxmlformats.org/drawingml/2006/main" xmlns:r="http://schemas.openxmlformats.org/officeDocument/2006/relationships" xmlns:p="http://schemas.openxmlformats.org/presentationml/2006/main">
   <p:cSld>
     <p:spTree>
@@ -18598,7 +20101,7 @@
 </p:sld>
 </file>
 
-<file path=ppt/slides/slide17.xml><?xml version="1.0" encoding="utf-8"?>
+<file path=ppt/slides/slide18.xml><?xml version="1.0" encoding="utf-8"?>
 <p:sld xmlns:a="http://schemas.openxmlformats.org/drawingml/2006/main" xmlns:r="http://schemas.openxmlformats.org/officeDocument/2006/relationships" xmlns:p="http://schemas.openxmlformats.org/presentationml/2006/main">
   <p:cSld>
     <p:spTree>
@@ -19460,7 +20963,7 @@
 </p:sld>
 </file>
 
-<file path=ppt/slides/slide18.xml><?xml version="1.0" encoding="utf-8"?>
+<file path=ppt/slides/slide19.xml><?xml version="1.0" encoding="utf-8"?>
 <p:sld xmlns:a="http://schemas.openxmlformats.org/drawingml/2006/main" xmlns:r="http://schemas.openxmlformats.org/officeDocument/2006/relationships" xmlns:p="http://schemas.openxmlformats.org/presentationml/2006/main">
   <p:cSld>
     <p:spTree>
@@ -19497,8 +21000,8 @@
         </p:nvSpPr>
         <p:spPr>
           <a:xfrm flipH="1">
-            <a:off x="2545669" y="2888161"/>
-            <a:ext cx="4362337" cy="2379294"/>
+            <a:off x="2545668" y="2888161"/>
+            <a:ext cx="4362337" cy="1879781"/>
           </a:xfrm>
           <a:prstGeom prst="rect">
             <a:avLst/>
@@ -19929,572 +21432,6 @@
 </p:sld>
 </file>
 
-<file path=ppt/slides/slide19.xml><?xml version="1.0" encoding="utf-8"?>
-<p:sld xmlns:a="http://schemas.openxmlformats.org/drawingml/2006/main" xmlns:r="http://schemas.openxmlformats.org/officeDocument/2006/relationships" xmlns:p="http://schemas.openxmlformats.org/presentationml/2006/main">
-  <p:cSld>
-    <p:spTree>
-      <p:nvGrpSpPr>
-        <p:cNvPr id="1" name="Shape 167">
-          <a:extLst>
-            <a:ext uri="{FF2B5EF4-FFF2-40B4-BE49-F238E27FC236}">
-              <a16:creationId xmlns:a16="http://schemas.microsoft.com/office/drawing/2014/main" id="{8CDC11BC-68B6-251A-4CED-797AB60A6BDA}"/>
-            </a:ext>
-          </a:extLst>
-        </p:cNvPr>
-        <p:cNvGrpSpPr/>
-        <p:nvPr/>
-      </p:nvGrpSpPr>
-      <p:grpSpPr>
-        <a:xfrm>
-          <a:off x="0" y="0"/>
-          <a:ext cx="0" cy="0"/>
-          <a:chOff x="0" y="0"/>
-          <a:chExt cx="0" cy="0"/>
-        </a:xfrm>
-      </p:grpSpPr>
-      <p:sp>
-        <p:nvSpPr>
-          <p:cNvPr id="169" name="Google Shape;169;p19">
-            <a:extLst>
-              <a:ext uri="{FF2B5EF4-FFF2-40B4-BE49-F238E27FC236}">
-                <a16:creationId xmlns:a16="http://schemas.microsoft.com/office/drawing/2014/main" id="{A6A9BFDD-EAFC-08AE-AFE6-4ACB81CFB865}"/>
-              </a:ext>
-            </a:extLst>
-          </p:cNvPr>
-          <p:cNvSpPr txBox="1"/>
-          <p:nvPr/>
-        </p:nvSpPr>
-        <p:spPr>
-          <a:xfrm flipH="1">
-            <a:off x="452550" y="885617"/>
-            <a:ext cx="8238900" cy="4136865"/>
-          </a:xfrm>
-          <a:prstGeom prst="rect">
-            <a:avLst/>
-          </a:prstGeom>
-          <a:noFill/>
-          <a:ln>
-            <a:noFill/>
-          </a:ln>
-        </p:spPr>
-        <p:txBody>
-          <a:bodyPr spcFirstLastPara="1" wrap="square" lIns="91425" tIns="45700" rIns="91425" bIns="45700" anchor="t" anchorCtr="0">
-            <a:noAutofit/>
-          </a:bodyPr>
-          <a:lstStyle/>
-          <a:p>
-            <a:pPr marL="177800" lvl="2" indent="-177800">
-              <a:buSzPts val="1600"/>
-              <a:buFont typeface="Arial" panose="020B0604020202020204" pitchFamily="34" charset="0"/>
-              <a:buChar char="•"/>
-            </a:pPr>
-            <a:r>
-              <a:rPr lang="en-US" altLang="ko-KR" sz="1800">
-                <a:solidFill>
-                  <a:schemeClr val="accent3">
-                    <a:lumMod val="75000"/>
-                  </a:schemeClr>
-                </a:solidFill>
-                <a:latin typeface="페이퍼로지 4 Regular" charset="-127"/>
-                <a:ea typeface="페이퍼로지 4 Regular" charset="-127"/>
-                <a:cs typeface="Montserrat SemiBold"/>
-                <a:sym typeface="Montserrat SemiBold"/>
-              </a:rPr>
-              <a:t>app_bound_encryption_win.cc </a:t>
-            </a:r>
-            <a:endParaRPr lang="en-US" altLang="ko-KR" sz="600">
-              <a:solidFill>
-                <a:schemeClr val="accent3">
-                  <a:lumMod val="75000"/>
-                </a:schemeClr>
-              </a:solidFill>
-              <a:latin typeface="페이퍼로지 4 Regular" charset="-127"/>
-              <a:ea typeface="페이퍼로지 4 Regular" charset="-127"/>
-              <a:cs typeface="Montserrat SemiBold"/>
-              <a:sym typeface="Montserrat SemiBold"/>
-            </a:endParaRPr>
-          </a:p>
-          <a:p>
-            <a:pPr marL="177800" lvl="2" indent="-177800">
-              <a:buSzPts val="1600"/>
-              <a:buFont typeface="Arial" panose="020B0604020202020204" pitchFamily="34" charset="0"/>
-              <a:buChar char="•"/>
-            </a:pPr>
-            <a:endParaRPr lang="en-US" altLang="ko-KR" sz="1800">
-              <a:solidFill>
-                <a:schemeClr val="dk1"/>
-              </a:solidFill>
-              <a:latin typeface="페이퍼로지 4 Regular" charset="-127"/>
-              <a:ea typeface="페이퍼로지 4 Regular" charset="-127"/>
-              <a:cs typeface="Montserrat SemiBold"/>
-              <a:sym typeface="Montserrat SemiBold"/>
-            </a:endParaRPr>
-          </a:p>
-          <a:p>
-            <a:pPr marL="177800" lvl="2" indent="-177800">
-              <a:buSzPts val="1600"/>
-              <a:buFont typeface="Arial" panose="020B0604020202020204" pitchFamily="34" charset="0"/>
-              <a:buChar char="•"/>
-            </a:pPr>
-            <a:r>
-              <a:rPr lang="en-US" altLang="ko-KR" sz="1200">
-                <a:solidFill>
-                  <a:schemeClr val="tx1">
-                    <a:lumMod val="65000"/>
-                    <a:lumOff val="35000"/>
-                  </a:schemeClr>
-                </a:solidFill>
-                <a:latin typeface="페이퍼로지 4 Regular" charset="-127"/>
-                <a:ea typeface="페이퍼로지 4 Regular" charset="-127"/>
-                <a:cs typeface="Montserrat SemiBold"/>
-                <a:sym typeface="Montserrat SemiBold"/>
-              </a:rPr>
-              <a:t>GetAppBoundEncryptionSupportLevel</a:t>
-            </a:r>
-            <a:br>
-              <a:rPr lang="en-US" altLang="ko-KR" sz="1200">
-                <a:solidFill>
-                  <a:schemeClr val="tx1">
-                    <a:lumMod val="65000"/>
-                    <a:lumOff val="35000"/>
-                  </a:schemeClr>
-                </a:solidFill>
-                <a:latin typeface="페이퍼로지 4 Regular" charset="-127"/>
-                <a:ea typeface="페이퍼로지 4 Regular" charset="-127"/>
-                <a:cs typeface="Montserrat SemiBold"/>
-                <a:sym typeface="Montserrat SemiBold"/>
-              </a:rPr>
-            </a:br>
-            <a:br>
-              <a:rPr lang="en-US" altLang="ko-KR" sz="400">
-                <a:solidFill>
-                  <a:schemeClr val="tx1">
-                    <a:lumMod val="65000"/>
-                    <a:lumOff val="35000"/>
-                  </a:schemeClr>
-                </a:solidFill>
-                <a:latin typeface="페이퍼로지 4 Regular" charset="-127"/>
-                <a:ea typeface="페이퍼로지 4 Regular" charset="-127"/>
-                <a:cs typeface="Montserrat SemiBold"/>
-                <a:sym typeface="Montserrat SemiBold"/>
-              </a:rPr>
-            </a:br>
-            <a:r>
-              <a:rPr lang="en-US" altLang="ko-KR" sz="1200">
-                <a:solidFill>
-                  <a:schemeClr val="tx1">
-                    <a:lumMod val="65000"/>
-                    <a:lumOff val="35000"/>
-                  </a:schemeClr>
-                </a:solidFill>
-                <a:latin typeface="페이퍼로지 4 Regular" charset="-127"/>
-                <a:ea typeface="페이퍼로지 4 Regular" charset="-127"/>
-                <a:cs typeface="Montserrat SemiBold"/>
-                <a:sym typeface="Montserrat SemiBold"/>
-              </a:rPr>
-              <a:t>“ </a:t>
-            </a:r>
-            <a:r>
-              <a:rPr lang="ko-KR" altLang="en-US" sz="1200">
-                <a:solidFill>
-                  <a:schemeClr val="tx1">
-                    <a:lumMod val="65000"/>
-                    <a:lumOff val="35000"/>
-                  </a:schemeClr>
-                </a:solidFill>
-                <a:latin typeface="페이퍼로지 4 Regular" charset="-127"/>
-                <a:ea typeface="페이퍼로지 4 Regular" charset="-127"/>
-                <a:cs typeface="Montserrat SemiBold"/>
-                <a:sym typeface="Montserrat SemiBold"/>
-              </a:rPr>
-              <a:t>시스템 상태</a:t>
-            </a:r>
-            <a:r>
-              <a:rPr lang="en-US" altLang="ko-KR" sz="1200">
-                <a:solidFill>
-                  <a:schemeClr val="tx1">
-                    <a:lumMod val="65000"/>
-                    <a:lumOff val="35000"/>
-                  </a:schemeClr>
-                </a:solidFill>
-                <a:latin typeface="페이퍼로지 4 Regular" charset="-127"/>
-                <a:ea typeface="페이퍼로지 4 Regular" charset="-127"/>
-                <a:cs typeface="Montserrat SemiBold"/>
-                <a:sym typeface="Montserrat SemiBold"/>
-              </a:rPr>
-              <a:t>, </a:t>
-            </a:r>
-            <a:r>
-              <a:rPr lang="ko-KR" altLang="en-US" sz="1200">
-                <a:solidFill>
-                  <a:schemeClr val="tx1">
-                    <a:lumMod val="65000"/>
-                    <a:lumOff val="35000"/>
-                  </a:schemeClr>
-                </a:solidFill>
-                <a:latin typeface="페이퍼로지 4 Regular" charset="-127"/>
-                <a:ea typeface="페이퍼로지 4 Regular" charset="-127"/>
-                <a:cs typeface="Montserrat SemiBold"/>
-                <a:sym typeface="Montserrat SemiBold"/>
-              </a:rPr>
-              <a:t>브라우저 설정 조회 후 </a:t>
-            </a:r>
-            <a:r>
-              <a:rPr lang="en-US" altLang="ko-KR" sz="1200">
-                <a:solidFill>
-                  <a:schemeClr val="tx1">
-                    <a:lumMod val="65000"/>
-                    <a:lumOff val="35000"/>
-                  </a:schemeClr>
-                </a:solidFill>
-                <a:latin typeface="페이퍼로지 4 Regular" charset="-127"/>
-                <a:ea typeface="페이퍼로지 4 Regular" charset="-127"/>
-                <a:cs typeface="Montserrat SemiBold"/>
-                <a:sym typeface="Montserrat SemiBold"/>
-              </a:rPr>
-              <a:t>Enum(os_crypt : : SupportLevel) </a:t>
-            </a:r>
-            <a:r>
-              <a:rPr lang="ko-KR" altLang="en-US" sz="1200">
-                <a:solidFill>
-                  <a:schemeClr val="tx1">
-                    <a:lumMod val="65000"/>
-                    <a:lumOff val="35000"/>
-                  </a:schemeClr>
-                </a:solidFill>
-                <a:latin typeface="페이퍼로지 4 Regular" charset="-127"/>
-                <a:ea typeface="페이퍼로지 4 Regular" charset="-127"/>
-                <a:cs typeface="Montserrat SemiBold"/>
-                <a:sym typeface="Montserrat SemiBold"/>
-              </a:rPr>
-              <a:t>반환</a:t>
-            </a:r>
-            <a:endParaRPr lang="en-US" altLang="ko-KR" sz="1200">
-              <a:solidFill>
-                <a:schemeClr val="tx1">
-                  <a:lumMod val="65000"/>
-                  <a:lumOff val="35000"/>
-                </a:schemeClr>
-              </a:solidFill>
-              <a:latin typeface="페이퍼로지 4 Regular" charset="-127"/>
-              <a:ea typeface="페이퍼로지 4 Regular" charset="-127"/>
-              <a:cs typeface="Montserrat SemiBold"/>
-              <a:sym typeface="Montserrat SemiBold"/>
-            </a:endParaRPr>
-          </a:p>
-          <a:p>
-            <a:pPr marL="177800" lvl="2" indent="-177800">
-              <a:buSzPts val="1600"/>
-              <a:buFont typeface="Arial" panose="020B0604020202020204" pitchFamily="34" charset="0"/>
-              <a:buChar char="•"/>
-            </a:pPr>
-            <a:endParaRPr lang="en-US" altLang="ko-KR" sz="1200">
-              <a:solidFill>
-                <a:schemeClr val="tx1">
-                  <a:lumMod val="65000"/>
-                  <a:lumOff val="35000"/>
-                </a:schemeClr>
-              </a:solidFill>
-              <a:latin typeface="페이퍼로지 4 Regular" charset="-127"/>
-              <a:ea typeface="페이퍼로지 4 Regular" charset="-127"/>
-              <a:cs typeface="Montserrat SemiBold"/>
-              <a:sym typeface="Montserrat SemiBold"/>
-            </a:endParaRPr>
-          </a:p>
-          <a:p>
-            <a:pPr marL="177800" lvl="2" indent="-177800">
-              <a:buSzPts val="1600"/>
-              <a:buFont typeface="Arial" panose="020B0604020202020204" pitchFamily="34" charset="0"/>
-              <a:buChar char="•"/>
-            </a:pPr>
-            <a:r>
-              <a:rPr lang="en-US" altLang="ko-KR" sz="1200">
-                <a:solidFill>
-                  <a:schemeClr val="tx1">
-                    <a:lumMod val="65000"/>
-                    <a:lumOff val="35000"/>
-                  </a:schemeClr>
-                </a:solidFill>
-                <a:latin typeface="페이퍼로지 4 Regular" charset="-127"/>
-                <a:ea typeface="페이퍼로지 4 Regular" charset="-127"/>
-                <a:cs typeface="Montserrat SemiBold"/>
-                <a:sym typeface="Montserrat SemiBold"/>
-              </a:rPr>
-              <a:t>En/DecryptAppBoundString</a:t>
-            </a:r>
-            <a:br>
-              <a:rPr lang="en-US" altLang="ko-KR" sz="1200">
-                <a:solidFill>
-                  <a:schemeClr val="tx1">
-                    <a:lumMod val="65000"/>
-                    <a:lumOff val="35000"/>
-                  </a:schemeClr>
-                </a:solidFill>
-                <a:latin typeface="페이퍼로지 4 Regular" charset="-127"/>
-                <a:ea typeface="페이퍼로지 4 Regular" charset="-127"/>
-                <a:cs typeface="Montserrat SemiBold"/>
-                <a:sym typeface="Montserrat SemiBold"/>
-              </a:rPr>
-            </a:br>
-            <a:br>
-              <a:rPr lang="en-US" altLang="ko-KR" sz="400">
-                <a:solidFill>
-                  <a:schemeClr val="tx1">
-                    <a:lumMod val="65000"/>
-                    <a:lumOff val="35000"/>
-                  </a:schemeClr>
-                </a:solidFill>
-                <a:latin typeface="페이퍼로지 4 Regular" charset="-127"/>
-                <a:ea typeface="페이퍼로지 4 Regular" charset="-127"/>
-                <a:cs typeface="Montserrat SemiBold"/>
-                <a:sym typeface="Montserrat SemiBold"/>
-              </a:rPr>
-            </a:br>
-            <a:r>
-              <a:rPr lang="en-US" altLang="ko-KR" sz="1200">
-                <a:solidFill>
-                  <a:schemeClr val="tx1">
-                    <a:lumMod val="65000"/>
-                    <a:lumOff val="35000"/>
-                  </a:schemeClr>
-                </a:solidFill>
-                <a:latin typeface="페이퍼로지 4 Regular" charset="-127"/>
-                <a:ea typeface="페이퍼로지 4 Regular" charset="-127"/>
-                <a:cs typeface="Montserrat SemiBold"/>
-                <a:sym typeface="Montserrat SemiBold"/>
-              </a:rPr>
-              <a:t>“ elevator-&gt;En/DecryptData </a:t>
-            </a:r>
-            <a:r>
-              <a:rPr lang="ko-KR" altLang="en-US" sz="1200">
-                <a:solidFill>
-                  <a:schemeClr val="tx1">
-                    <a:lumMod val="65000"/>
-                    <a:lumOff val="35000"/>
-                  </a:schemeClr>
-                </a:solidFill>
-                <a:latin typeface="페이퍼로지 4 Regular" charset="-127"/>
-                <a:ea typeface="페이퍼로지 4 Regular" charset="-127"/>
-                <a:cs typeface="Montserrat SemiBold"/>
-                <a:sym typeface="Montserrat SemiBold"/>
-              </a:rPr>
-              <a:t>호출 </a:t>
-            </a:r>
-            <a:r>
-              <a:rPr lang="en-US" altLang="ko-KR" sz="1200">
-                <a:solidFill>
-                  <a:schemeClr val="tx1">
-                    <a:lumMod val="65000"/>
-                    <a:lumOff val="35000"/>
-                  </a:schemeClr>
-                </a:solidFill>
-                <a:latin typeface="페이퍼로지 4 Regular" charset="-127"/>
-                <a:ea typeface="페이퍼로지 4 Regular" charset="-127"/>
-                <a:cs typeface="Montserrat SemiBold"/>
-                <a:sym typeface="Montserrat SemiBold"/>
-              </a:rPr>
-              <a:t>”</a:t>
-            </a:r>
-            <a:br>
-              <a:rPr lang="en-US" altLang="ko-KR" sz="1200">
-                <a:solidFill>
-                  <a:schemeClr val="tx1">
-                    <a:lumMod val="65000"/>
-                    <a:lumOff val="35000"/>
-                  </a:schemeClr>
-                </a:solidFill>
-                <a:latin typeface="페이퍼로지 4 Regular" charset="-127"/>
-                <a:ea typeface="페이퍼로지 4 Regular" charset="-127"/>
-                <a:cs typeface="Montserrat SemiBold"/>
-                <a:sym typeface="Montserrat SemiBold"/>
-              </a:rPr>
-            </a:br>
-            <a:br>
-              <a:rPr lang="en-US" altLang="ko-KR" sz="800">
-                <a:solidFill>
-                  <a:schemeClr val="tx1">
-                    <a:lumMod val="65000"/>
-                    <a:lumOff val="35000"/>
-                  </a:schemeClr>
-                </a:solidFill>
-                <a:latin typeface="페이퍼로지 4 Regular" charset="-127"/>
-                <a:ea typeface="페이퍼로지 4 Regular" charset="-127"/>
-                <a:cs typeface="Montserrat SemiBold"/>
-                <a:sym typeface="Montserrat SemiBold"/>
-              </a:rPr>
-            </a:br>
-            <a:r>
-              <a:rPr lang="en-US" altLang="ko-KR" sz="1200">
-                <a:solidFill>
-                  <a:schemeClr val="tx1">
-                    <a:lumMod val="65000"/>
-                    <a:lumOff val="35000"/>
-                  </a:schemeClr>
-                </a:solidFill>
-                <a:latin typeface="페이퍼로지 4 Regular" charset="-127"/>
-                <a:ea typeface="페이퍼로지 4 Regular" charset="-127"/>
-                <a:cs typeface="Montserrat SemiBold"/>
-                <a:sym typeface="Montserrat SemiBold"/>
-              </a:rPr>
-              <a:t>+ DecryptAppBoundString &gt; kSuccessShouldReencrypt</a:t>
-            </a:r>
-            <a:r>
-              <a:rPr lang="ko-KR" altLang="en-US" sz="1200">
-                <a:solidFill>
-                  <a:schemeClr val="tx1">
-                    <a:lumMod val="65000"/>
-                    <a:lumOff val="35000"/>
-                  </a:schemeClr>
-                </a:solidFill>
-                <a:latin typeface="페이퍼로지 4 Regular" charset="-127"/>
-                <a:ea typeface="페이퍼로지 4 Regular" charset="-127"/>
-                <a:cs typeface="Montserrat SemiBold"/>
-                <a:sym typeface="Montserrat SemiBold"/>
-              </a:rPr>
-              <a:t> </a:t>
-            </a:r>
-            <a:r>
-              <a:rPr lang="en-US" altLang="ko-KR" sz="1200">
-                <a:solidFill>
-                  <a:schemeClr val="tx1">
-                    <a:lumMod val="65000"/>
-                    <a:lumOff val="35000"/>
-                  </a:schemeClr>
-                </a:solidFill>
-                <a:latin typeface="페이퍼로지 4 Regular" charset="-127"/>
-                <a:ea typeface="페이퍼로지 4 Regular" charset="-127"/>
-                <a:cs typeface="Montserrat SemiBold"/>
-                <a:sym typeface="Montserrat SemiBold"/>
-              </a:rPr>
-              <a:t>flag</a:t>
-            </a:r>
-            <a:r>
-              <a:rPr lang="ko-KR" altLang="en-US" sz="1200">
-                <a:solidFill>
-                  <a:schemeClr val="tx1">
-                    <a:lumMod val="65000"/>
-                    <a:lumOff val="35000"/>
-                  </a:schemeClr>
-                </a:solidFill>
-                <a:latin typeface="페이퍼로지 4 Regular" charset="-127"/>
-                <a:ea typeface="페이퍼로지 4 Regular" charset="-127"/>
-                <a:cs typeface="Montserrat SemiBold"/>
-                <a:sym typeface="Montserrat SemiBold"/>
-              </a:rPr>
-              <a:t> 조회</a:t>
-            </a:r>
-            <a:endParaRPr lang="en-US" altLang="ko-KR" sz="1200">
-              <a:solidFill>
-                <a:schemeClr val="tx1">
-                  <a:lumMod val="65000"/>
-                  <a:lumOff val="35000"/>
-                </a:schemeClr>
-              </a:solidFill>
-              <a:latin typeface="페이퍼로지 4 Regular" charset="-127"/>
-              <a:ea typeface="페이퍼로지 4 Regular" charset="-127"/>
-              <a:cs typeface="Montserrat SemiBold"/>
-              <a:sym typeface="Montserrat SemiBold"/>
-            </a:endParaRPr>
-          </a:p>
-        </p:txBody>
-      </p:sp>
-      <p:sp>
-        <p:nvSpPr>
-          <p:cNvPr id="170" name="Google Shape;170;p19">
-            <a:extLst>
-              <a:ext uri="{FF2B5EF4-FFF2-40B4-BE49-F238E27FC236}">
-                <a16:creationId xmlns:a16="http://schemas.microsoft.com/office/drawing/2014/main" id="{AFA79D13-C114-92D7-F4B3-134E59FEC356}"/>
-              </a:ext>
-            </a:extLst>
-          </p:cNvPr>
-          <p:cNvSpPr txBox="1">
-            <a:spLocks noGrp="1"/>
-          </p:cNvSpPr>
-          <p:nvPr>
-            <p:ph type="title"/>
-          </p:nvPr>
-        </p:nvSpPr>
-        <p:spPr>
-          <a:xfrm>
-            <a:off x="452550" y="121018"/>
-            <a:ext cx="8238900" cy="561600"/>
-          </a:xfrm>
-          <a:prstGeom prst="rect">
-            <a:avLst/>
-          </a:prstGeom>
-          <a:ln>
-            <a:noFill/>
-          </a:ln>
-        </p:spPr>
-        <p:txBody>
-          <a:bodyPr spcFirstLastPara="1" wrap="square" lIns="91425" tIns="91425" rIns="91425" bIns="91425" anchor="t" anchorCtr="0">
-            <a:noAutofit/>
-          </a:bodyPr>
-          <a:lstStyle/>
-          <a:p>
-            <a:pPr lvl="0"/>
-            <a:r>
-              <a:rPr lang="en-US" altLang="ko-KR"/>
-              <a:t>“ v20 ” chrome/browser/os_crypt/</a:t>
-            </a:r>
-            <a:endParaRPr dirty="0"/>
-          </a:p>
-        </p:txBody>
-      </p:sp>
-      <p:cxnSp>
-        <p:nvCxnSpPr>
-          <p:cNvPr id="3" name="직선 연결선 2">
-            <a:extLst>
-              <a:ext uri="{FF2B5EF4-FFF2-40B4-BE49-F238E27FC236}">
-                <a16:creationId xmlns:a16="http://schemas.microsoft.com/office/drawing/2014/main" id="{51EEECB4-2549-959A-21AC-9B636EFBEE33}"/>
-              </a:ext>
-            </a:extLst>
-          </p:cNvPr>
-          <p:cNvCxnSpPr/>
-          <p:nvPr/>
-        </p:nvCxnSpPr>
-        <p:spPr>
-          <a:xfrm>
-            <a:off x="387275" y="763285"/>
-            <a:ext cx="8240358" cy="0"/>
-          </a:xfrm>
-          <a:prstGeom prst="line">
-            <a:avLst/>
-          </a:prstGeom>
-          <a:ln w="38100">
-            <a:solidFill>
-              <a:srgbClr val="51EEBC"/>
-            </a:solidFill>
-          </a:ln>
-        </p:spPr>
-        <p:style>
-          <a:lnRef idx="1">
-            <a:schemeClr val="accent1"/>
-          </a:lnRef>
-          <a:fillRef idx="0">
-            <a:schemeClr val="accent1"/>
-          </a:fillRef>
-          <a:effectRef idx="0">
-            <a:schemeClr val="accent1"/>
-          </a:effectRef>
-          <a:fontRef idx="minor">
-            <a:schemeClr val="tx1"/>
-          </a:fontRef>
-        </p:style>
-      </p:cxnSp>
-    </p:spTree>
-    <p:extLst>
-      <p:ext uri="{BB962C8B-B14F-4D97-AF65-F5344CB8AC3E}">
-        <p14:creationId xmlns:p14="http://schemas.microsoft.com/office/powerpoint/2010/main" val="4192430106"/>
-      </p:ext>
-    </p:extLst>
-  </p:cSld>
-  <p:clrMapOvr>
-    <a:masterClrMapping/>
-  </p:clrMapOvr>
-</p:sld>
-</file>
-
 <file path=ppt/slides/slide2.xml><?xml version="1.0" encoding="utf-8"?>
 <p:sld xmlns:a="http://schemas.openxmlformats.org/drawingml/2006/main" xmlns:r="http://schemas.openxmlformats.org/officeDocument/2006/relationships" xmlns:p="http://schemas.openxmlformats.org/presentationml/2006/main">
   <p:cSld>
@@ -21486,6 +22423,572 @@
 </file>
 
 <file path=ppt/slides/slide20.xml><?xml version="1.0" encoding="utf-8"?>
+<p:sld xmlns:a="http://schemas.openxmlformats.org/drawingml/2006/main" xmlns:r="http://schemas.openxmlformats.org/officeDocument/2006/relationships" xmlns:p="http://schemas.openxmlformats.org/presentationml/2006/main">
+  <p:cSld>
+    <p:spTree>
+      <p:nvGrpSpPr>
+        <p:cNvPr id="1" name="Shape 167">
+          <a:extLst>
+            <a:ext uri="{FF2B5EF4-FFF2-40B4-BE49-F238E27FC236}">
+              <a16:creationId xmlns:a16="http://schemas.microsoft.com/office/drawing/2014/main" id="{8CDC11BC-68B6-251A-4CED-797AB60A6BDA}"/>
+            </a:ext>
+          </a:extLst>
+        </p:cNvPr>
+        <p:cNvGrpSpPr/>
+        <p:nvPr/>
+      </p:nvGrpSpPr>
+      <p:grpSpPr>
+        <a:xfrm>
+          <a:off x="0" y="0"/>
+          <a:ext cx="0" cy="0"/>
+          <a:chOff x="0" y="0"/>
+          <a:chExt cx="0" cy="0"/>
+        </a:xfrm>
+      </p:grpSpPr>
+      <p:sp>
+        <p:nvSpPr>
+          <p:cNvPr id="169" name="Google Shape;169;p19">
+            <a:extLst>
+              <a:ext uri="{FF2B5EF4-FFF2-40B4-BE49-F238E27FC236}">
+                <a16:creationId xmlns:a16="http://schemas.microsoft.com/office/drawing/2014/main" id="{A6A9BFDD-EAFC-08AE-AFE6-4ACB81CFB865}"/>
+              </a:ext>
+            </a:extLst>
+          </p:cNvPr>
+          <p:cNvSpPr txBox="1"/>
+          <p:nvPr/>
+        </p:nvSpPr>
+        <p:spPr>
+          <a:xfrm flipH="1">
+            <a:off x="452550" y="885617"/>
+            <a:ext cx="8238900" cy="4136865"/>
+          </a:xfrm>
+          <a:prstGeom prst="rect">
+            <a:avLst/>
+          </a:prstGeom>
+          <a:noFill/>
+          <a:ln>
+            <a:noFill/>
+          </a:ln>
+        </p:spPr>
+        <p:txBody>
+          <a:bodyPr spcFirstLastPara="1" wrap="square" lIns="91425" tIns="45700" rIns="91425" bIns="45700" anchor="t" anchorCtr="0">
+            <a:noAutofit/>
+          </a:bodyPr>
+          <a:lstStyle/>
+          <a:p>
+            <a:pPr marL="177800" lvl="2" indent="-177800">
+              <a:buSzPts val="1600"/>
+              <a:buFont typeface="Arial" panose="020B0604020202020204" pitchFamily="34" charset="0"/>
+              <a:buChar char="•"/>
+            </a:pPr>
+            <a:r>
+              <a:rPr lang="en-US" altLang="ko-KR" sz="1800">
+                <a:solidFill>
+                  <a:schemeClr val="accent3">
+                    <a:lumMod val="75000"/>
+                  </a:schemeClr>
+                </a:solidFill>
+                <a:latin typeface="페이퍼로지 4 Regular" charset="-127"/>
+                <a:ea typeface="페이퍼로지 4 Regular" charset="-127"/>
+                <a:cs typeface="Montserrat SemiBold"/>
+                <a:sym typeface="Montserrat SemiBold"/>
+              </a:rPr>
+              <a:t>app_bound_encryption_win.cc </a:t>
+            </a:r>
+            <a:endParaRPr lang="en-US" altLang="ko-KR" sz="600">
+              <a:solidFill>
+                <a:schemeClr val="accent3">
+                  <a:lumMod val="75000"/>
+                </a:schemeClr>
+              </a:solidFill>
+              <a:latin typeface="페이퍼로지 4 Regular" charset="-127"/>
+              <a:ea typeface="페이퍼로지 4 Regular" charset="-127"/>
+              <a:cs typeface="Montserrat SemiBold"/>
+              <a:sym typeface="Montserrat SemiBold"/>
+            </a:endParaRPr>
+          </a:p>
+          <a:p>
+            <a:pPr marL="177800" lvl="2" indent="-177800">
+              <a:buSzPts val="1600"/>
+              <a:buFont typeface="Arial" panose="020B0604020202020204" pitchFamily="34" charset="0"/>
+              <a:buChar char="•"/>
+            </a:pPr>
+            <a:endParaRPr lang="en-US" altLang="ko-KR" sz="1800">
+              <a:solidFill>
+                <a:schemeClr val="dk1"/>
+              </a:solidFill>
+              <a:latin typeface="페이퍼로지 4 Regular" charset="-127"/>
+              <a:ea typeface="페이퍼로지 4 Regular" charset="-127"/>
+              <a:cs typeface="Montserrat SemiBold"/>
+              <a:sym typeface="Montserrat SemiBold"/>
+            </a:endParaRPr>
+          </a:p>
+          <a:p>
+            <a:pPr marL="177800" lvl="2" indent="-177800">
+              <a:buSzPts val="1600"/>
+              <a:buFont typeface="Arial" panose="020B0604020202020204" pitchFamily="34" charset="0"/>
+              <a:buChar char="•"/>
+            </a:pPr>
+            <a:r>
+              <a:rPr lang="en-US" altLang="ko-KR" sz="1200">
+                <a:solidFill>
+                  <a:schemeClr val="tx1">
+                    <a:lumMod val="65000"/>
+                    <a:lumOff val="35000"/>
+                  </a:schemeClr>
+                </a:solidFill>
+                <a:latin typeface="페이퍼로지 4 Regular" charset="-127"/>
+                <a:ea typeface="페이퍼로지 4 Regular" charset="-127"/>
+                <a:cs typeface="Montserrat SemiBold"/>
+                <a:sym typeface="Montserrat SemiBold"/>
+              </a:rPr>
+              <a:t>GetAppBoundEncryptionSupportLevel</a:t>
+            </a:r>
+            <a:br>
+              <a:rPr lang="en-US" altLang="ko-KR" sz="1200">
+                <a:solidFill>
+                  <a:schemeClr val="tx1">
+                    <a:lumMod val="65000"/>
+                    <a:lumOff val="35000"/>
+                  </a:schemeClr>
+                </a:solidFill>
+                <a:latin typeface="페이퍼로지 4 Regular" charset="-127"/>
+                <a:ea typeface="페이퍼로지 4 Regular" charset="-127"/>
+                <a:cs typeface="Montserrat SemiBold"/>
+                <a:sym typeface="Montserrat SemiBold"/>
+              </a:rPr>
+            </a:br>
+            <a:br>
+              <a:rPr lang="en-US" altLang="ko-KR" sz="400">
+                <a:solidFill>
+                  <a:schemeClr val="tx1">
+                    <a:lumMod val="65000"/>
+                    <a:lumOff val="35000"/>
+                  </a:schemeClr>
+                </a:solidFill>
+                <a:latin typeface="페이퍼로지 4 Regular" charset="-127"/>
+                <a:ea typeface="페이퍼로지 4 Regular" charset="-127"/>
+                <a:cs typeface="Montserrat SemiBold"/>
+                <a:sym typeface="Montserrat SemiBold"/>
+              </a:rPr>
+            </a:br>
+            <a:r>
+              <a:rPr lang="en-US" altLang="ko-KR" sz="1200">
+                <a:solidFill>
+                  <a:schemeClr val="tx1">
+                    <a:lumMod val="65000"/>
+                    <a:lumOff val="35000"/>
+                  </a:schemeClr>
+                </a:solidFill>
+                <a:latin typeface="페이퍼로지 4 Regular" charset="-127"/>
+                <a:ea typeface="페이퍼로지 4 Regular" charset="-127"/>
+                <a:cs typeface="Montserrat SemiBold"/>
+                <a:sym typeface="Montserrat SemiBold"/>
+              </a:rPr>
+              <a:t>“ </a:t>
+            </a:r>
+            <a:r>
+              <a:rPr lang="ko-KR" altLang="en-US" sz="1200">
+                <a:solidFill>
+                  <a:schemeClr val="tx1">
+                    <a:lumMod val="65000"/>
+                    <a:lumOff val="35000"/>
+                  </a:schemeClr>
+                </a:solidFill>
+                <a:latin typeface="페이퍼로지 4 Regular" charset="-127"/>
+                <a:ea typeface="페이퍼로지 4 Regular" charset="-127"/>
+                <a:cs typeface="Montserrat SemiBold"/>
+                <a:sym typeface="Montserrat SemiBold"/>
+              </a:rPr>
+              <a:t>시스템 상태</a:t>
+            </a:r>
+            <a:r>
+              <a:rPr lang="en-US" altLang="ko-KR" sz="1200">
+                <a:solidFill>
+                  <a:schemeClr val="tx1">
+                    <a:lumMod val="65000"/>
+                    <a:lumOff val="35000"/>
+                  </a:schemeClr>
+                </a:solidFill>
+                <a:latin typeface="페이퍼로지 4 Regular" charset="-127"/>
+                <a:ea typeface="페이퍼로지 4 Regular" charset="-127"/>
+                <a:cs typeface="Montserrat SemiBold"/>
+                <a:sym typeface="Montserrat SemiBold"/>
+              </a:rPr>
+              <a:t>, </a:t>
+            </a:r>
+            <a:r>
+              <a:rPr lang="ko-KR" altLang="en-US" sz="1200">
+                <a:solidFill>
+                  <a:schemeClr val="tx1">
+                    <a:lumMod val="65000"/>
+                    <a:lumOff val="35000"/>
+                  </a:schemeClr>
+                </a:solidFill>
+                <a:latin typeface="페이퍼로지 4 Regular" charset="-127"/>
+                <a:ea typeface="페이퍼로지 4 Regular" charset="-127"/>
+                <a:cs typeface="Montserrat SemiBold"/>
+                <a:sym typeface="Montserrat SemiBold"/>
+              </a:rPr>
+              <a:t>브라우저 설정 조회 후 </a:t>
+            </a:r>
+            <a:r>
+              <a:rPr lang="en-US" altLang="ko-KR" sz="1200">
+                <a:solidFill>
+                  <a:schemeClr val="tx1">
+                    <a:lumMod val="65000"/>
+                    <a:lumOff val="35000"/>
+                  </a:schemeClr>
+                </a:solidFill>
+                <a:latin typeface="페이퍼로지 4 Regular" charset="-127"/>
+                <a:ea typeface="페이퍼로지 4 Regular" charset="-127"/>
+                <a:cs typeface="Montserrat SemiBold"/>
+                <a:sym typeface="Montserrat SemiBold"/>
+              </a:rPr>
+              <a:t>Enum(os_crypt : : SupportLevel) </a:t>
+            </a:r>
+            <a:r>
+              <a:rPr lang="ko-KR" altLang="en-US" sz="1200">
+                <a:solidFill>
+                  <a:schemeClr val="tx1">
+                    <a:lumMod val="65000"/>
+                    <a:lumOff val="35000"/>
+                  </a:schemeClr>
+                </a:solidFill>
+                <a:latin typeface="페이퍼로지 4 Regular" charset="-127"/>
+                <a:ea typeface="페이퍼로지 4 Regular" charset="-127"/>
+                <a:cs typeface="Montserrat SemiBold"/>
+                <a:sym typeface="Montserrat SemiBold"/>
+              </a:rPr>
+              <a:t>반환</a:t>
+            </a:r>
+            <a:endParaRPr lang="en-US" altLang="ko-KR" sz="1200">
+              <a:solidFill>
+                <a:schemeClr val="tx1">
+                  <a:lumMod val="65000"/>
+                  <a:lumOff val="35000"/>
+                </a:schemeClr>
+              </a:solidFill>
+              <a:latin typeface="페이퍼로지 4 Regular" charset="-127"/>
+              <a:ea typeface="페이퍼로지 4 Regular" charset="-127"/>
+              <a:cs typeface="Montserrat SemiBold"/>
+              <a:sym typeface="Montserrat SemiBold"/>
+            </a:endParaRPr>
+          </a:p>
+          <a:p>
+            <a:pPr marL="177800" lvl="2" indent="-177800">
+              <a:buSzPts val="1600"/>
+              <a:buFont typeface="Arial" panose="020B0604020202020204" pitchFamily="34" charset="0"/>
+              <a:buChar char="•"/>
+            </a:pPr>
+            <a:endParaRPr lang="en-US" altLang="ko-KR" sz="1200">
+              <a:solidFill>
+                <a:schemeClr val="tx1">
+                  <a:lumMod val="65000"/>
+                  <a:lumOff val="35000"/>
+                </a:schemeClr>
+              </a:solidFill>
+              <a:latin typeface="페이퍼로지 4 Regular" charset="-127"/>
+              <a:ea typeface="페이퍼로지 4 Regular" charset="-127"/>
+              <a:cs typeface="Montserrat SemiBold"/>
+              <a:sym typeface="Montserrat SemiBold"/>
+            </a:endParaRPr>
+          </a:p>
+          <a:p>
+            <a:pPr marL="177800" lvl="2" indent="-177800">
+              <a:buSzPts val="1600"/>
+              <a:buFont typeface="Arial" panose="020B0604020202020204" pitchFamily="34" charset="0"/>
+              <a:buChar char="•"/>
+            </a:pPr>
+            <a:r>
+              <a:rPr lang="en-US" altLang="ko-KR" sz="1200">
+                <a:solidFill>
+                  <a:schemeClr val="tx1">
+                    <a:lumMod val="65000"/>
+                    <a:lumOff val="35000"/>
+                  </a:schemeClr>
+                </a:solidFill>
+                <a:latin typeface="페이퍼로지 4 Regular" charset="-127"/>
+                <a:ea typeface="페이퍼로지 4 Regular" charset="-127"/>
+                <a:cs typeface="Montserrat SemiBold"/>
+                <a:sym typeface="Montserrat SemiBold"/>
+              </a:rPr>
+              <a:t>En/DecryptAppBoundString</a:t>
+            </a:r>
+            <a:br>
+              <a:rPr lang="en-US" altLang="ko-KR" sz="1200">
+                <a:solidFill>
+                  <a:schemeClr val="tx1">
+                    <a:lumMod val="65000"/>
+                    <a:lumOff val="35000"/>
+                  </a:schemeClr>
+                </a:solidFill>
+                <a:latin typeface="페이퍼로지 4 Regular" charset="-127"/>
+                <a:ea typeface="페이퍼로지 4 Regular" charset="-127"/>
+                <a:cs typeface="Montserrat SemiBold"/>
+                <a:sym typeface="Montserrat SemiBold"/>
+              </a:rPr>
+            </a:br>
+            <a:br>
+              <a:rPr lang="en-US" altLang="ko-KR" sz="400">
+                <a:solidFill>
+                  <a:schemeClr val="tx1">
+                    <a:lumMod val="65000"/>
+                    <a:lumOff val="35000"/>
+                  </a:schemeClr>
+                </a:solidFill>
+                <a:latin typeface="페이퍼로지 4 Regular" charset="-127"/>
+                <a:ea typeface="페이퍼로지 4 Regular" charset="-127"/>
+                <a:cs typeface="Montserrat SemiBold"/>
+                <a:sym typeface="Montserrat SemiBold"/>
+              </a:rPr>
+            </a:br>
+            <a:r>
+              <a:rPr lang="en-US" altLang="ko-KR" sz="1200">
+                <a:solidFill>
+                  <a:schemeClr val="tx1">
+                    <a:lumMod val="65000"/>
+                    <a:lumOff val="35000"/>
+                  </a:schemeClr>
+                </a:solidFill>
+                <a:latin typeface="페이퍼로지 4 Regular" charset="-127"/>
+                <a:ea typeface="페이퍼로지 4 Regular" charset="-127"/>
+                <a:cs typeface="Montserrat SemiBold"/>
+                <a:sym typeface="Montserrat SemiBold"/>
+              </a:rPr>
+              <a:t>“ elevator-&gt;En/DecryptData </a:t>
+            </a:r>
+            <a:r>
+              <a:rPr lang="ko-KR" altLang="en-US" sz="1200">
+                <a:solidFill>
+                  <a:schemeClr val="tx1">
+                    <a:lumMod val="65000"/>
+                    <a:lumOff val="35000"/>
+                  </a:schemeClr>
+                </a:solidFill>
+                <a:latin typeface="페이퍼로지 4 Regular" charset="-127"/>
+                <a:ea typeface="페이퍼로지 4 Regular" charset="-127"/>
+                <a:cs typeface="Montserrat SemiBold"/>
+                <a:sym typeface="Montserrat SemiBold"/>
+              </a:rPr>
+              <a:t>호출 </a:t>
+            </a:r>
+            <a:r>
+              <a:rPr lang="en-US" altLang="ko-KR" sz="1200">
+                <a:solidFill>
+                  <a:schemeClr val="tx1">
+                    <a:lumMod val="65000"/>
+                    <a:lumOff val="35000"/>
+                  </a:schemeClr>
+                </a:solidFill>
+                <a:latin typeface="페이퍼로지 4 Regular" charset="-127"/>
+                <a:ea typeface="페이퍼로지 4 Regular" charset="-127"/>
+                <a:cs typeface="Montserrat SemiBold"/>
+                <a:sym typeface="Montserrat SemiBold"/>
+              </a:rPr>
+              <a:t>”</a:t>
+            </a:r>
+            <a:br>
+              <a:rPr lang="en-US" altLang="ko-KR" sz="1200">
+                <a:solidFill>
+                  <a:schemeClr val="tx1">
+                    <a:lumMod val="65000"/>
+                    <a:lumOff val="35000"/>
+                  </a:schemeClr>
+                </a:solidFill>
+                <a:latin typeface="페이퍼로지 4 Regular" charset="-127"/>
+                <a:ea typeface="페이퍼로지 4 Regular" charset="-127"/>
+                <a:cs typeface="Montserrat SemiBold"/>
+                <a:sym typeface="Montserrat SemiBold"/>
+              </a:rPr>
+            </a:br>
+            <a:br>
+              <a:rPr lang="en-US" altLang="ko-KR" sz="800">
+                <a:solidFill>
+                  <a:schemeClr val="tx1">
+                    <a:lumMod val="65000"/>
+                    <a:lumOff val="35000"/>
+                  </a:schemeClr>
+                </a:solidFill>
+                <a:latin typeface="페이퍼로지 4 Regular" charset="-127"/>
+                <a:ea typeface="페이퍼로지 4 Regular" charset="-127"/>
+                <a:cs typeface="Montserrat SemiBold"/>
+                <a:sym typeface="Montserrat SemiBold"/>
+              </a:rPr>
+            </a:br>
+            <a:r>
+              <a:rPr lang="en-US" altLang="ko-KR" sz="1200">
+                <a:solidFill>
+                  <a:schemeClr val="tx1">
+                    <a:lumMod val="65000"/>
+                    <a:lumOff val="35000"/>
+                  </a:schemeClr>
+                </a:solidFill>
+                <a:latin typeface="페이퍼로지 4 Regular" charset="-127"/>
+                <a:ea typeface="페이퍼로지 4 Regular" charset="-127"/>
+                <a:cs typeface="Montserrat SemiBold"/>
+                <a:sym typeface="Montserrat SemiBold"/>
+              </a:rPr>
+              <a:t>+ DecryptAppBoundString &gt; kSuccessShouldReencrypt</a:t>
+            </a:r>
+            <a:r>
+              <a:rPr lang="ko-KR" altLang="en-US" sz="1200">
+                <a:solidFill>
+                  <a:schemeClr val="tx1">
+                    <a:lumMod val="65000"/>
+                    <a:lumOff val="35000"/>
+                  </a:schemeClr>
+                </a:solidFill>
+                <a:latin typeface="페이퍼로지 4 Regular" charset="-127"/>
+                <a:ea typeface="페이퍼로지 4 Regular" charset="-127"/>
+                <a:cs typeface="Montserrat SemiBold"/>
+                <a:sym typeface="Montserrat SemiBold"/>
+              </a:rPr>
+              <a:t> </a:t>
+            </a:r>
+            <a:r>
+              <a:rPr lang="en-US" altLang="ko-KR" sz="1200">
+                <a:solidFill>
+                  <a:schemeClr val="tx1">
+                    <a:lumMod val="65000"/>
+                    <a:lumOff val="35000"/>
+                  </a:schemeClr>
+                </a:solidFill>
+                <a:latin typeface="페이퍼로지 4 Regular" charset="-127"/>
+                <a:ea typeface="페이퍼로지 4 Regular" charset="-127"/>
+                <a:cs typeface="Montserrat SemiBold"/>
+                <a:sym typeface="Montserrat SemiBold"/>
+              </a:rPr>
+              <a:t>flag</a:t>
+            </a:r>
+            <a:r>
+              <a:rPr lang="ko-KR" altLang="en-US" sz="1200">
+                <a:solidFill>
+                  <a:schemeClr val="tx1">
+                    <a:lumMod val="65000"/>
+                    <a:lumOff val="35000"/>
+                  </a:schemeClr>
+                </a:solidFill>
+                <a:latin typeface="페이퍼로지 4 Regular" charset="-127"/>
+                <a:ea typeface="페이퍼로지 4 Regular" charset="-127"/>
+                <a:cs typeface="Montserrat SemiBold"/>
+                <a:sym typeface="Montserrat SemiBold"/>
+              </a:rPr>
+              <a:t> 조회</a:t>
+            </a:r>
+            <a:endParaRPr lang="en-US" altLang="ko-KR" sz="1200">
+              <a:solidFill>
+                <a:schemeClr val="tx1">
+                  <a:lumMod val="65000"/>
+                  <a:lumOff val="35000"/>
+                </a:schemeClr>
+              </a:solidFill>
+              <a:latin typeface="페이퍼로지 4 Regular" charset="-127"/>
+              <a:ea typeface="페이퍼로지 4 Regular" charset="-127"/>
+              <a:cs typeface="Montserrat SemiBold"/>
+              <a:sym typeface="Montserrat SemiBold"/>
+            </a:endParaRPr>
+          </a:p>
+        </p:txBody>
+      </p:sp>
+      <p:sp>
+        <p:nvSpPr>
+          <p:cNvPr id="170" name="Google Shape;170;p19">
+            <a:extLst>
+              <a:ext uri="{FF2B5EF4-FFF2-40B4-BE49-F238E27FC236}">
+                <a16:creationId xmlns:a16="http://schemas.microsoft.com/office/drawing/2014/main" id="{AFA79D13-C114-92D7-F4B3-134E59FEC356}"/>
+              </a:ext>
+            </a:extLst>
+          </p:cNvPr>
+          <p:cNvSpPr txBox="1">
+            <a:spLocks noGrp="1"/>
+          </p:cNvSpPr>
+          <p:nvPr>
+            <p:ph type="title"/>
+          </p:nvPr>
+        </p:nvSpPr>
+        <p:spPr>
+          <a:xfrm>
+            <a:off x="452550" y="121018"/>
+            <a:ext cx="8238900" cy="561600"/>
+          </a:xfrm>
+          <a:prstGeom prst="rect">
+            <a:avLst/>
+          </a:prstGeom>
+          <a:ln>
+            <a:noFill/>
+          </a:ln>
+        </p:spPr>
+        <p:txBody>
+          <a:bodyPr spcFirstLastPara="1" wrap="square" lIns="91425" tIns="91425" rIns="91425" bIns="91425" anchor="t" anchorCtr="0">
+            <a:noAutofit/>
+          </a:bodyPr>
+          <a:lstStyle/>
+          <a:p>
+            <a:pPr lvl="0"/>
+            <a:r>
+              <a:rPr lang="en-US" altLang="ko-KR"/>
+              <a:t>“ v20 ” chrome/browser/os_crypt/</a:t>
+            </a:r>
+            <a:endParaRPr dirty="0"/>
+          </a:p>
+        </p:txBody>
+      </p:sp>
+      <p:cxnSp>
+        <p:nvCxnSpPr>
+          <p:cNvPr id="3" name="직선 연결선 2">
+            <a:extLst>
+              <a:ext uri="{FF2B5EF4-FFF2-40B4-BE49-F238E27FC236}">
+                <a16:creationId xmlns:a16="http://schemas.microsoft.com/office/drawing/2014/main" id="{51EEECB4-2549-959A-21AC-9B636EFBEE33}"/>
+              </a:ext>
+            </a:extLst>
+          </p:cNvPr>
+          <p:cNvCxnSpPr/>
+          <p:nvPr/>
+        </p:nvCxnSpPr>
+        <p:spPr>
+          <a:xfrm>
+            <a:off x="387275" y="763285"/>
+            <a:ext cx="8240358" cy="0"/>
+          </a:xfrm>
+          <a:prstGeom prst="line">
+            <a:avLst/>
+          </a:prstGeom>
+          <a:ln w="38100">
+            <a:solidFill>
+              <a:srgbClr val="51EEBC"/>
+            </a:solidFill>
+          </a:ln>
+        </p:spPr>
+        <p:style>
+          <a:lnRef idx="1">
+            <a:schemeClr val="accent1"/>
+          </a:lnRef>
+          <a:fillRef idx="0">
+            <a:schemeClr val="accent1"/>
+          </a:fillRef>
+          <a:effectRef idx="0">
+            <a:schemeClr val="accent1"/>
+          </a:effectRef>
+          <a:fontRef idx="minor">
+            <a:schemeClr val="tx1"/>
+          </a:fontRef>
+        </p:style>
+      </p:cxnSp>
+    </p:spTree>
+    <p:extLst>
+      <p:ext uri="{BB962C8B-B14F-4D97-AF65-F5344CB8AC3E}">
+        <p14:creationId xmlns:p14="http://schemas.microsoft.com/office/powerpoint/2010/main" val="4192430106"/>
+      </p:ext>
+    </p:extLst>
+  </p:cSld>
+  <p:clrMapOvr>
+    <a:masterClrMapping/>
+  </p:clrMapOvr>
+</p:sld>
+</file>
+
+<file path=ppt/slides/slide21.xml><?xml version="1.0" encoding="utf-8"?>
 <p:sld xmlns:a="http://schemas.openxmlformats.org/drawingml/2006/main" xmlns:r="http://schemas.openxmlformats.org/officeDocument/2006/relationships" xmlns:p="http://schemas.openxmlformats.org/presentationml/2006/main">
   <p:cSld>
     <p:spTree>
@@ -22031,7 +23534,7 @@
 </p:sld>
 </file>
 
-<file path=ppt/slides/slide21.xml><?xml version="1.0" encoding="utf-8"?>
+<file path=ppt/slides/slide22.xml><?xml version="1.0" encoding="utf-8"?>
 <p:sld xmlns:a="http://schemas.openxmlformats.org/drawingml/2006/main" xmlns:r="http://schemas.openxmlformats.org/officeDocument/2006/relationships" xmlns:p="http://schemas.openxmlformats.org/presentationml/2006/main">
   <p:cSld>
     <p:spTree>
@@ -22912,7 +24415,7 @@
 </p:sld>
 </file>
 
-<file path=ppt/slides/slide22.xml><?xml version="1.0" encoding="utf-8"?>
+<file path=ppt/slides/slide23.xml><?xml version="1.0" encoding="utf-8"?>
 <p:sld xmlns:a="http://schemas.openxmlformats.org/drawingml/2006/main" xmlns:r="http://schemas.openxmlformats.org/officeDocument/2006/relationships" xmlns:p="http://schemas.openxmlformats.org/presentationml/2006/main">
   <p:cSld>
     <p:spTree>
@@ -23113,7 +24616,7 @@
 </p:sld>
 </file>
 
-<file path=ppt/slides/slide23.xml><?xml version="1.0" encoding="utf-8"?>
+<file path=ppt/slides/slide24.xml><?xml version="1.0" encoding="utf-8"?>
 <p:sld xmlns:a="http://schemas.openxmlformats.org/drawingml/2006/main" xmlns:r="http://schemas.openxmlformats.org/officeDocument/2006/relationships" xmlns:p="http://schemas.openxmlformats.org/presentationml/2006/main">
   <p:cSld>
     <p:spTree>
@@ -23314,7 +24817,7 @@
 </p:sld>
 </file>
 
-<file path=ppt/slides/slide24.xml><?xml version="1.0" encoding="utf-8"?>
+<file path=ppt/slides/slide25.xml><?xml version="1.0" encoding="utf-8"?>
 <p:sld xmlns:a="http://schemas.openxmlformats.org/drawingml/2006/main" xmlns:r="http://schemas.openxmlformats.org/officeDocument/2006/relationships" xmlns:p="http://schemas.openxmlformats.org/presentationml/2006/main">
   <p:cSld>
     <p:spTree>
@@ -23485,7 +24988,7 @@
 </p:sld>
 </file>
 
-<file path=ppt/slides/slide25.xml><?xml version="1.0" encoding="utf-8"?>
+<file path=ppt/slides/slide26.xml><?xml version="1.0" encoding="utf-8"?>
 <p:sld xmlns:a="http://schemas.openxmlformats.org/drawingml/2006/main" xmlns:r="http://schemas.openxmlformats.org/officeDocument/2006/relationships" xmlns:p="http://schemas.openxmlformats.org/presentationml/2006/main">
   <p:cSld>
     <p:spTree>
@@ -25846,7 +27349,7 @@
           <p:nvPr>
             <p:extLst>
               <p:ext uri="{D42A27DB-BD31-4B8C-83A1-F6EECF244321}">
-                <p14:modId xmlns:p14="http://schemas.microsoft.com/office/powerpoint/2010/main" val="1691701872"/>
+                <p14:modId xmlns:p14="http://schemas.microsoft.com/office/powerpoint/2010/main" val="4142912857"/>
               </p:ext>
             </p:extLst>
           </p:nvPr>
@@ -26495,7 +27998,14 @@
                       </a:endParaRPr>
                     </a:p>
                   </a:txBody>
-                  <a:tcPr/>
+                  <a:tcPr>
+                    <a:solidFill>
+                      <a:schemeClr val="accent3">
+                        <a:lumMod val="60000"/>
+                        <a:lumOff val="40000"/>
+                      </a:schemeClr>
+                    </a:solidFill>
+                  </a:tcPr>
                 </a:tc>
                 <a:tc>
                   <a:txBody>
@@ -26516,7 +28026,14 @@
                       </a:endParaRPr>
                     </a:p>
                   </a:txBody>
-                  <a:tcPr/>
+                  <a:tcPr>
+                    <a:solidFill>
+                      <a:schemeClr val="accent3">
+                        <a:lumMod val="60000"/>
+                        <a:lumOff val="40000"/>
+                      </a:schemeClr>
+                    </a:solidFill>
+                  </a:tcPr>
                 </a:tc>
                 <a:tc>
                   <a:txBody>
@@ -26537,7 +28054,14 @@
                       </a:endParaRPr>
                     </a:p>
                   </a:txBody>
-                  <a:tcPr/>
+                  <a:tcPr>
+                    <a:solidFill>
+                      <a:schemeClr val="accent3">
+                        <a:lumMod val="60000"/>
+                        <a:lumOff val="40000"/>
+                      </a:schemeClr>
+                    </a:solidFill>
+                  </a:tcPr>
                 </a:tc>
                 <a:tc>
                   <a:txBody>
@@ -26558,7 +28082,14 @@
                       </a:endParaRPr>
                     </a:p>
                   </a:txBody>
-                  <a:tcPr/>
+                  <a:tcPr>
+                    <a:solidFill>
+                      <a:schemeClr val="accent3">
+                        <a:lumMod val="60000"/>
+                        <a:lumOff val="40000"/>
+                      </a:schemeClr>
+                    </a:solidFill>
+                  </a:tcPr>
                 </a:tc>
                 <a:tc>
                   <a:txBody>
@@ -26579,7 +28110,14 @@
                       </a:endParaRPr>
                     </a:p>
                   </a:txBody>
-                  <a:tcPr/>
+                  <a:tcPr>
+                    <a:solidFill>
+                      <a:schemeClr val="accent3">
+                        <a:lumMod val="60000"/>
+                        <a:lumOff val="40000"/>
+                      </a:schemeClr>
+                    </a:solidFill>
+                  </a:tcPr>
                 </a:tc>
                 <a:extLst>
                   <a:ext uri="{0D108BD9-81ED-4DB2-BD59-A6C34878D82A}">
@@ -26724,6 +28262,373 @@
         <p:cNvPr id="1" name="Shape 167">
           <a:extLst>
             <a:ext uri="{FF2B5EF4-FFF2-40B4-BE49-F238E27FC236}">
+              <a16:creationId xmlns:a16="http://schemas.microsoft.com/office/drawing/2014/main" id="{2C98F3DE-358C-1B3E-7456-F58566CDC70B}"/>
+            </a:ext>
+          </a:extLst>
+        </p:cNvPr>
+        <p:cNvGrpSpPr/>
+        <p:nvPr/>
+      </p:nvGrpSpPr>
+      <p:grpSpPr>
+        <a:xfrm>
+          <a:off x="0" y="0"/>
+          <a:ext cx="0" cy="0"/>
+          <a:chOff x="0" y="0"/>
+          <a:chExt cx="0" cy="0"/>
+        </a:xfrm>
+      </p:grpSpPr>
+      <p:sp>
+        <p:nvSpPr>
+          <p:cNvPr id="169" name="Google Shape;169;p19">
+            <a:extLst>
+              <a:ext uri="{FF2B5EF4-FFF2-40B4-BE49-F238E27FC236}">
+                <a16:creationId xmlns:a16="http://schemas.microsoft.com/office/drawing/2014/main" id="{FF33B82D-023D-8908-CE81-A1922059AF8D}"/>
+              </a:ext>
+            </a:extLst>
+          </p:cNvPr>
+          <p:cNvSpPr txBox="1"/>
+          <p:nvPr/>
+        </p:nvSpPr>
+        <p:spPr>
+          <a:xfrm flipH="1">
+            <a:off x="452550" y="885617"/>
+            <a:ext cx="8238900" cy="4136865"/>
+          </a:xfrm>
+          <a:prstGeom prst="rect">
+            <a:avLst/>
+          </a:prstGeom>
+          <a:noFill/>
+          <a:ln>
+            <a:noFill/>
+          </a:ln>
+        </p:spPr>
+        <p:txBody>
+          <a:bodyPr spcFirstLastPara="1" wrap="square" lIns="91425" tIns="45700" rIns="91425" bIns="45700" anchor="t" anchorCtr="0">
+            <a:noAutofit/>
+          </a:bodyPr>
+          <a:lstStyle/>
+          <a:p>
+            <a:pPr marL="177800" lvl="2" indent="-177800">
+              <a:buSzPts val="1600"/>
+              <a:buFont typeface="Arial" panose="020B0604020202020204" pitchFamily="34" charset="0"/>
+              <a:buChar char="•"/>
+            </a:pPr>
+            <a:r>
+              <a:rPr lang="en-US" altLang="ko-KR" sz="1800">
+                <a:solidFill>
+                  <a:schemeClr val="accent3">
+                    <a:lumMod val="75000"/>
+                  </a:schemeClr>
+                </a:solidFill>
+                <a:latin typeface="페이퍼로지 4 Regular" charset="-127"/>
+                <a:ea typeface="페이퍼로지 4 Regular" charset="-127"/>
+                <a:cs typeface="Montserrat SemiBold"/>
+                <a:sym typeface="Montserrat SemiBold"/>
+              </a:rPr>
+              <a:t>diff. IElevator</a:t>
+            </a:r>
+            <a:r>
+              <a:rPr lang="ko-KR" altLang="en-US" sz="1800">
+                <a:solidFill>
+                  <a:schemeClr val="accent3">
+                    <a:lumMod val="75000"/>
+                  </a:schemeClr>
+                </a:solidFill>
+                <a:latin typeface="페이퍼로지 4 Regular" charset="-127"/>
+                <a:ea typeface="페이퍼로지 4 Regular" charset="-127"/>
+                <a:cs typeface="Montserrat SemiBold"/>
+                <a:sym typeface="Montserrat SemiBold"/>
+              </a:rPr>
+              <a:t> </a:t>
+            </a:r>
+            <a:r>
+              <a:rPr lang="en-US" altLang="ko-KR" sz="1800">
+                <a:solidFill>
+                  <a:schemeClr val="accent3">
+                    <a:lumMod val="75000"/>
+                  </a:schemeClr>
+                </a:solidFill>
+                <a:latin typeface="페이퍼로지 4 Regular" charset="-127"/>
+                <a:ea typeface="페이퍼로지 4 Regular" charset="-127"/>
+                <a:cs typeface="Montserrat SemiBold"/>
+                <a:sym typeface="Montserrat SemiBold"/>
+              </a:rPr>
+              <a:t>IElevator2</a:t>
+            </a:r>
+          </a:p>
+          <a:p>
+            <a:pPr marL="177800" lvl="2" indent="-177800">
+              <a:buSzPts val="1600"/>
+              <a:buFont typeface="Arial" panose="020B0604020202020204" pitchFamily="34" charset="0"/>
+              <a:buChar char="•"/>
+            </a:pPr>
+            <a:endParaRPr lang="en-US" altLang="ko-KR" sz="1800">
+              <a:solidFill>
+                <a:schemeClr val="dk1"/>
+              </a:solidFill>
+              <a:latin typeface="페이퍼로지 4 Regular" charset="-127"/>
+              <a:ea typeface="페이퍼로지 4 Regular" charset="-127"/>
+              <a:cs typeface="Montserrat SemiBold"/>
+              <a:sym typeface="Montserrat SemiBold"/>
+            </a:endParaRPr>
+          </a:p>
+          <a:p>
+            <a:pPr marL="177800" lvl="2" indent="-177800">
+              <a:buSzPts val="1600"/>
+              <a:buFont typeface="Arial" panose="020B0604020202020204" pitchFamily="34" charset="0"/>
+              <a:buChar char="•"/>
+            </a:pPr>
+            <a:r>
+              <a:rPr lang="en-US" altLang="ko-KR" sz="1800">
+                <a:solidFill>
+                  <a:schemeClr val="dk1"/>
+                </a:solidFill>
+                <a:latin typeface="페이퍼로지 4 Regular" charset="-127"/>
+                <a:ea typeface="페이퍼로지 4 Regular" charset="-127"/>
+                <a:cs typeface="Montserrat SemiBold"/>
+                <a:sym typeface="Montserrat SemiBold"/>
+              </a:rPr>
+              <a:t>IElevator2</a:t>
+            </a:r>
+            <a:r>
+              <a:rPr lang="ko-KR" altLang="en-US" sz="1800">
+                <a:solidFill>
+                  <a:schemeClr val="dk1"/>
+                </a:solidFill>
+                <a:latin typeface="페이퍼로지 4 Regular" charset="-127"/>
+                <a:ea typeface="페이퍼로지 4 Regular" charset="-127"/>
+                <a:cs typeface="Montserrat SemiBold"/>
+                <a:sym typeface="Montserrat SemiBold"/>
+              </a:rPr>
+              <a:t> 추가된 함수 </a:t>
+            </a:r>
+            <a:endParaRPr lang="en-US" altLang="ko-KR" sz="1800">
+              <a:solidFill>
+                <a:schemeClr val="dk1"/>
+              </a:solidFill>
+              <a:latin typeface="페이퍼로지 4 Regular" charset="-127"/>
+              <a:ea typeface="페이퍼로지 4 Regular" charset="-127"/>
+              <a:cs typeface="Montserrat SemiBold"/>
+              <a:sym typeface="Montserrat SemiBold"/>
+            </a:endParaRPr>
+          </a:p>
+        </p:txBody>
+      </p:sp>
+      <p:sp>
+        <p:nvSpPr>
+          <p:cNvPr id="170" name="Google Shape;170;p19">
+            <a:extLst>
+              <a:ext uri="{FF2B5EF4-FFF2-40B4-BE49-F238E27FC236}">
+                <a16:creationId xmlns:a16="http://schemas.microsoft.com/office/drawing/2014/main" id="{DD4F6DEE-BFB7-9829-7681-41B832E9B43B}"/>
+              </a:ext>
+            </a:extLst>
+          </p:cNvPr>
+          <p:cNvSpPr txBox="1">
+            <a:spLocks noGrp="1"/>
+          </p:cNvSpPr>
+          <p:nvPr>
+            <p:ph type="title"/>
+          </p:nvPr>
+        </p:nvSpPr>
+        <p:spPr>
+          <a:xfrm>
+            <a:off x="452550" y="121018"/>
+            <a:ext cx="8238900" cy="561600"/>
+          </a:xfrm>
+          <a:prstGeom prst="rect">
+            <a:avLst/>
+          </a:prstGeom>
+          <a:ln>
+            <a:noFill/>
+          </a:ln>
+        </p:spPr>
+        <p:txBody>
+          <a:bodyPr spcFirstLastPara="1" wrap="square" lIns="91425" tIns="91425" rIns="91425" bIns="91425" anchor="t" anchorCtr="0">
+            <a:noAutofit/>
+          </a:bodyPr>
+          <a:lstStyle/>
+          <a:p>
+            <a:pPr lvl="0"/>
+            <a:r>
+              <a:rPr lang="en" altLang="ko-KR">
+                <a:latin typeface="페이퍼로지 6 SemiBold" pitchFamily="2" charset="-127"/>
+                <a:ea typeface="페이퍼로지 6 SemiBold" pitchFamily="2" charset="-127"/>
+              </a:rPr>
+              <a:t>Overview</a:t>
+            </a:r>
+            <a:endParaRPr dirty="0"/>
+          </a:p>
+        </p:txBody>
+      </p:sp>
+      <p:cxnSp>
+        <p:nvCxnSpPr>
+          <p:cNvPr id="3" name="직선 연결선 2">
+            <a:extLst>
+              <a:ext uri="{FF2B5EF4-FFF2-40B4-BE49-F238E27FC236}">
+                <a16:creationId xmlns:a16="http://schemas.microsoft.com/office/drawing/2014/main" id="{2F11DC94-662E-D03E-C822-1B400E4951F5}"/>
+              </a:ext>
+            </a:extLst>
+          </p:cNvPr>
+          <p:cNvCxnSpPr/>
+          <p:nvPr/>
+        </p:nvCxnSpPr>
+        <p:spPr>
+          <a:xfrm>
+            <a:off x="387275" y="763285"/>
+            <a:ext cx="8240358" cy="0"/>
+          </a:xfrm>
+          <a:prstGeom prst="line">
+            <a:avLst/>
+          </a:prstGeom>
+          <a:ln w="38100">
+            <a:solidFill>
+              <a:srgbClr val="51EEBC"/>
+            </a:solidFill>
+          </a:ln>
+        </p:spPr>
+        <p:style>
+          <a:lnRef idx="1">
+            <a:schemeClr val="accent1"/>
+          </a:lnRef>
+          <a:fillRef idx="0">
+            <a:schemeClr val="accent1"/>
+          </a:fillRef>
+          <a:effectRef idx="0">
+            <a:schemeClr val="accent1"/>
+          </a:effectRef>
+          <a:fontRef idx="minor">
+            <a:schemeClr val="tx1"/>
+          </a:fontRef>
+        </p:style>
+      </p:cxnSp>
+      <p:sp>
+        <p:nvSpPr>
+          <p:cNvPr id="5" name="TextBox 4">
+            <a:extLst>
+              <a:ext uri="{FF2B5EF4-FFF2-40B4-BE49-F238E27FC236}">
+                <a16:creationId xmlns:a16="http://schemas.microsoft.com/office/drawing/2014/main" id="{8D98A38A-52F8-6B3E-BB26-8CF724AE5655}"/>
+              </a:ext>
+            </a:extLst>
+          </p:cNvPr>
+          <p:cNvSpPr txBox="1"/>
+          <p:nvPr/>
+        </p:nvSpPr>
+        <p:spPr>
+          <a:xfrm>
+            <a:off x="2017484" y="2083529"/>
+            <a:ext cx="6341633" cy="2031325"/>
+          </a:xfrm>
+          <a:prstGeom prst="rect">
+            <a:avLst/>
+          </a:prstGeom>
+          <a:noFill/>
+        </p:spPr>
+        <p:txBody>
+          <a:bodyPr wrap="square">
+            <a:spAutoFit/>
+          </a:bodyPr>
+          <a:lstStyle/>
+          <a:p>
+            <a:r>
+              <a:rPr lang="ko-KR" altLang="en-US"/>
+              <a:t>interface IElevator2 : IElevator {</a:t>
+            </a:r>
+          </a:p>
+          <a:p>
+            <a:r>
+              <a:rPr lang="ko-KR" altLang="en-US"/>
+              <a:t>        HRESULT _stdcall </a:t>
+            </a:r>
+            <a:r>
+              <a:rPr lang="ko-KR" altLang="en-US">
+                <a:solidFill>
+                  <a:srgbClr val="FF0000"/>
+                </a:solidFill>
+              </a:rPr>
+              <a:t>RunIsolatedChrome</a:t>
+            </a:r>
+            <a:r>
+              <a:rPr lang="ko-KR" altLang="en-US"/>
+              <a:t>(</a:t>
+            </a:r>
+          </a:p>
+          <a:p>
+            <a:r>
+              <a:rPr lang="ko-KR" altLang="en-US"/>
+              <a:t>                        [in] unsigned long flags, </a:t>
+            </a:r>
+          </a:p>
+          <a:p>
+            <a:r>
+              <a:rPr lang="ko-KR" altLang="en-US"/>
+              <a:t>                        [in] LPWSTR command_line, </a:t>
+            </a:r>
+          </a:p>
+          <a:p>
+            <a:r>
+              <a:rPr lang="ko-KR" altLang="en-US"/>
+              <a:t>                        [out] BSTR* log, </a:t>
+            </a:r>
+          </a:p>
+          <a:p>
+            <a:r>
+              <a:rPr lang="ko-KR" altLang="en-US"/>
+              <a:t>                        [out] ULONG_PTR* proc_handle, </a:t>
+            </a:r>
+          </a:p>
+          <a:p>
+            <a:r>
+              <a:rPr lang="ko-KR" altLang="en-US"/>
+              <a:t>                        [out] unsigned long* last_error);</a:t>
+            </a:r>
+          </a:p>
+          <a:p>
+            <a:r>
+              <a:rPr lang="ko-KR" altLang="en-US"/>
+              <a:t>        HRESULT _stdcall </a:t>
+            </a:r>
+            <a:r>
+              <a:rPr lang="ko-KR" altLang="en-US">
+                <a:solidFill>
+                  <a:srgbClr val="FF0000"/>
+                </a:solidFill>
+              </a:rPr>
+              <a:t>AcceptInvitation</a:t>
+            </a:r>
+            <a:r>
+              <a:rPr lang="ko-KR" altLang="en-US"/>
+              <a:t>([in] LPWSTR server_name);</a:t>
+            </a:r>
+          </a:p>
+          <a:p>
+            <a:r>
+              <a:rPr lang="ko-KR" altLang="en-US"/>
+              <a:t>    };</a:t>
+            </a:r>
+          </a:p>
+        </p:txBody>
+      </p:sp>
+    </p:spTree>
+    <p:extLst>
+      <p:ext uri="{BB962C8B-B14F-4D97-AF65-F5344CB8AC3E}">
+        <p14:creationId xmlns:p14="http://schemas.microsoft.com/office/powerpoint/2010/main" val="2083327637"/>
+      </p:ext>
+    </p:extLst>
+  </p:cSld>
+  <p:clrMapOvr>
+    <a:masterClrMapping/>
+  </p:clrMapOvr>
+</p:sld>
+</file>
+
+<file path=ppt/slides/slide8.xml><?xml version="1.0" encoding="utf-8"?>
+<p:sld xmlns:a="http://schemas.openxmlformats.org/drawingml/2006/main" xmlns:r="http://schemas.openxmlformats.org/officeDocument/2006/relationships" xmlns:p="http://schemas.openxmlformats.org/presentationml/2006/main">
+  <p:cSld>
+    <p:spTree>
+      <p:nvGrpSpPr>
+        <p:cNvPr id="1" name="Shape 167">
+          <a:extLst>
+            <a:ext uri="{FF2B5EF4-FFF2-40B4-BE49-F238E27FC236}">
               <a16:creationId xmlns:a16="http://schemas.microsoft.com/office/drawing/2014/main" id="{593526D0-361E-040D-CDF4-D5EB810A7F65}"/>
             </a:ext>
           </a:extLst>
@@ -27747,7 +29652,7 @@
 </p:sld>
 </file>
 
-<file path=ppt/slides/slide8.xml><?xml version="1.0" encoding="utf-8"?>
+<file path=ppt/slides/slide9.xml><?xml version="1.0" encoding="utf-8"?>
 <p:sld xmlns:a="http://schemas.openxmlformats.org/drawingml/2006/main" xmlns:r="http://schemas.openxmlformats.org/officeDocument/2006/relationships" xmlns:p="http://schemas.openxmlformats.org/presentationml/2006/main">
   <p:cSld>
     <p:spTree>
@@ -28258,1381 +30163,6 @@
     <p:extLst>
       <p:ext uri="{BB962C8B-B14F-4D97-AF65-F5344CB8AC3E}">
         <p14:creationId xmlns:p14="http://schemas.microsoft.com/office/powerpoint/2010/main" val="2011641286"/>
-      </p:ext>
-    </p:extLst>
-  </p:cSld>
-  <p:clrMapOvr>
-    <a:masterClrMapping/>
-  </p:clrMapOvr>
-</p:sld>
-</file>
-
-<file path=ppt/slides/slide9.xml><?xml version="1.0" encoding="utf-8"?>
-<p:sld xmlns:a="http://schemas.openxmlformats.org/drawingml/2006/main" xmlns:r="http://schemas.openxmlformats.org/officeDocument/2006/relationships" xmlns:p="http://schemas.openxmlformats.org/presentationml/2006/main">
-  <p:cSld>
-    <p:spTree>
-      <p:nvGrpSpPr>
-        <p:cNvPr id="1" name="Shape 167">
-          <a:extLst>
-            <a:ext uri="{FF2B5EF4-FFF2-40B4-BE49-F238E27FC236}">
-              <a16:creationId xmlns:a16="http://schemas.microsoft.com/office/drawing/2014/main" id="{BFA7B48A-AF8D-103B-693C-8FABB8EEBEC4}"/>
-            </a:ext>
-          </a:extLst>
-        </p:cNvPr>
-        <p:cNvGrpSpPr/>
-        <p:nvPr/>
-      </p:nvGrpSpPr>
-      <p:grpSpPr>
-        <a:xfrm>
-          <a:off x="0" y="0"/>
-          <a:ext cx="0" cy="0"/>
-          <a:chOff x="0" y="0"/>
-          <a:chExt cx="0" cy="0"/>
-        </a:xfrm>
-      </p:grpSpPr>
-      <p:sp>
-        <p:nvSpPr>
-          <p:cNvPr id="169" name="Google Shape;169;p19">
-            <a:extLst>
-              <a:ext uri="{FF2B5EF4-FFF2-40B4-BE49-F238E27FC236}">
-                <a16:creationId xmlns:a16="http://schemas.microsoft.com/office/drawing/2014/main" id="{34A9ADDB-49B6-20F0-272A-982F20380EAE}"/>
-              </a:ext>
-            </a:extLst>
-          </p:cNvPr>
-          <p:cNvSpPr txBox="1"/>
-          <p:nvPr/>
-        </p:nvSpPr>
-        <p:spPr>
-          <a:xfrm flipH="1">
-            <a:off x="452550" y="885617"/>
-            <a:ext cx="8238900" cy="4136865"/>
-          </a:xfrm>
-          <a:prstGeom prst="rect">
-            <a:avLst/>
-          </a:prstGeom>
-          <a:noFill/>
-          <a:ln>
-            <a:noFill/>
-          </a:ln>
-        </p:spPr>
-        <p:txBody>
-          <a:bodyPr spcFirstLastPara="1" wrap="square" lIns="91425" tIns="45700" rIns="91425" bIns="45700" anchor="t" anchorCtr="0">
-            <a:noAutofit/>
-          </a:bodyPr>
-          <a:lstStyle/>
-          <a:p>
-            <a:pPr marL="177800" lvl="2" indent="-177800">
-              <a:buSzPts val="1600"/>
-              <a:buFont typeface="Arial" panose="020B0604020202020204" pitchFamily="34" charset="0"/>
-              <a:buChar char="•"/>
-            </a:pPr>
-            <a:r>
-              <a:rPr lang="en-US" altLang="ko-KR" sz="1600">
-                <a:solidFill>
-                  <a:schemeClr val="accent3">
-                    <a:lumMod val="75000"/>
-                  </a:schemeClr>
-                </a:solidFill>
-                <a:latin typeface="페이퍼로지 4 Regular" charset="-127"/>
-                <a:ea typeface="페이퍼로지 4 Regular" charset="-127"/>
-                <a:cs typeface="Montserrat SemiBold"/>
-                <a:sym typeface="Montserrat SemiBold"/>
-              </a:rPr>
-              <a:t>Decrypt</a:t>
-            </a:r>
-            <a:r>
-              <a:rPr lang="ko-KR" altLang="en-US" sz="1600">
-                <a:solidFill>
-                  <a:schemeClr val="accent3">
-                    <a:lumMod val="75000"/>
-                  </a:schemeClr>
-                </a:solidFill>
-                <a:latin typeface="페이퍼로지 4 Regular" charset="-127"/>
-                <a:ea typeface="페이퍼로지 4 Regular" charset="-127"/>
-                <a:cs typeface="Montserrat SemiBold"/>
-                <a:sym typeface="Montserrat SemiBold"/>
-              </a:rPr>
-              <a:t>를 위한 단계</a:t>
-            </a:r>
-            <a:endParaRPr lang="en-US" altLang="ko-KR" sz="1600">
-              <a:solidFill>
-                <a:schemeClr val="accent3">
-                  <a:lumMod val="75000"/>
-                </a:schemeClr>
-              </a:solidFill>
-              <a:latin typeface="페이퍼로지 4 Regular" charset="-127"/>
-              <a:ea typeface="페이퍼로지 4 Regular" charset="-127"/>
-              <a:cs typeface="Montserrat SemiBold"/>
-              <a:sym typeface="Montserrat SemiBold"/>
-            </a:endParaRPr>
-          </a:p>
-          <a:p>
-            <a:pPr marL="177800" lvl="2" indent="-177800">
-              <a:buSzPts val="1600"/>
-              <a:buFont typeface="Arial" panose="020B0604020202020204" pitchFamily="34" charset="0"/>
-              <a:buChar char="•"/>
-            </a:pPr>
-            <a:endParaRPr lang="en-US" altLang="ko-KR">
-              <a:solidFill>
-                <a:schemeClr val="dk1"/>
-              </a:solidFill>
-              <a:latin typeface="페이퍼로지 4 Regular" charset="-127"/>
-              <a:ea typeface="페이퍼로지 4 Regular" charset="-127"/>
-              <a:cs typeface="Montserrat SemiBold"/>
-              <a:sym typeface="Montserrat SemiBold"/>
-            </a:endParaRPr>
-          </a:p>
-          <a:p>
-            <a:pPr marL="342900" lvl="2" indent="-342900">
-              <a:buSzPts val="1600"/>
-              <a:buAutoNum type="arabicPeriod"/>
-            </a:pPr>
-            <a:r>
-              <a:rPr lang="en-US" altLang="ko-KR">
-                <a:solidFill>
-                  <a:schemeClr val="dk1"/>
-                </a:solidFill>
-                <a:latin typeface="페이퍼로지 4 Regular" charset="-127"/>
-                <a:ea typeface="페이퍼로지 4 Regular" charset="-127"/>
-                <a:cs typeface="Montserrat SemiBold"/>
-                <a:sym typeface="Montserrat SemiBold"/>
-              </a:rPr>
-              <a:t>App-Bound Encrypted</a:t>
-            </a:r>
-            <a:r>
-              <a:rPr lang="ko-KR" altLang="en-US">
-                <a:solidFill>
-                  <a:schemeClr val="dk1"/>
-                </a:solidFill>
-                <a:latin typeface="페이퍼로지 4 Regular" charset="-127"/>
-                <a:ea typeface="페이퍼로지 4 Regular" charset="-127"/>
-                <a:cs typeface="Montserrat SemiBold"/>
-                <a:sym typeface="Montserrat SemiBold"/>
-              </a:rPr>
-              <a:t> </a:t>
-            </a:r>
-            <a:r>
-              <a:rPr lang="en-US" altLang="ko-KR">
-                <a:solidFill>
-                  <a:schemeClr val="dk1"/>
-                </a:solidFill>
-                <a:latin typeface="페이퍼로지 4 Regular" charset="-127"/>
-                <a:ea typeface="페이퍼로지 4 Regular" charset="-127"/>
-                <a:cs typeface="Montserrat SemiBold"/>
-                <a:sym typeface="Montserrat SemiBold"/>
-              </a:rPr>
-              <a:t>Key</a:t>
-            </a:r>
-            <a:r>
-              <a:rPr lang="ko-KR" altLang="en-US">
-                <a:solidFill>
-                  <a:schemeClr val="dk1"/>
-                </a:solidFill>
-                <a:latin typeface="페이퍼로지 4 Regular" charset="-127"/>
-                <a:ea typeface="페이퍼로지 4 Regular" charset="-127"/>
-                <a:cs typeface="Montserrat SemiBold"/>
-                <a:sym typeface="Montserrat SemiBold"/>
-              </a:rPr>
-              <a:t> 추출 및 식별 </a:t>
-            </a:r>
-            <a:br>
-              <a:rPr lang="en-US" altLang="ko-KR" sz="1200">
-                <a:solidFill>
-                  <a:schemeClr val="dk1"/>
-                </a:solidFill>
-                <a:latin typeface="페이퍼로지 4 Regular" charset="-127"/>
-                <a:ea typeface="페이퍼로지 4 Regular" charset="-127"/>
-                <a:cs typeface="Montserrat SemiBold"/>
-                <a:sym typeface="Montserrat SemiBold"/>
-              </a:rPr>
-            </a:br>
-            <a:br>
-              <a:rPr lang="en-US" altLang="ko-KR" sz="400">
-                <a:solidFill>
-                  <a:schemeClr val="dk1"/>
-                </a:solidFill>
-                <a:latin typeface="페이퍼로지 4 Regular" charset="-127"/>
-                <a:ea typeface="페이퍼로지 4 Regular" charset="-127"/>
-                <a:cs typeface="Montserrat SemiBold"/>
-                <a:sym typeface="Montserrat SemiBold"/>
-              </a:rPr>
-            </a:br>
-            <a:r>
-              <a:rPr lang="en-US" altLang="ko-KR" sz="1200">
-                <a:solidFill>
-                  <a:schemeClr val="tx1">
-                    <a:lumMod val="65000"/>
-                    <a:lumOff val="35000"/>
-                  </a:schemeClr>
-                </a:solidFill>
-                <a:latin typeface="페이퍼로지 4 Regular" charset="-127"/>
-                <a:ea typeface="페이퍼로지 4 Regular" charset="-127"/>
-                <a:cs typeface="Montserrat SemiBold"/>
-                <a:sym typeface="Montserrat SemiBold"/>
-              </a:rPr>
-              <a:t>Local State </a:t>
-            </a:r>
-            <a:r>
-              <a:rPr lang="ko-KR" altLang="en-US" sz="1200">
-                <a:solidFill>
-                  <a:schemeClr val="tx1">
-                    <a:lumMod val="65000"/>
-                    <a:lumOff val="35000"/>
-                  </a:schemeClr>
-                </a:solidFill>
-                <a:latin typeface="페이퍼로지 4 Regular" charset="-127"/>
-                <a:ea typeface="페이퍼로지 4 Regular" charset="-127"/>
-                <a:cs typeface="Montserrat SemiBold"/>
-                <a:sym typeface="Montserrat SemiBold"/>
-              </a:rPr>
-              <a:t>파일의 </a:t>
-            </a:r>
-            <a:r>
-              <a:rPr lang="en-US" altLang="ko-KR" sz="1200">
-                <a:solidFill>
-                  <a:schemeClr val="tx1">
-                    <a:lumMod val="65000"/>
-                    <a:lumOff val="35000"/>
-                  </a:schemeClr>
-                </a:solidFill>
-                <a:latin typeface="페이퍼로지 4 Regular" charset="-127"/>
-                <a:ea typeface="페이퍼로지 4 Regular" charset="-127"/>
-                <a:cs typeface="Montserrat SemiBold"/>
-                <a:sym typeface="Montserrat SemiBold"/>
-              </a:rPr>
-              <a:t>os_crypt.app_bound_encrypted_key </a:t>
-            </a:r>
-            <a:r>
-              <a:rPr lang="ko-KR" altLang="en-US" sz="1200">
-                <a:solidFill>
-                  <a:schemeClr val="tx1">
-                    <a:lumMod val="65000"/>
-                    <a:lumOff val="35000"/>
-                  </a:schemeClr>
-                </a:solidFill>
-                <a:latin typeface="페이퍼로지 4 Regular" charset="-127"/>
-                <a:ea typeface="페이퍼로지 4 Regular" charset="-127"/>
-                <a:cs typeface="Montserrat SemiBold"/>
-                <a:sym typeface="Montserrat SemiBold"/>
-              </a:rPr>
-              <a:t>값 추출</a:t>
-            </a:r>
-            <a:br>
-              <a:rPr lang="en-US" altLang="ko-KR" sz="1200">
-                <a:solidFill>
-                  <a:schemeClr val="tx1">
-                    <a:lumMod val="65000"/>
-                    <a:lumOff val="35000"/>
-                  </a:schemeClr>
-                </a:solidFill>
-                <a:latin typeface="페이퍼로지 4 Regular" charset="-127"/>
-                <a:ea typeface="페이퍼로지 4 Regular" charset="-127"/>
-                <a:cs typeface="Montserrat SemiBold"/>
-                <a:sym typeface="Montserrat SemiBold"/>
-              </a:rPr>
-            </a:br>
-            <a:br>
-              <a:rPr lang="en-US" altLang="ko-KR" sz="400">
-                <a:solidFill>
-                  <a:schemeClr val="tx1">
-                    <a:lumMod val="65000"/>
-                    <a:lumOff val="35000"/>
-                  </a:schemeClr>
-                </a:solidFill>
-                <a:latin typeface="페이퍼로지 4 Regular" charset="-127"/>
-                <a:ea typeface="페이퍼로지 4 Regular" charset="-127"/>
-                <a:cs typeface="Montserrat SemiBold"/>
-                <a:sym typeface="Montserrat SemiBold"/>
-              </a:rPr>
-            </a:br>
-            <a:r>
-              <a:rPr lang="en-US" altLang="ko-KR" sz="1200">
-                <a:solidFill>
-                  <a:schemeClr val="tx1">
-                    <a:lumMod val="65000"/>
-                    <a:lumOff val="35000"/>
-                  </a:schemeClr>
-                </a:solidFill>
-                <a:latin typeface="페이퍼로지 4 Regular" charset="-127"/>
-                <a:ea typeface="페이퍼로지 4 Regular" charset="-127"/>
-                <a:cs typeface="Montserrat SemiBold"/>
-                <a:sym typeface="Montserrat SemiBold"/>
-              </a:rPr>
-              <a:t>- </a:t>
-            </a:r>
-            <a:r>
-              <a:rPr lang="ko-KR" altLang="en-US" sz="1200">
-                <a:solidFill>
-                  <a:schemeClr val="tx1">
-                    <a:lumMod val="65000"/>
-                    <a:lumOff val="35000"/>
-                  </a:schemeClr>
-                </a:solidFill>
-                <a:latin typeface="페이퍼로지 4 Regular" charset="-127"/>
-                <a:ea typeface="페이퍼로지 4 Regular" charset="-127"/>
-                <a:cs typeface="Montserrat SemiBold"/>
-                <a:sym typeface="Montserrat SemiBold"/>
-              </a:rPr>
-              <a:t>특징</a:t>
-            </a:r>
-            <a:r>
-              <a:rPr lang="en-US" altLang="ko-KR" sz="1200">
-                <a:solidFill>
-                  <a:schemeClr val="tx1">
-                    <a:lumMod val="65000"/>
-                    <a:lumOff val="35000"/>
-                  </a:schemeClr>
-                </a:solidFill>
-                <a:latin typeface="페이퍼로지 4 Regular" charset="-127"/>
-                <a:ea typeface="페이퍼로지 4 Regular" charset="-127"/>
-                <a:cs typeface="Montserrat SemiBold"/>
-                <a:sym typeface="Montserrat SemiBold"/>
-              </a:rPr>
-              <a:t>: Base64 encoded, “ APPB ” 4 byte Magic Header included (Need to Pre-processing)</a:t>
-            </a:r>
-          </a:p>
-          <a:p>
-            <a:pPr marL="342900" lvl="2" indent="-342900">
-              <a:buSzPts val="1600"/>
-              <a:buAutoNum type="arabicPeriod"/>
-            </a:pPr>
-            <a:endParaRPr lang="en-US" altLang="ko-KR" sz="800">
-              <a:solidFill>
-                <a:schemeClr val="dk1"/>
-              </a:solidFill>
-              <a:latin typeface="페이퍼로지 4 Regular" charset="-127"/>
-              <a:ea typeface="페이퍼로지 4 Regular" charset="-127"/>
-              <a:cs typeface="Montserrat SemiBold"/>
-              <a:sym typeface="Montserrat SemiBold"/>
-            </a:endParaRPr>
-          </a:p>
-          <a:p>
-            <a:pPr marL="342900" lvl="2" indent="-342900">
-              <a:buSzPts val="1600"/>
-              <a:buAutoNum type="arabicPeriod"/>
-            </a:pPr>
-            <a:r>
-              <a:rPr lang="en-US" altLang="ko-KR">
-                <a:solidFill>
-                  <a:schemeClr val="dk1"/>
-                </a:solidFill>
-                <a:latin typeface="페이퍼로지 4 Regular" charset="-127"/>
-                <a:ea typeface="페이퍼로지 4 Regular" charset="-127"/>
-                <a:cs typeface="Montserrat SemiBold"/>
-                <a:sym typeface="Montserrat SemiBold"/>
-              </a:rPr>
-              <a:t>Elevation Service</a:t>
-            </a:r>
-            <a:r>
-              <a:rPr lang="ko-KR" altLang="en-US">
-                <a:solidFill>
-                  <a:schemeClr val="dk1"/>
-                </a:solidFill>
-                <a:latin typeface="페이퍼로지 4 Regular" charset="-127"/>
-                <a:ea typeface="페이퍼로지 4 Regular" charset="-127"/>
-                <a:cs typeface="Montserrat SemiBold"/>
-                <a:sym typeface="Montserrat SemiBold"/>
-              </a:rPr>
-              <a:t>를 이용한 키 복호화 </a:t>
-            </a:r>
-            <a:r>
-              <a:rPr lang="en-US" altLang="ko-KR">
-                <a:solidFill>
-                  <a:schemeClr val="dk1"/>
-                </a:solidFill>
-                <a:latin typeface="페이퍼로지 4 Regular" charset="-127"/>
-                <a:ea typeface="페이퍼로지 4 Regular" charset="-127"/>
-                <a:cs typeface="Montserrat SemiBold"/>
-                <a:sym typeface="Montserrat SemiBold"/>
-              </a:rPr>
-              <a:t>(COM </a:t>
-            </a:r>
-            <a:r>
-              <a:rPr lang="ko-KR" altLang="en-US">
-                <a:solidFill>
-                  <a:schemeClr val="dk1"/>
-                </a:solidFill>
-                <a:latin typeface="페이퍼로지 4 Regular" charset="-127"/>
-                <a:ea typeface="페이퍼로지 4 Regular" charset="-127"/>
-                <a:cs typeface="Montserrat SemiBold"/>
-                <a:sym typeface="Montserrat SemiBold"/>
-              </a:rPr>
-              <a:t>상호작용</a:t>
-            </a:r>
-            <a:r>
-              <a:rPr lang="en-US" altLang="ko-KR">
-                <a:solidFill>
-                  <a:schemeClr val="dk1"/>
-                </a:solidFill>
-                <a:latin typeface="페이퍼로지 4 Regular" charset="-127"/>
-                <a:ea typeface="페이퍼로지 4 Regular" charset="-127"/>
-                <a:cs typeface="Montserrat SemiBold"/>
-                <a:sym typeface="Montserrat SemiBold"/>
-              </a:rPr>
-              <a:t>) </a:t>
-            </a:r>
-            <a:br>
-              <a:rPr lang="en-US" altLang="ko-KR" sz="1200">
-                <a:solidFill>
-                  <a:schemeClr val="dk1"/>
-                </a:solidFill>
-                <a:latin typeface="페이퍼로지 4 Regular" charset="-127"/>
-                <a:ea typeface="페이퍼로지 4 Regular" charset="-127"/>
-                <a:cs typeface="Montserrat SemiBold"/>
-                <a:sym typeface="Montserrat SemiBold"/>
-              </a:rPr>
-            </a:br>
-            <a:br>
-              <a:rPr lang="en-US" altLang="ko-KR" sz="400">
-                <a:solidFill>
-                  <a:schemeClr val="dk1"/>
-                </a:solidFill>
-                <a:latin typeface="페이퍼로지 4 Regular" charset="-127"/>
-                <a:ea typeface="페이퍼로지 4 Regular" charset="-127"/>
-                <a:cs typeface="Montserrat SemiBold"/>
-                <a:sym typeface="Montserrat SemiBold"/>
-              </a:rPr>
-            </a:br>
-            <a:r>
-              <a:rPr lang="ko-KR" altLang="en-US" sz="1200">
-                <a:solidFill>
-                  <a:schemeClr val="tx1">
-                    <a:lumMod val="65000"/>
-                    <a:lumOff val="35000"/>
-                  </a:schemeClr>
-                </a:solidFill>
-                <a:latin typeface="페이퍼로지 4 Regular" charset="-127"/>
-                <a:ea typeface="페이퍼로지 4 Regular" charset="-127"/>
-                <a:cs typeface="Montserrat SemiBold"/>
-                <a:sym typeface="Montserrat SemiBold"/>
-              </a:rPr>
-              <a:t>암호화된 </a:t>
-            </a:r>
-            <a:r>
-              <a:rPr lang="en-US" altLang="ko-KR" sz="1200">
-                <a:solidFill>
-                  <a:schemeClr val="tx1">
-                    <a:lumMod val="65000"/>
-                    <a:lumOff val="35000"/>
-                  </a:schemeClr>
-                </a:solidFill>
-                <a:latin typeface="페이퍼로지 4 Regular" charset="-127"/>
-                <a:ea typeface="페이퍼로지 4 Regular" charset="-127"/>
-                <a:cs typeface="Montserrat SemiBold"/>
-                <a:sym typeface="Montserrat SemiBold"/>
-              </a:rPr>
-              <a:t>BLOB</a:t>
-            </a:r>
-            <a:r>
-              <a:rPr lang="ko-KR" altLang="en-US" sz="1200">
-                <a:solidFill>
-                  <a:schemeClr val="tx1">
-                    <a:lumMod val="65000"/>
-                    <a:lumOff val="35000"/>
-                  </a:schemeClr>
-                </a:solidFill>
-                <a:latin typeface="페이퍼로지 4 Regular" charset="-127"/>
-                <a:ea typeface="페이퍼로지 4 Regular" charset="-127"/>
-                <a:cs typeface="Montserrat SemiBold"/>
-                <a:sym typeface="Montserrat SemiBold"/>
-              </a:rPr>
-              <a:t>을 풀기 위해서 </a:t>
-            </a:r>
-            <a:r>
-              <a:rPr lang="en-US" altLang="ko-KR" sz="1200">
-                <a:solidFill>
-                  <a:schemeClr val="tx1">
-                    <a:lumMod val="65000"/>
-                    <a:lumOff val="35000"/>
-                  </a:schemeClr>
-                </a:solidFill>
-                <a:latin typeface="페이퍼로지 4 Regular" charset="-127"/>
-                <a:ea typeface="페이퍼로지 4 Regular" charset="-127"/>
-                <a:cs typeface="Montserrat SemiBold"/>
-                <a:sym typeface="Montserrat SemiBold"/>
-              </a:rPr>
-              <a:t>Elevation Service</a:t>
-            </a:r>
-            <a:r>
-              <a:rPr lang="ko-KR" altLang="en-US" sz="1200">
-                <a:solidFill>
-                  <a:schemeClr val="tx1">
-                    <a:lumMod val="65000"/>
-                    <a:lumOff val="35000"/>
-                  </a:schemeClr>
-                </a:solidFill>
-                <a:latin typeface="페이퍼로지 4 Regular" charset="-127"/>
-                <a:ea typeface="페이퍼로지 4 Regular" charset="-127"/>
-                <a:cs typeface="Montserrat SemiBold"/>
-                <a:sym typeface="Montserrat SemiBold"/>
-              </a:rPr>
-              <a:t>와 통신해야 하고</a:t>
-            </a:r>
-            <a:r>
-              <a:rPr lang="en-US" altLang="ko-KR" sz="1200">
-                <a:solidFill>
-                  <a:schemeClr val="tx1">
-                    <a:lumMod val="65000"/>
-                    <a:lumOff val="35000"/>
-                  </a:schemeClr>
-                </a:solidFill>
-                <a:latin typeface="페이퍼로지 4 Regular" charset="-127"/>
-                <a:ea typeface="페이퍼로지 4 Regular" charset="-127"/>
-                <a:cs typeface="Montserrat SemiBold"/>
-                <a:sym typeface="Montserrat SemiBold"/>
-              </a:rPr>
-              <a:t>, </a:t>
-            </a:r>
-            <a:r>
-              <a:rPr lang="ko-KR" altLang="en-US" sz="1200">
-                <a:solidFill>
-                  <a:schemeClr val="tx1">
-                    <a:lumMod val="65000"/>
-                    <a:lumOff val="35000"/>
-                  </a:schemeClr>
-                </a:solidFill>
-                <a:latin typeface="페이퍼로지 4 Regular" charset="-127"/>
-                <a:ea typeface="페이퍼로지 4 Regular" charset="-127"/>
-                <a:cs typeface="Montserrat SemiBold"/>
-                <a:sym typeface="Montserrat SemiBold"/>
-              </a:rPr>
-              <a:t>그를 위해 </a:t>
-            </a:r>
-            <a:r>
-              <a:rPr lang="en-US" altLang="ko-KR" sz="1200">
-                <a:solidFill>
-                  <a:schemeClr val="tx1">
-                    <a:lumMod val="65000"/>
-                    <a:lumOff val="35000"/>
-                  </a:schemeClr>
-                </a:solidFill>
-                <a:latin typeface="페이퍼로지 4 Regular" charset="-127"/>
-                <a:ea typeface="페이퍼로지 4 Regular" charset="-127"/>
-                <a:cs typeface="Montserrat SemiBold"/>
-                <a:sym typeface="Montserrat SemiBold"/>
-              </a:rPr>
-              <a:t>IElevator </a:t>
-            </a:r>
-            <a:r>
-              <a:rPr lang="ko-KR" altLang="en-US" sz="1200">
-                <a:solidFill>
-                  <a:schemeClr val="tx1">
-                    <a:lumMod val="65000"/>
-                    <a:lumOff val="35000"/>
-                  </a:schemeClr>
-                </a:solidFill>
-                <a:latin typeface="페이퍼로지 4 Regular" charset="-127"/>
-                <a:ea typeface="페이퍼로지 4 Regular" charset="-127"/>
-                <a:cs typeface="Montserrat SemiBold"/>
-                <a:sym typeface="Montserrat SemiBold"/>
-              </a:rPr>
-              <a:t>인터페이스 이용</a:t>
-            </a:r>
-            <a:endParaRPr lang="en-US" altLang="ko-KR" sz="1200">
-              <a:solidFill>
-                <a:schemeClr val="tx1">
-                  <a:lumMod val="65000"/>
-                  <a:lumOff val="35000"/>
-                </a:schemeClr>
-              </a:solidFill>
-              <a:latin typeface="페이퍼로지 4 Regular" charset="-127"/>
-              <a:ea typeface="페이퍼로지 4 Regular" charset="-127"/>
-              <a:cs typeface="Montserrat SemiBold"/>
-              <a:sym typeface="Montserrat SemiBold"/>
-            </a:endParaRPr>
-          </a:p>
-          <a:p>
-            <a:pPr lvl="3">
-              <a:buSzPts val="1600"/>
-            </a:pPr>
-            <a:endParaRPr lang="en-US" altLang="ko-KR" sz="400">
-              <a:solidFill>
-                <a:schemeClr val="tx1">
-                  <a:lumMod val="65000"/>
-                  <a:lumOff val="35000"/>
-                </a:schemeClr>
-              </a:solidFill>
-              <a:latin typeface="페이퍼로지 4 Regular" charset="-127"/>
-              <a:ea typeface="페이퍼로지 4 Regular" charset="-127"/>
-              <a:cs typeface="Montserrat SemiBold"/>
-              <a:sym typeface="Montserrat SemiBold"/>
-            </a:endParaRPr>
-          </a:p>
-          <a:p>
-            <a:pPr lvl="3" indent="542925">
-              <a:buSzPts val="1600"/>
-            </a:pPr>
-            <a:r>
-              <a:rPr lang="en-US" altLang="ko-KR" sz="1200">
-                <a:solidFill>
-                  <a:schemeClr val="tx1">
-                    <a:lumMod val="65000"/>
-                    <a:lumOff val="35000"/>
-                  </a:schemeClr>
-                </a:solidFill>
-                <a:latin typeface="페이퍼로지 4 Regular" charset="-127"/>
-                <a:ea typeface="페이퍼로지 4 Regular" charset="-127"/>
-                <a:cs typeface="Montserrat SemiBold"/>
-                <a:sym typeface="Montserrat SemiBold"/>
-              </a:rPr>
-              <a:t>- </a:t>
-            </a:r>
-            <a:r>
-              <a:rPr lang="ko-KR" altLang="en-US" sz="1200">
-                <a:solidFill>
-                  <a:schemeClr val="tx1">
-                    <a:lumMod val="65000"/>
-                    <a:lumOff val="35000"/>
-                  </a:schemeClr>
-                </a:solidFill>
-                <a:latin typeface="페이퍼로지 4 Regular" charset="-127"/>
-                <a:ea typeface="페이퍼로지 4 Regular" charset="-127"/>
-                <a:cs typeface="Montserrat SemiBold"/>
-                <a:sym typeface="Montserrat SemiBold"/>
-              </a:rPr>
-              <a:t>과정 </a:t>
-            </a:r>
-            <a:r>
-              <a:rPr lang="en-US" altLang="ko-KR" sz="1200">
-                <a:solidFill>
-                  <a:schemeClr val="tx1">
-                    <a:lumMod val="65000"/>
-                    <a:lumOff val="35000"/>
-                  </a:schemeClr>
-                </a:solidFill>
-                <a:latin typeface="페이퍼로지 4 Regular" charset="-127"/>
-                <a:ea typeface="페이퍼로지 4 Regular" charset="-127"/>
-                <a:cs typeface="Montserrat SemiBold"/>
-                <a:sym typeface="Montserrat SemiBold"/>
-              </a:rPr>
-              <a:t>1. </a:t>
-            </a:r>
-            <a:r>
-              <a:rPr lang="ko-KR" altLang="en-US" sz="1200">
-                <a:solidFill>
-                  <a:schemeClr val="tx1">
-                    <a:lumMod val="65000"/>
-                    <a:lumOff val="35000"/>
-                  </a:schemeClr>
-                </a:solidFill>
-                <a:latin typeface="페이퍼로지 4 Regular" charset="-127"/>
-                <a:ea typeface="페이퍼로지 4 Regular" charset="-127"/>
-                <a:cs typeface="Montserrat SemiBold"/>
-                <a:sym typeface="Montserrat SemiBold"/>
-              </a:rPr>
-              <a:t>인터페이스 호출 </a:t>
-            </a:r>
-            <a:endParaRPr lang="en-US" altLang="ko-KR" sz="1200">
-              <a:solidFill>
-                <a:schemeClr val="tx1">
-                  <a:lumMod val="65000"/>
-                  <a:lumOff val="35000"/>
-                </a:schemeClr>
-              </a:solidFill>
-              <a:latin typeface="페이퍼로지 4 Regular" charset="-127"/>
-              <a:ea typeface="페이퍼로지 4 Regular" charset="-127"/>
-              <a:cs typeface="Montserrat SemiBold"/>
-              <a:sym typeface="Montserrat SemiBold"/>
-            </a:endParaRPr>
-          </a:p>
-          <a:p>
-            <a:pPr lvl="3" indent="542925">
-              <a:buSzPts val="1600"/>
-            </a:pPr>
-            <a:r>
-              <a:rPr lang="en-US" altLang="ko-KR" sz="1200">
-                <a:solidFill>
-                  <a:schemeClr val="tx1">
-                    <a:lumMod val="65000"/>
-                    <a:lumOff val="35000"/>
-                  </a:schemeClr>
-                </a:solidFill>
-                <a:latin typeface="페이퍼로지 4 Regular" charset="-127"/>
-                <a:ea typeface="페이퍼로지 4 Regular" charset="-127"/>
-                <a:cs typeface="Montserrat SemiBold"/>
-                <a:sym typeface="Montserrat SemiBold"/>
-              </a:rPr>
-              <a:t>- </a:t>
-            </a:r>
-            <a:r>
-              <a:rPr lang="ko-KR" altLang="en-US" sz="1200">
-                <a:solidFill>
-                  <a:schemeClr val="tx1">
-                    <a:lumMod val="65000"/>
-                    <a:lumOff val="35000"/>
-                  </a:schemeClr>
-                </a:solidFill>
-                <a:latin typeface="페이퍼로지 4 Regular" charset="-127"/>
-                <a:ea typeface="페이퍼로지 4 Regular" charset="-127"/>
-                <a:cs typeface="Montserrat SemiBold"/>
-                <a:sym typeface="Montserrat SemiBold"/>
-              </a:rPr>
-              <a:t>과정 </a:t>
-            </a:r>
-            <a:r>
-              <a:rPr lang="en-US" altLang="ko-KR" sz="1200">
-                <a:solidFill>
-                  <a:schemeClr val="tx1">
-                    <a:lumMod val="65000"/>
-                    <a:lumOff val="35000"/>
-                  </a:schemeClr>
-                </a:solidFill>
-                <a:latin typeface="페이퍼로지 4 Regular" charset="-127"/>
-                <a:ea typeface="페이퍼로지 4 Regular" charset="-127"/>
-                <a:cs typeface="Montserrat SemiBold"/>
-                <a:sym typeface="Montserrat SemiBold"/>
-              </a:rPr>
-              <a:t>2. DecryptData </a:t>
-            </a:r>
-            <a:r>
-              <a:rPr lang="ko-KR" altLang="en-US" sz="1200">
-                <a:solidFill>
-                  <a:schemeClr val="tx1">
-                    <a:lumMod val="65000"/>
-                    <a:lumOff val="35000"/>
-                  </a:schemeClr>
-                </a:solidFill>
-                <a:latin typeface="페이퍼로지 4 Regular" charset="-127"/>
-                <a:ea typeface="페이퍼로지 4 Regular" charset="-127"/>
-                <a:cs typeface="Montserrat SemiBold"/>
-                <a:sym typeface="Montserrat SemiBold"/>
-              </a:rPr>
-              <a:t>메서드 실행</a:t>
-            </a:r>
-            <a:endParaRPr lang="en-US" altLang="ko-KR" sz="1200">
-              <a:solidFill>
-                <a:schemeClr val="tx1">
-                  <a:lumMod val="65000"/>
-                  <a:lumOff val="35000"/>
-                </a:schemeClr>
-              </a:solidFill>
-              <a:latin typeface="페이퍼로지 4 Regular" charset="-127"/>
-              <a:ea typeface="페이퍼로지 4 Regular" charset="-127"/>
-              <a:cs typeface="Montserrat SemiBold"/>
-              <a:sym typeface="Montserrat SemiBold"/>
-            </a:endParaRPr>
-          </a:p>
-          <a:p>
-            <a:pPr lvl="3" indent="542925">
-              <a:buSzPts val="1600"/>
-            </a:pPr>
-            <a:r>
-              <a:rPr lang="en-US" altLang="ko-KR" sz="1200">
-                <a:solidFill>
-                  <a:schemeClr val="tx1">
-                    <a:lumMod val="65000"/>
-                    <a:lumOff val="35000"/>
-                  </a:schemeClr>
-                </a:solidFill>
-                <a:latin typeface="페이퍼로지 4 Regular" charset="-127"/>
-                <a:ea typeface="페이퍼로지 4 Regular" charset="-127"/>
-                <a:cs typeface="Montserrat SemiBold"/>
-                <a:sym typeface="Montserrat SemiBold"/>
-              </a:rPr>
-              <a:t>- </a:t>
-            </a:r>
-            <a:r>
-              <a:rPr lang="ko-KR" altLang="en-US" sz="1200">
-                <a:solidFill>
-                  <a:schemeClr val="tx1">
-                    <a:lumMod val="65000"/>
-                    <a:lumOff val="35000"/>
-                  </a:schemeClr>
-                </a:solidFill>
-                <a:latin typeface="페이퍼로지 4 Regular" charset="-127"/>
-                <a:ea typeface="페이퍼로지 4 Regular" charset="-127"/>
-                <a:cs typeface="Montserrat SemiBold"/>
-                <a:sym typeface="Montserrat SemiBold"/>
-              </a:rPr>
-              <a:t>과정 </a:t>
-            </a:r>
-            <a:r>
-              <a:rPr lang="en-US" altLang="ko-KR" sz="1200">
-                <a:solidFill>
-                  <a:schemeClr val="tx1">
-                    <a:lumMod val="65000"/>
-                    <a:lumOff val="35000"/>
-                  </a:schemeClr>
-                </a:solidFill>
-                <a:latin typeface="페이퍼로지 4 Regular" charset="-127"/>
-                <a:ea typeface="페이퍼로지 4 Regular" charset="-127"/>
-                <a:cs typeface="Montserrat SemiBold"/>
-                <a:sym typeface="Montserrat SemiBold"/>
-              </a:rPr>
-              <a:t>3. </a:t>
-            </a:r>
-            <a:r>
-              <a:rPr lang="ko-KR" altLang="en-US" sz="1200">
-                <a:solidFill>
-                  <a:schemeClr val="tx1">
-                    <a:lumMod val="65000"/>
-                    <a:lumOff val="35000"/>
-                  </a:schemeClr>
-                </a:solidFill>
-                <a:latin typeface="페이퍼로지 4 Regular" charset="-127"/>
-                <a:ea typeface="페이퍼로지 4 Regular" charset="-127"/>
-                <a:cs typeface="Montserrat SemiBold"/>
-                <a:sym typeface="Montserrat SemiBold"/>
-              </a:rPr>
-              <a:t>경로 검증</a:t>
-            </a:r>
-            <a:br>
-              <a:rPr lang="en-US" altLang="ko-KR" sz="1200">
-                <a:solidFill>
-                  <a:schemeClr val="tx1">
-                    <a:lumMod val="65000"/>
-                    <a:lumOff val="35000"/>
-                  </a:schemeClr>
-                </a:solidFill>
-                <a:latin typeface="페이퍼로지 4 Regular" charset="-127"/>
-                <a:ea typeface="페이퍼로지 4 Regular" charset="-127"/>
-                <a:cs typeface="Montserrat SemiBold"/>
-                <a:sym typeface="Montserrat SemiBold"/>
-              </a:rPr>
-            </a:br>
-            <a:r>
-              <a:rPr lang="ko-KR" altLang="en-US" sz="400">
-                <a:solidFill>
-                  <a:schemeClr val="tx1">
-                    <a:lumMod val="65000"/>
-                    <a:lumOff val="35000"/>
-                  </a:schemeClr>
-                </a:solidFill>
-                <a:latin typeface="페이퍼로지 4 Regular" charset="-127"/>
-                <a:ea typeface="페이퍼로지 4 Regular" charset="-127"/>
-                <a:cs typeface="Montserrat SemiBold"/>
-                <a:sym typeface="Montserrat SemiBold"/>
-              </a:rPr>
-              <a:t> </a:t>
-            </a:r>
-            <a:endParaRPr lang="en-US" altLang="ko-KR" sz="400">
-              <a:solidFill>
-                <a:schemeClr val="tx1">
-                  <a:lumMod val="65000"/>
-                  <a:lumOff val="35000"/>
-                </a:schemeClr>
-              </a:solidFill>
-              <a:latin typeface="페이퍼로지 4 Regular" charset="-127"/>
-              <a:ea typeface="페이퍼로지 4 Regular" charset="-127"/>
-              <a:cs typeface="Montserrat SemiBold"/>
-              <a:sym typeface="Montserrat SemiBold"/>
-            </a:endParaRPr>
-          </a:p>
-          <a:p>
-            <a:pPr lvl="3" indent="542925">
-              <a:buSzPts val="1600"/>
-            </a:pPr>
-            <a:r>
-              <a:rPr lang="en-US" altLang="ko-KR" sz="1200">
-                <a:solidFill>
-                  <a:schemeClr val="tx1">
-                    <a:lumMod val="65000"/>
-                    <a:lumOff val="35000"/>
-                  </a:schemeClr>
-                </a:solidFill>
-                <a:latin typeface="페이퍼로지 4 Regular" charset="-127"/>
-                <a:ea typeface="페이퍼로지 4 Regular" charset="-127"/>
-                <a:cs typeface="Montserrat SemiBold"/>
-                <a:sym typeface="Montserrat SemiBold"/>
-              </a:rPr>
-              <a:t>- </a:t>
-            </a:r>
-            <a:r>
-              <a:rPr lang="ko-KR" altLang="en-US" sz="1200">
-                <a:solidFill>
-                  <a:schemeClr val="tx1">
-                    <a:lumMod val="65000"/>
-                    <a:lumOff val="35000"/>
-                  </a:schemeClr>
-                </a:solidFill>
-                <a:latin typeface="페이퍼로지 4 Regular" charset="-127"/>
-                <a:ea typeface="페이퍼로지 4 Regular" charset="-127"/>
-                <a:cs typeface="Montserrat SemiBold"/>
-                <a:sym typeface="Montserrat SemiBold"/>
-              </a:rPr>
-              <a:t>결과</a:t>
-            </a:r>
-            <a:r>
-              <a:rPr lang="en-US" altLang="ko-KR" sz="1200">
-                <a:solidFill>
-                  <a:schemeClr val="tx1">
-                    <a:lumMod val="65000"/>
-                    <a:lumOff val="35000"/>
-                  </a:schemeClr>
-                </a:solidFill>
-                <a:latin typeface="페이퍼로지 4 Regular" charset="-127"/>
-                <a:ea typeface="페이퍼로지 4 Regular" charset="-127"/>
-                <a:cs typeface="Montserrat SemiBold"/>
-                <a:sym typeface="Montserrat SemiBold"/>
-              </a:rPr>
-              <a:t>. AES Key </a:t>
-            </a:r>
-            <a:r>
-              <a:rPr lang="ko-KR" altLang="en-US" sz="1200">
-                <a:solidFill>
-                  <a:schemeClr val="tx1">
-                    <a:lumMod val="65000"/>
-                    <a:lumOff val="35000"/>
-                  </a:schemeClr>
-                </a:solidFill>
-                <a:latin typeface="페이퍼로지 4 Regular" charset="-127"/>
-                <a:ea typeface="페이퍼로지 4 Regular" charset="-127"/>
-                <a:cs typeface="Montserrat SemiBold"/>
-                <a:sym typeface="Montserrat SemiBold"/>
-              </a:rPr>
-              <a:t>획득</a:t>
-            </a:r>
-            <a:endParaRPr lang="en-US" altLang="ko-KR" sz="1200">
-              <a:solidFill>
-                <a:schemeClr val="tx1">
-                  <a:lumMod val="65000"/>
-                  <a:lumOff val="35000"/>
-                </a:schemeClr>
-              </a:solidFill>
-              <a:latin typeface="페이퍼로지 4 Regular" charset="-127"/>
-              <a:ea typeface="페이퍼로지 4 Regular" charset="-127"/>
-              <a:cs typeface="Montserrat SemiBold"/>
-              <a:sym typeface="Montserrat SemiBold"/>
-            </a:endParaRPr>
-          </a:p>
-          <a:p>
-            <a:pPr lvl="4">
-              <a:buSzPts val="1600"/>
-            </a:pPr>
-            <a:r>
-              <a:rPr lang="en-US" altLang="ko-KR" sz="1200">
-                <a:solidFill>
-                  <a:schemeClr val="dk1"/>
-                </a:solidFill>
-                <a:latin typeface="페이퍼로지 4 Regular" charset="-127"/>
-                <a:ea typeface="페이퍼로지 4 Regular" charset="-127"/>
-                <a:cs typeface="Montserrat SemiBold"/>
-                <a:sym typeface="Montserrat SemiBold"/>
-              </a:rPr>
-              <a:t>	</a:t>
-            </a:r>
-            <a:endParaRPr lang="en-US" altLang="ko-KR" sz="800">
-              <a:solidFill>
-                <a:schemeClr val="dk1"/>
-              </a:solidFill>
-              <a:latin typeface="페이퍼로지 4 Regular" charset="-127"/>
-              <a:ea typeface="페이퍼로지 4 Regular" charset="-127"/>
-              <a:cs typeface="Montserrat SemiBold"/>
-              <a:sym typeface="Montserrat SemiBold"/>
-            </a:endParaRPr>
-          </a:p>
-          <a:p>
-            <a:pPr marL="342900" lvl="2" indent="-342900">
-              <a:buSzPts val="1600"/>
-              <a:buAutoNum type="arabicPeriod"/>
-            </a:pPr>
-            <a:r>
-              <a:rPr lang="en-US" altLang="ko-KR">
-                <a:solidFill>
-                  <a:schemeClr val="dk1"/>
-                </a:solidFill>
-                <a:latin typeface="페이퍼로지 4 Regular" charset="-127"/>
-                <a:ea typeface="페이퍼로지 4 Regular" charset="-127"/>
-                <a:cs typeface="Montserrat SemiBold"/>
-                <a:sym typeface="Montserrat SemiBold"/>
-              </a:rPr>
-              <a:t>AES-256-GCM </a:t>
-            </a:r>
-            <a:r>
-              <a:rPr lang="ko-KR" altLang="en-US">
-                <a:solidFill>
-                  <a:schemeClr val="dk1"/>
-                </a:solidFill>
-                <a:latin typeface="페이퍼로지 4 Regular" charset="-127"/>
-                <a:ea typeface="페이퍼로지 4 Regular" charset="-127"/>
-                <a:cs typeface="Montserrat SemiBold"/>
-                <a:sym typeface="Montserrat SemiBold"/>
-              </a:rPr>
-              <a:t>적용 및 비밀번호 산출 </a:t>
-            </a:r>
-            <a:br>
-              <a:rPr lang="en-US" altLang="ko-KR" sz="1200">
-                <a:solidFill>
-                  <a:schemeClr val="dk1"/>
-                </a:solidFill>
-                <a:latin typeface="페이퍼로지 4 Regular" charset="-127"/>
-                <a:ea typeface="페이퍼로지 4 Regular" charset="-127"/>
-                <a:cs typeface="Montserrat SemiBold"/>
-                <a:sym typeface="Montserrat SemiBold"/>
-              </a:rPr>
-            </a:br>
-            <a:br>
-              <a:rPr lang="en-US" altLang="ko-KR" sz="400">
-                <a:solidFill>
-                  <a:schemeClr val="dk1"/>
-                </a:solidFill>
-                <a:latin typeface="페이퍼로지 4 Regular" charset="-127"/>
-                <a:ea typeface="페이퍼로지 4 Regular" charset="-127"/>
-                <a:cs typeface="Montserrat SemiBold"/>
-                <a:sym typeface="Montserrat SemiBold"/>
-              </a:rPr>
-            </a:br>
-            <a:r>
-              <a:rPr lang="en-US" altLang="ko-KR" sz="1200">
-                <a:solidFill>
-                  <a:schemeClr val="tx1">
-                    <a:lumMod val="65000"/>
-                    <a:lumOff val="35000"/>
-                  </a:schemeClr>
-                </a:solidFill>
-                <a:latin typeface="페이퍼로지 4 Regular" charset="-127"/>
-                <a:ea typeface="페이퍼로지 4 Regular" charset="-127"/>
-                <a:cs typeface="Montserrat SemiBold"/>
-                <a:sym typeface="Montserrat SemiBold"/>
-              </a:rPr>
-              <a:t>Decrypt </a:t>
-            </a:r>
-            <a:r>
-              <a:rPr lang="ko-KR" altLang="en-US" sz="1200">
-                <a:solidFill>
-                  <a:schemeClr val="tx1">
-                    <a:lumMod val="65000"/>
-                    <a:lumOff val="35000"/>
-                  </a:schemeClr>
-                </a:solidFill>
-                <a:latin typeface="페이퍼로지 4 Regular" charset="-127"/>
-                <a:ea typeface="페이퍼로지 4 Regular" charset="-127"/>
-                <a:cs typeface="Montserrat SemiBold"/>
-                <a:sym typeface="Montserrat SemiBold"/>
-              </a:rPr>
-              <a:t>연산</a:t>
-            </a:r>
-            <a:r>
-              <a:rPr lang="en-US" altLang="ko-KR" sz="1200">
-                <a:solidFill>
-                  <a:schemeClr val="tx1">
-                    <a:lumMod val="65000"/>
-                    <a:lumOff val="35000"/>
-                  </a:schemeClr>
-                </a:solidFill>
-                <a:latin typeface="페이퍼로지 4 Regular" charset="-127"/>
-                <a:ea typeface="페이퍼로지 4 Regular" charset="-127"/>
-                <a:cs typeface="Montserrat SemiBold"/>
-                <a:sym typeface="Montserrat SemiBold"/>
-              </a:rPr>
-              <a:t>: Nonce(12 byte) + ciphertext (var)+ Tag(16 byte)</a:t>
-            </a:r>
-            <a:br>
-              <a:rPr lang="en-US" altLang="ko-KR" sz="1200">
-                <a:solidFill>
-                  <a:schemeClr val="tx1">
-                    <a:lumMod val="65000"/>
-                    <a:lumOff val="35000"/>
-                  </a:schemeClr>
-                </a:solidFill>
-                <a:latin typeface="페이퍼로지 4 Regular" charset="-127"/>
-                <a:ea typeface="페이퍼로지 4 Regular" charset="-127"/>
-                <a:cs typeface="Montserrat SemiBold"/>
-                <a:sym typeface="Montserrat SemiBold"/>
-              </a:rPr>
-            </a:br>
-            <a:br>
-              <a:rPr lang="en-US" altLang="ko-KR" sz="400">
-                <a:solidFill>
-                  <a:schemeClr val="tx1">
-                    <a:lumMod val="65000"/>
-                    <a:lumOff val="35000"/>
-                  </a:schemeClr>
-                </a:solidFill>
-                <a:latin typeface="페이퍼로지 4 Regular" charset="-127"/>
-                <a:ea typeface="페이퍼로지 4 Regular" charset="-127"/>
-                <a:cs typeface="Montserrat SemiBold"/>
-                <a:sym typeface="Montserrat SemiBold"/>
-              </a:rPr>
-            </a:br>
-            <a:r>
-              <a:rPr lang="en-US" altLang="ko-KR" sz="1200">
-                <a:solidFill>
-                  <a:schemeClr val="tx1">
-                    <a:lumMod val="65000"/>
-                    <a:lumOff val="35000"/>
-                  </a:schemeClr>
-                </a:solidFill>
-                <a:latin typeface="페이퍼로지 4 Regular" charset="-127"/>
-                <a:ea typeface="페이퍼로지 4 Regular" charset="-127"/>
-                <a:cs typeface="Montserrat SemiBold"/>
-                <a:sym typeface="Montserrat SemiBold"/>
-              </a:rPr>
-              <a:t>&gt; AES-GCM </a:t>
-            </a:r>
-            <a:r>
-              <a:rPr lang="ko-KR" altLang="en-US" sz="1200">
-                <a:solidFill>
-                  <a:schemeClr val="tx1">
-                    <a:lumMod val="65000"/>
-                    <a:lumOff val="35000"/>
-                  </a:schemeClr>
-                </a:solidFill>
-                <a:latin typeface="페이퍼로지 4 Regular" charset="-127"/>
-                <a:ea typeface="페이퍼로지 4 Regular" charset="-127"/>
-                <a:cs typeface="Montserrat SemiBold"/>
-                <a:sym typeface="Montserrat SemiBold"/>
-              </a:rPr>
-              <a:t>의 특성에 따라 </a:t>
-            </a:r>
-            <a:r>
-              <a:rPr lang="en-US" altLang="ko-KR" sz="1200">
-                <a:solidFill>
-                  <a:schemeClr val="tx1">
-                    <a:lumMod val="65000"/>
-                    <a:lumOff val="35000"/>
-                  </a:schemeClr>
-                </a:solidFill>
-                <a:latin typeface="페이퍼로지 4 Regular" charset="-127"/>
-                <a:ea typeface="페이퍼로지 4 Regular" charset="-127"/>
-                <a:cs typeface="Montserrat SemiBold"/>
-                <a:sym typeface="Montserrat SemiBold"/>
-              </a:rPr>
-              <a:t>Tag</a:t>
-            </a:r>
-            <a:r>
-              <a:rPr lang="ko-KR" altLang="en-US" sz="1200">
-                <a:solidFill>
-                  <a:schemeClr val="tx1">
-                    <a:lumMod val="65000"/>
-                    <a:lumOff val="35000"/>
-                  </a:schemeClr>
-                </a:solidFill>
-                <a:latin typeface="페이퍼로지 4 Regular" charset="-127"/>
-                <a:ea typeface="페이퍼로지 4 Regular" charset="-127"/>
-                <a:cs typeface="Montserrat SemiBold"/>
-                <a:sym typeface="Montserrat SemiBold"/>
-              </a:rPr>
-              <a:t>가 일치하면 데이터의 무결성이 확인되고</a:t>
-            </a:r>
-            <a:r>
-              <a:rPr lang="en-US" altLang="ko-KR" sz="1200">
-                <a:solidFill>
-                  <a:schemeClr val="tx1">
-                    <a:lumMod val="65000"/>
-                    <a:lumOff val="35000"/>
-                  </a:schemeClr>
-                </a:solidFill>
-                <a:latin typeface="페이퍼로지 4 Regular" charset="-127"/>
-                <a:ea typeface="페이퍼로지 4 Regular" charset="-127"/>
-                <a:cs typeface="Montserrat SemiBold"/>
-                <a:sym typeface="Montserrat SemiBold"/>
-              </a:rPr>
-              <a:t>, </a:t>
-            </a:r>
-            <a:br>
-              <a:rPr lang="en-US" altLang="ko-KR" sz="1200">
-                <a:solidFill>
-                  <a:schemeClr val="tx1">
-                    <a:lumMod val="65000"/>
-                    <a:lumOff val="35000"/>
-                  </a:schemeClr>
-                </a:solidFill>
-                <a:latin typeface="페이퍼로지 4 Regular" charset="-127"/>
-                <a:ea typeface="페이퍼로지 4 Regular" charset="-127"/>
-                <a:cs typeface="Montserrat SemiBold"/>
-                <a:sym typeface="Montserrat SemiBold"/>
-              </a:rPr>
-            </a:br>
-            <a:r>
-              <a:rPr lang="en-US" altLang="ko-KR" sz="1200">
-                <a:solidFill>
-                  <a:schemeClr val="tx1">
-                    <a:lumMod val="65000"/>
-                    <a:lumOff val="35000"/>
-                  </a:schemeClr>
-                </a:solidFill>
-                <a:latin typeface="페이퍼로지 4 Regular" charset="-127"/>
-                <a:ea typeface="페이퍼로지 4 Regular" charset="-127"/>
-                <a:cs typeface="Montserrat SemiBold"/>
-                <a:sym typeface="Montserrat SemiBold"/>
-              </a:rPr>
-              <a:t>		</a:t>
-            </a:r>
-            <a:r>
-              <a:rPr lang="ko-KR" altLang="en-US" sz="1200">
-                <a:solidFill>
-                  <a:schemeClr val="tx1">
-                    <a:lumMod val="65000"/>
-                    <a:lumOff val="35000"/>
-                  </a:schemeClr>
-                </a:solidFill>
-                <a:latin typeface="페이퍼로지 4 Regular" charset="-127"/>
-                <a:ea typeface="페이퍼로지 4 Regular" charset="-127"/>
-                <a:cs typeface="Montserrat SemiBold"/>
-                <a:sym typeface="Montserrat SemiBold"/>
-              </a:rPr>
-              <a:t>성공적으로 복호화된 </a:t>
-            </a:r>
-            <a:r>
-              <a:rPr lang="en-US" altLang="ko-KR" sz="1200">
-                <a:solidFill>
-                  <a:schemeClr val="tx1">
-                    <a:lumMod val="65000"/>
-                    <a:lumOff val="35000"/>
-                  </a:schemeClr>
-                </a:solidFill>
-                <a:latin typeface="페이퍼로지 4 Regular" charset="-127"/>
-                <a:ea typeface="페이퍼로지 4 Regular" charset="-127"/>
-                <a:cs typeface="Montserrat SemiBold"/>
-                <a:sym typeface="Montserrat SemiBold"/>
-              </a:rPr>
-              <a:t>plaintext </a:t>
-            </a:r>
-            <a:r>
-              <a:rPr lang="ko-KR" altLang="en-US" sz="1200">
-                <a:solidFill>
-                  <a:schemeClr val="tx1">
-                    <a:lumMod val="65000"/>
-                    <a:lumOff val="35000"/>
-                  </a:schemeClr>
-                </a:solidFill>
-                <a:latin typeface="페이퍼로지 4 Regular" charset="-127"/>
-                <a:ea typeface="페이퍼로지 4 Regular" charset="-127"/>
-                <a:cs typeface="Montserrat SemiBold"/>
-                <a:sym typeface="Montserrat SemiBold"/>
-              </a:rPr>
-              <a:t>비밀번호를 알 수 있게 된다</a:t>
-            </a:r>
-            <a:r>
-              <a:rPr lang="en-US" altLang="ko-KR" sz="1200">
-                <a:solidFill>
-                  <a:schemeClr val="tx1">
-                    <a:lumMod val="65000"/>
-                    <a:lumOff val="35000"/>
-                  </a:schemeClr>
-                </a:solidFill>
-                <a:latin typeface="페이퍼로지 4 Regular" charset="-127"/>
-                <a:ea typeface="페이퍼로지 4 Regular" charset="-127"/>
-                <a:cs typeface="Montserrat SemiBold"/>
-                <a:sym typeface="Montserrat SemiBold"/>
-              </a:rPr>
-              <a:t>. </a:t>
-            </a:r>
-          </a:p>
-        </p:txBody>
-      </p:sp>
-      <p:sp>
-        <p:nvSpPr>
-          <p:cNvPr id="170" name="Google Shape;170;p19">
-            <a:extLst>
-              <a:ext uri="{FF2B5EF4-FFF2-40B4-BE49-F238E27FC236}">
-                <a16:creationId xmlns:a16="http://schemas.microsoft.com/office/drawing/2014/main" id="{12B1E83D-1D46-73B0-058B-1C67AA252331}"/>
-              </a:ext>
-            </a:extLst>
-          </p:cNvPr>
-          <p:cNvSpPr txBox="1">
-            <a:spLocks noGrp="1"/>
-          </p:cNvSpPr>
-          <p:nvPr>
-            <p:ph type="title"/>
-          </p:nvPr>
-        </p:nvSpPr>
-        <p:spPr>
-          <a:xfrm>
-            <a:off x="452550" y="121018"/>
-            <a:ext cx="8238900" cy="561600"/>
-          </a:xfrm>
-          <a:prstGeom prst="rect">
-            <a:avLst/>
-          </a:prstGeom>
-          <a:ln>
-            <a:noFill/>
-          </a:ln>
-        </p:spPr>
-        <p:txBody>
-          <a:bodyPr spcFirstLastPara="1" wrap="square" lIns="91425" tIns="91425" rIns="91425" bIns="91425" anchor="t" anchorCtr="0">
-            <a:noAutofit/>
-          </a:bodyPr>
-          <a:lstStyle/>
-          <a:p>
-            <a:pPr lvl="0"/>
-            <a:r>
-              <a:rPr lang="en" altLang="ko-KR">
-                <a:latin typeface="페이퍼로지 6 SemiBold" pitchFamily="2" charset="-127"/>
-                <a:ea typeface="페이퍼로지 6 SemiBold" pitchFamily="2" charset="-127"/>
-              </a:rPr>
-              <a:t>Overview</a:t>
-            </a:r>
-            <a:endParaRPr dirty="0"/>
-          </a:p>
-        </p:txBody>
-      </p:sp>
-      <p:cxnSp>
-        <p:nvCxnSpPr>
-          <p:cNvPr id="3" name="직선 연결선 2">
-            <a:extLst>
-              <a:ext uri="{FF2B5EF4-FFF2-40B4-BE49-F238E27FC236}">
-                <a16:creationId xmlns:a16="http://schemas.microsoft.com/office/drawing/2014/main" id="{87CF54AC-52F4-8855-D17B-E93978B2CD24}"/>
-              </a:ext>
-            </a:extLst>
-          </p:cNvPr>
-          <p:cNvCxnSpPr/>
-          <p:nvPr/>
-        </p:nvCxnSpPr>
-        <p:spPr>
-          <a:xfrm>
-            <a:off x="387275" y="763285"/>
-            <a:ext cx="8240358" cy="0"/>
-          </a:xfrm>
-          <a:prstGeom prst="line">
-            <a:avLst/>
-          </a:prstGeom>
-          <a:ln w="38100">
-            <a:solidFill>
-              <a:srgbClr val="51EEBC"/>
-            </a:solidFill>
-          </a:ln>
-        </p:spPr>
-        <p:style>
-          <a:lnRef idx="1">
-            <a:schemeClr val="accent1"/>
-          </a:lnRef>
-          <a:fillRef idx="0">
-            <a:schemeClr val="accent1"/>
-          </a:fillRef>
-          <a:effectRef idx="0">
-            <a:schemeClr val="accent1"/>
-          </a:effectRef>
-          <a:fontRef idx="minor">
-            <a:schemeClr val="tx1"/>
-          </a:fontRef>
-        </p:style>
-      </p:cxnSp>
-      <p:pic>
-        <p:nvPicPr>
-          <p:cNvPr id="4" name="그림 3" descr="텍스트, 폰트, 스크린샷, 번호이(가) 표시된 사진&#10;&#10;AI 생성 콘텐츠는 정확하지 않을 수 있습니다.">
-            <a:extLst>
-              <a:ext uri="{FF2B5EF4-FFF2-40B4-BE49-F238E27FC236}">
-                <a16:creationId xmlns:a16="http://schemas.microsoft.com/office/drawing/2014/main" id="{B1CE8F26-3A77-F0CD-6886-A47E6598FDCA}"/>
-              </a:ext>
-            </a:extLst>
-          </p:cNvPr>
-          <p:cNvPicPr>
-            <a:picLocks noChangeAspect="1"/>
-          </p:cNvPicPr>
-          <p:nvPr/>
-        </p:nvPicPr>
-        <p:blipFill>
-          <a:blip r:embed="rId3"/>
-          <a:stretch>
-            <a:fillRect/>
-          </a:stretch>
-        </p:blipFill>
-        <p:spPr>
-          <a:xfrm>
-            <a:off x="4284434" y="885617"/>
-            <a:ext cx="2543454" cy="720645"/>
-          </a:xfrm>
-          <a:prstGeom prst="rect">
-            <a:avLst/>
-          </a:prstGeom>
-        </p:spPr>
-      </p:pic>
-    </p:spTree>
-    <p:extLst>
-      <p:ext uri="{BB962C8B-B14F-4D97-AF65-F5344CB8AC3E}">
-        <p14:creationId xmlns:p14="http://schemas.microsoft.com/office/powerpoint/2010/main" val="1408135619"/>
       </p:ext>
     </p:extLst>
   </p:cSld>
